--- a/Aufbau_der_Erde.pptx
+++ b/Aufbau_der_Erde.pptx
@@ -3102,6 +3102,30 @@
         <p:nvPr/>
       </p:nvGrpSpPr>
       <p:grpSpPr/>
+      <p:pic>
+        <p:nvPicPr>
+          <p:cNvPr id="15" name="Picture 14" descr="image.png"/>
+          <p:cNvPicPr>
+            <a:picLocks noChangeAspect="1"/>
+          </p:cNvPicPr>
+          <p:nvPr/>
+        </p:nvPicPr>
+        <p:blipFill>
+          <a:blip r:embed="rId2"/>
+          <a:stretch>
+            <a:fillRect/>
+          </a:stretch>
+        </p:blipFill>
+        <p:spPr>
+          <a:xfrm>
+            <a:off x="5486400" y="822960"/>
+            <a:ext cx="3474720" cy="3672468"/>
+          </a:xfrm>
+          <a:prstGeom prst="rect">
+            <a:avLst/>
+          </a:prstGeom>
+        </p:spPr>
+      </p:pic>
       <p:sp>
         <p:nvSpPr>
           <p:cNvPr id="2" name="Rectangle 1"/>
@@ -3647,6 +3671,30 @@
         <p:nvPr/>
       </p:nvGrpSpPr>
       <p:grpSpPr/>
+      <p:pic>
+        <p:nvPicPr>
+          <p:cNvPr id="31" name="Picture 30" descr="image.png"/>
+          <p:cNvPicPr>
+            <a:picLocks noChangeAspect="1"/>
+          </p:cNvPicPr>
+          <p:nvPr/>
+        </p:nvPicPr>
+        <p:blipFill>
+          <a:blip r:embed="rId2"/>
+          <a:stretch>
+            <a:fillRect/>
+          </a:stretch>
+        </p:blipFill>
+        <p:spPr>
+          <a:xfrm>
+            <a:off x="5486400" y="822960"/>
+            <a:ext cx="3474720" cy="3645608"/>
+          </a:xfrm>
+          <a:prstGeom prst="rect">
+            <a:avLst/>
+          </a:prstGeom>
+        </p:spPr>
+      </p:pic>
       <p:sp>
         <p:nvSpPr>
           <p:cNvPr id="2" name="Rectangle 1"/>
@@ -4785,6 +4833,30 @@
         <p:nvPr/>
       </p:nvGrpSpPr>
       <p:grpSpPr/>
+      <p:pic>
+        <p:nvPicPr>
+          <p:cNvPr id="22" name="Picture 21" descr="image.png"/>
+          <p:cNvPicPr>
+            <a:picLocks noChangeAspect="1"/>
+          </p:cNvPicPr>
+          <p:nvPr/>
+        </p:nvPicPr>
+        <p:blipFill>
+          <a:blip r:embed="rId2"/>
+          <a:stretch>
+            <a:fillRect/>
+          </a:stretch>
+        </p:blipFill>
+        <p:spPr>
+          <a:xfrm>
+            <a:off x="5303520" y="1371600"/>
+            <a:ext cx="3657600" cy="2406473"/>
+          </a:xfrm>
+          <a:prstGeom prst="rect">
+            <a:avLst/>
+          </a:prstGeom>
+        </p:spPr>
+      </p:pic>
       <p:sp>
         <p:nvSpPr>
           <p:cNvPr id="2" name="Rectangle 1"/>
@@ -5600,6 +5672,30 @@
         <p:nvPr/>
       </p:nvGrpSpPr>
       <p:grpSpPr/>
+      <p:pic>
+        <p:nvPicPr>
+          <p:cNvPr id="22" name="Picture 21" descr="image.png"/>
+          <p:cNvPicPr>
+            <a:picLocks noChangeAspect="1"/>
+          </p:cNvPicPr>
+          <p:nvPr/>
+        </p:nvPicPr>
+        <p:blipFill>
+          <a:blip r:embed="rId2"/>
+          <a:stretch>
+            <a:fillRect/>
+          </a:stretch>
+        </p:blipFill>
+        <p:spPr>
+          <a:xfrm>
+            <a:off x="5212080" y="1371600"/>
+            <a:ext cx="3657600" cy="3042488"/>
+          </a:xfrm>
+          <a:prstGeom prst="rect">
+            <a:avLst/>
+          </a:prstGeom>
+        </p:spPr>
+      </p:pic>
       <p:sp>
         <p:nvSpPr>
           <p:cNvPr id="2" name="Rectangle 1"/>
@@ -6417,6 +6513,30 @@
         <p:nvPr/>
       </p:nvGrpSpPr>
       <p:grpSpPr/>
+      <p:pic>
+        <p:nvPicPr>
+          <p:cNvPr id="22" name="Picture 21" descr="image.png"/>
+          <p:cNvPicPr>
+            <a:picLocks noChangeAspect="1"/>
+          </p:cNvPicPr>
+          <p:nvPr/>
+        </p:nvPicPr>
+        <p:blipFill>
+          <a:blip r:embed="rId2"/>
+          <a:stretch>
+            <a:fillRect/>
+          </a:stretch>
+        </p:blipFill>
+        <p:spPr>
+          <a:xfrm>
+            <a:off x="5577840" y="731520"/>
+            <a:ext cx="3291840" cy="4095248"/>
+          </a:xfrm>
+          <a:prstGeom prst="rect">
+            <a:avLst/>
+          </a:prstGeom>
+        </p:spPr>
+      </p:pic>
       <p:sp>
         <p:nvSpPr>
           <p:cNvPr id="2" name="Rectangle 1"/>
@@ -9756,6 +9876,30 @@
         <p:nvPr/>
       </p:nvGrpSpPr>
       <p:grpSpPr/>
+      <p:pic>
+        <p:nvPicPr>
+          <p:cNvPr id="14" name="Picture 13" descr="image.png"/>
+          <p:cNvPicPr>
+            <a:picLocks noChangeAspect="1"/>
+          </p:cNvPicPr>
+          <p:nvPr/>
+        </p:nvPicPr>
+        <p:blipFill>
+          <a:blip r:embed="rId2"/>
+          <a:stretch>
+            <a:fillRect/>
+          </a:stretch>
+        </p:blipFill>
+        <p:spPr>
+          <a:xfrm>
+            <a:off x="3200400" y="1371600"/>
+            <a:ext cx="2743200" cy="2899317"/>
+          </a:xfrm>
+          <a:prstGeom prst="rect">
+            <a:avLst/>
+          </a:prstGeom>
+        </p:spPr>
+      </p:pic>
       <p:sp>
         <p:nvSpPr>
           <p:cNvPr id="2" name="Rectangle 1"/>

--- a/Aufbau_der_Erde.pptx
+++ b/Aufbau_der_Erde.pptx
@@ -3102,30 +3102,6 @@
         <p:nvPr/>
       </p:nvGrpSpPr>
       <p:grpSpPr/>
-      <p:pic>
-        <p:nvPicPr>
-          <p:cNvPr id="15" name="Picture 14" descr="image.png"/>
-          <p:cNvPicPr>
-            <a:picLocks noChangeAspect="1"/>
-          </p:cNvPicPr>
-          <p:nvPr/>
-        </p:nvPicPr>
-        <p:blipFill>
-          <a:blip r:embed="rId2"/>
-          <a:stretch>
-            <a:fillRect/>
-          </a:stretch>
-        </p:blipFill>
-        <p:spPr>
-          <a:xfrm>
-            <a:off x="5486400" y="822960"/>
-            <a:ext cx="3474720" cy="3672468"/>
-          </a:xfrm>
-          <a:prstGeom prst="rect">
-            <a:avLst/>
-          </a:prstGeom>
-        </p:spPr>
-      </p:pic>
       <p:sp>
         <p:nvSpPr>
           <p:cNvPr id="2" name="Rectangle 1"/>
@@ -3671,30 +3647,6 @@
         <p:nvPr/>
       </p:nvGrpSpPr>
       <p:grpSpPr/>
-      <p:pic>
-        <p:nvPicPr>
-          <p:cNvPr id="31" name="Picture 30" descr="image.png"/>
-          <p:cNvPicPr>
-            <a:picLocks noChangeAspect="1"/>
-          </p:cNvPicPr>
-          <p:nvPr/>
-        </p:nvPicPr>
-        <p:blipFill>
-          <a:blip r:embed="rId2"/>
-          <a:stretch>
-            <a:fillRect/>
-          </a:stretch>
-        </p:blipFill>
-        <p:spPr>
-          <a:xfrm>
-            <a:off x="5486400" y="822960"/>
-            <a:ext cx="3474720" cy="3645608"/>
-          </a:xfrm>
-          <a:prstGeom prst="rect">
-            <a:avLst/>
-          </a:prstGeom>
-        </p:spPr>
-      </p:pic>
       <p:sp>
         <p:nvSpPr>
           <p:cNvPr id="2" name="Rectangle 1"/>
@@ -4833,30 +4785,6 @@
         <p:nvPr/>
       </p:nvGrpSpPr>
       <p:grpSpPr/>
-      <p:pic>
-        <p:nvPicPr>
-          <p:cNvPr id="22" name="Picture 21" descr="image.png"/>
-          <p:cNvPicPr>
-            <a:picLocks noChangeAspect="1"/>
-          </p:cNvPicPr>
-          <p:nvPr/>
-        </p:nvPicPr>
-        <p:blipFill>
-          <a:blip r:embed="rId2"/>
-          <a:stretch>
-            <a:fillRect/>
-          </a:stretch>
-        </p:blipFill>
-        <p:spPr>
-          <a:xfrm>
-            <a:off x="5303520" y="1371600"/>
-            <a:ext cx="3657600" cy="2406473"/>
-          </a:xfrm>
-          <a:prstGeom prst="rect">
-            <a:avLst/>
-          </a:prstGeom>
-        </p:spPr>
-      </p:pic>
       <p:sp>
         <p:nvSpPr>
           <p:cNvPr id="2" name="Rectangle 1"/>
@@ -5672,30 +5600,6 @@
         <p:nvPr/>
       </p:nvGrpSpPr>
       <p:grpSpPr/>
-      <p:pic>
-        <p:nvPicPr>
-          <p:cNvPr id="22" name="Picture 21" descr="image.png"/>
-          <p:cNvPicPr>
-            <a:picLocks noChangeAspect="1"/>
-          </p:cNvPicPr>
-          <p:nvPr/>
-        </p:nvPicPr>
-        <p:blipFill>
-          <a:blip r:embed="rId2"/>
-          <a:stretch>
-            <a:fillRect/>
-          </a:stretch>
-        </p:blipFill>
-        <p:spPr>
-          <a:xfrm>
-            <a:off x="5212080" y="1371600"/>
-            <a:ext cx="3657600" cy="3042488"/>
-          </a:xfrm>
-          <a:prstGeom prst="rect">
-            <a:avLst/>
-          </a:prstGeom>
-        </p:spPr>
-      </p:pic>
       <p:sp>
         <p:nvSpPr>
           <p:cNvPr id="2" name="Rectangle 1"/>
@@ -6513,30 +6417,6 @@
         <p:nvPr/>
       </p:nvGrpSpPr>
       <p:grpSpPr/>
-      <p:pic>
-        <p:nvPicPr>
-          <p:cNvPr id="22" name="Picture 21" descr="image.png"/>
-          <p:cNvPicPr>
-            <a:picLocks noChangeAspect="1"/>
-          </p:cNvPicPr>
-          <p:nvPr/>
-        </p:nvPicPr>
-        <p:blipFill>
-          <a:blip r:embed="rId2"/>
-          <a:stretch>
-            <a:fillRect/>
-          </a:stretch>
-        </p:blipFill>
-        <p:spPr>
-          <a:xfrm>
-            <a:off x="5577840" y="731520"/>
-            <a:ext cx="3291840" cy="4095248"/>
-          </a:xfrm>
-          <a:prstGeom prst="rect">
-            <a:avLst/>
-          </a:prstGeom>
-        </p:spPr>
-      </p:pic>
       <p:sp>
         <p:nvSpPr>
           <p:cNvPr id="2" name="Rectangle 1"/>
@@ -9876,30 +9756,6 @@
         <p:nvPr/>
       </p:nvGrpSpPr>
       <p:grpSpPr/>
-      <p:pic>
-        <p:nvPicPr>
-          <p:cNvPr id="14" name="Picture 13" descr="image.png"/>
-          <p:cNvPicPr>
-            <a:picLocks noChangeAspect="1"/>
-          </p:cNvPicPr>
-          <p:nvPr/>
-        </p:nvPicPr>
-        <p:blipFill>
-          <a:blip r:embed="rId2"/>
-          <a:stretch>
-            <a:fillRect/>
-          </a:stretch>
-        </p:blipFill>
-        <p:spPr>
-          <a:xfrm>
-            <a:off x="3200400" y="1371600"/>
-            <a:ext cx="2743200" cy="2899317"/>
-          </a:xfrm>
-          <a:prstGeom prst="rect">
-            <a:avLst/>
-          </a:prstGeom>
-        </p:spPr>
-      </p:pic>
       <p:sp>
         <p:nvSpPr>
           <p:cNvPr id="2" name="Rectangle 1"/>

--- a/Aufbau_der_Erde.pptx
+++ b/Aufbau_der_Erde.pptx
@@ -15,6 +15,7 @@
     <p:sldId id="263" r:id="rId14"/>
     <p:sldId id="264" r:id="rId15"/>
     <p:sldId id="265" r:id="rId16"/>
+    <p:sldId id="266" r:id="rId17"/>
   </p:sldIdLst>
   <p:sldSz cx="12188952" cy="6858000" type="screen4x3"/>
   <p:notesSz cx="6858000" cy="9144000"/>
@@ -3148,8 +3149,8 @@
         </p:nvSpPr>
         <p:spPr>
           <a:xfrm>
-            <a:off x="6400800" y="-45719"/>
-            <a:ext cx="6949440" cy="6949440"/>
+            <a:off x="6583680" y="137159"/>
+            <a:ext cx="6583680" cy="6583680"/>
           </a:xfrm>
           <a:prstGeom prst="ellipse">
             <a:avLst/>
@@ -3191,8 +3192,8 @@
         </p:nvSpPr>
         <p:spPr>
           <a:xfrm>
-            <a:off x="7132320" y="685800"/>
-            <a:ext cx="5486400" cy="5486400"/>
+            <a:off x="7406640" y="960119"/>
+            <a:ext cx="4937760" cy="4937760"/>
           </a:xfrm>
           <a:prstGeom prst="ellipse">
             <a:avLst/>
@@ -3234,8 +3235,8 @@
         </p:nvSpPr>
         <p:spPr>
           <a:xfrm>
-            <a:off x="7863840" y="1417319"/>
-            <a:ext cx="4023360" cy="4023360"/>
+            <a:off x="8138160" y="1691640"/>
+            <a:ext cx="3474720" cy="3474720"/>
           </a:xfrm>
           <a:prstGeom prst="ellipse">
             <a:avLst/>
@@ -3277,8 +3278,8 @@
         </p:nvSpPr>
         <p:spPr>
           <a:xfrm>
-            <a:off x="8595360" y="2148840"/>
-            <a:ext cx="2560320" cy="2560320"/>
+            <a:off x="8778240" y="2331720"/>
+            <a:ext cx="2194560" cy="2194560"/>
           </a:xfrm>
           <a:prstGeom prst="ellipse">
             <a:avLst/>
@@ -3320,8 +3321,8 @@
         </p:nvSpPr>
         <p:spPr>
           <a:xfrm>
-            <a:off x="9235440" y="2788920"/>
-            <a:ext cx="1280160" cy="1280160"/>
+            <a:off x="9326880" y="2880360"/>
+            <a:ext cx="1097280" cy="1097280"/>
           </a:xfrm>
           <a:prstGeom prst="ellipse">
             <a:avLst/>
@@ -3484,7 +3485,7 @@
         <p:spPr>
           <a:xfrm>
             <a:off x="457200" y="1554480"/>
-            <a:ext cx="6217920" cy="1371600"/>
+            <a:ext cx="6217920" cy="1280160"/>
           </a:xfrm>
           <a:prstGeom prst="rect">
             <a:avLst/>
@@ -3751,59 +3752,16 @@
       </p:sp>
       <p:sp>
         <p:nvSpPr>
-          <p:cNvPr id="3" name="Oval 2"/>
-          <p:cNvSpPr/>
-          <p:nvPr/>
-        </p:nvSpPr>
-        <p:spPr>
-          <a:xfrm>
-            <a:off x="2889504" y="-91440"/>
-            <a:ext cx="6400800" cy="6400800"/>
-          </a:xfrm>
-          <a:prstGeom prst="ellipse">
-            <a:avLst/>
-          </a:prstGeom>
-          <a:solidFill>
-            <a:srgbClr val="0F233D"/>
-          </a:solidFill>
-          <a:ln>
-            <a:noFill/>
-          </a:ln>
-        </p:spPr>
-        <p:style>
-          <a:lnRef idx="1">
-            <a:schemeClr val="accent1"/>
-          </a:lnRef>
-          <a:fillRef idx="3">
-            <a:schemeClr val="accent1"/>
-          </a:fillRef>
-          <a:effectRef idx="2">
-            <a:schemeClr val="accent1"/>
-          </a:effectRef>
-          <a:fontRef idx="minor">
-            <a:schemeClr val="lt1"/>
-          </a:fontRef>
-        </p:style>
-        <p:txBody>
-          <a:bodyPr rtlCol="0" anchor="ctr"/>
-          <a:lstStyle/>
-          <a:p>
-            <a:pPr algn="ctr"/>
-          </a:p>
-        </p:txBody>
-      </p:sp>
-      <p:sp>
-        <p:nvSpPr>
-          <p:cNvPr id="4" name="Oval 3"/>
-          <p:cNvSpPr/>
-          <p:nvPr/>
-        </p:nvSpPr>
-        <p:spPr>
-          <a:xfrm>
-            <a:off x="3712464" y="731519"/>
-            <a:ext cx="4754880" cy="4754880"/>
-          </a:xfrm>
-          <a:prstGeom prst="ellipse">
+          <p:cNvPr id="3" name="Rectangle 2"/>
+          <p:cNvSpPr/>
+          <p:nvPr/>
+        </p:nvSpPr>
+        <p:spPr>
+          <a:xfrm>
+            <a:off x="0" y="0"/>
+            <a:ext cx="12188952" cy="1005840"/>
+          </a:xfrm>
+          <a:prstGeom prst="rect">
             <a:avLst/>
           </a:prstGeom>
           <a:solidFill>
@@ -3837,186 +3795,57 @@
       </p:sp>
       <p:sp>
         <p:nvSpPr>
-          <p:cNvPr id="5" name="Oval 4"/>
-          <p:cNvSpPr/>
-          <p:nvPr/>
-        </p:nvSpPr>
-        <p:spPr>
-          <a:xfrm>
-            <a:off x="4443984" y="1463039"/>
-            <a:ext cx="3291840" cy="3291840"/>
-          </a:xfrm>
-          <a:prstGeom prst="ellipse">
-            <a:avLst/>
-          </a:prstGeom>
-          <a:solidFill>
-            <a:srgbClr val="FB923C"/>
-          </a:solidFill>
-          <a:ln>
-            <a:noFill/>
-          </a:ln>
-        </p:spPr>
-        <p:style>
-          <a:lnRef idx="1">
-            <a:schemeClr val="accent1"/>
-          </a:lnRef>
-          <a:fillRef idx="3">
-            <a:schemeClr val="accent1"/>
-          </a:fillRef>
-          <a:effectRef idx="2">
-            <a:schemeClr val="accent1"/>
-          </a:effectRef>
-          <a:fontRef idx="minor">
-            <a:schemeClr val="lt1"/>
-          </a:fontRef>
-        </p:style>
-        <p:txBody>
-          <a:bodyPr rtlCol="0" anchor="ctr"/>
-          <a:lstStyle/>
-          <a:p>
-            <a:pPr algn="ctr"/>
-          </a:p>
-        </p:txBody>
-      </p:sp>
-      <p:sp>
-        <p:nvSpPr>
-          <p:cNvPr id="6" name="Oval 5"/>
-          <p:cNvSpPr/>
-          <p:nvPr/>
-        </p:nvSpPr>
-        <p:spPr>
-          <a:xfrm>
-            <a:off x="5084064" y="2103120"/>
-            <a:ext cx="2011680" cy="2011680"/>
-          </a:xfrm>
-          <a:prstGeom prst="ellipse">
-            <a:avLst/>
-          </a:prstGeom>
-          <a:solidFill>
-            <a:srgbClr val="F87171"/>
-          </a:solidFill>
-          <a:ln>
-            <a:noFill/>
-          </a:ln>
-        </p:spPr>
-        <p:style>
-          <a:lnRef idx="1">
-            <a:schemeClr val="accent1"/>
-          </a:lnRef>
-          <a:fillRef idx="3">
-            <a:schemeClr val="accent1"/>
-          </a:fillRef>
-          <a:effectRef idx="2">
-            <a:schemeClr val="accent1"/>
-          </a:effectRef>
-          <a:fontRef idx="minor">
-            <a:schemeClr val="lt1"/>
-          </a:fontRef>
-        </p:style>
-        <p:txBody>
-          <a:bodyPr rtlCol="0" anchor="ctr"/>
-          <a:lstStyle/>
-          <a:p>
-            <a:pPr algn="ctr"/>
-          </a:p>
-        </p:txBody>
-      </p:sp>
-      <p:sp>
-        <p:nvSpPr>
-          <p:cNvPr id="7" name="Oval 6"/>
-          <p:cNvSpPr/>
-          <p:nvPr/>
-        </p:nvSpPr>
-        <p:spPr>
-          <a:xfrm>
-            <a:off x="5632704" y="2651760"/>
-            <a:ext cx="914400" cy="914400"/>
-          </a:xfrm>
-          <a:prstGeom prst="ellipse">
-            <a:avLst/>
-          </a:prstGeom>
-          <a:solidFill>
-            <a:srgbClr val="FBBF24"/>
-          </a:solidFill>
-          <a:ln>
-            <a:noFill/>
-          </a:ln>
-        </p:spPr>
-        <p:style>
-          <a:lnRef idx="1">
-            <a:schemeClr val="accent1"/>
-          </a:lnRef>
-          <a:fillRef idx="3">
-            <a:schemeClr val="accent1"/>
-          </a:fillRef>
-          <a:effectRef idx="2">
-            <a:schemeClr val="accent1"/>
-          </a:effectRef>
-          <a:fontRef idx="minor">
-            <a:schemeClr val="lt1"/>
-          </a:fontRef>
-        </p:style>
-        <p:txBody>
-          <a:bodyPr rtlCol="0" anchor="ctr"/>
-          <a:lstStyle/>
-          <a:p>
-            <a:pPr algn="ctr"/>
-          </a:p>
-        </p:txBody>
-      </p:sp>
-      <p:sp>
-        <p:nvSpPr>
-          <p:cNvPr id="8" name="Rectangle 7"/>
+          <p:cNvPr id="4" name="Rectangle 3"/>
           <p:cNvSpPr/>
           <p:nvPr/>
         </p:nvSpPr>
         <p:spPr>
           <a:xfrm>
             <a:off x="0" y="0"/>
-            <a:ext cx="12188952" cy="6858000"/>
-          </a:xfrm>
-          <a:prstGeom prst="rect">
-            <a:avLst/>
-          </a:prstGeom>
-          <a:solidFill>
-            <a:srgbClr val="0A1628"/>
-          </a:solidFill>
-          <a:ln>
-            <a:noFill/>
-          </a:ln>
-        </p:spPr>
-        <p:style>
-          <a:lnRef idx="1">
-            <a:schemeClr val="accent1"/>
-          </a:lnRef>
-          <a:fillRef idx="3">
-            <a:schemeClr val="accent1"/>
-          </a:fillRef>
-          <a:effectRef idx="2">
-            <a:schemeClr val="accent1"/>
-          </a:effectRef>
-          <a:fontRef idx="minor">
-            <a:schemeClr val="lt1"/>
-          </a:fontRef>
-        </p:style>
-        <p:txBody>
-          <a:bodyPr rtlCol="0" anchor="ctr"/>
-          <a:lstStyle/>
-          <a:p>
-            <a:pPr algn="ctr"/>
-          </a:p>
-        </p:txBody>
-      </p:sp>
-      <p:sp>
-        <p:nvSpPr>
-          <p:cNvPr id="9" name="TextBox 8"/>
+            <a:ext cx="73152" cy="1005840"/>
+          </a:xfrm>
+          <a:prstGeom prst="rect">
+            <a:avLst/>
+          </a:prstGeom>
+          <a:solidFill>
+            <a:srgbClr val="2DD4BF"/>
+          </a:solidFill>
+          <a:ln>
+            <a:noFill/>
+          </a:ln>
+        </p:spPr>
+        <p:style>
+          <a:lnRef idx="1">
+            <a:schemeClr val="accent1"/>
+          </a:lnRef>
+          <a:fillRef idx="3">
+            <a:schemeClr val="accent1"/>
+          </a:fillRef>
+          <a:effectRef idx="2">
+            <a:schemeClr val="accent1"/>
+          </a:effectRef>
+          <a:fontRef idx="minor">
+            <a:schemeClr val="lt1"/>
+          </a:fontRef>
+        </p:style>
+        <p:txBody>
+          <a:bodyPr rtlCol="0" anchor="ctr"/>
+          <a:lstStyle/>
+          <a:p>
+            <a:pPr algn="ctr"/>
+          </a:p>
+        </p:txBody>
+      </p:sp>
+      <p:sp>
+        <p:nvSpPr>
+          <p:cNvPr id="5" name="TextBox 4"/>
           <p:cNvSpPr txBox="1"/>
           <p:nvPr/>
         </p:nvSpPr>
         <p:spPr>
           <a:xfrm>
-            <a:off x="5394960" y="274320"/>
-            <a:ext cx="1371600" cy="1097280"/>
+            <a:off x="228600" y="91440"/>
+            <a:ext cx="8686800" cy="822960"/>
           </a:xfrm>
           <a:prstGeom prst="rect">
             <a:avLst/>
@@ -4029,28 +3858,114 @@
           </a:bodyPr>
           <a:lstStyle/>
           <a:p>
-            <a:pPr algn="ctr"/>
-            <a:r>
-              <a:rPr sz="5200" b="0" i="0">
+            <a:pPr algn="l"/>
+            <a:r>
+              <a:rPr sz="3000" b="1" i="0">
                 <a:solidFill>
                   <a:srgbClr val="FFFFFF"/>
                 </a:solidFill>
               </a:rPr>
-              <a:t>🌍</a:t>
-            </a:r>
-          </a:p>
-        </p:txBody>
-      </p:sp>
-      <p:sp>
-        <p:nvSpPr>
-          <p:cNvPr id="10" name="TextBox 9"/>
+              <a:t>📊  Zusammenfassung</a:t>
+            </a:r>
+          </a:p>
+        </p:txBody>
+      </p:sp>
+      <p:sp>
+        <p:nvSpPr>
+          <p:cNvPr id="6" name="Rectangle 5"/>
+          <p:cNvSpPr/>
+          <p:nvPr/>
+        </p:nvSpPr>
+        <p:spPr>
+          <a:xfrm>
+            <a:off x="0" y="1005840"/>
+            <a:ext cx="12188952" cy="36576"/>
+          </a:xfrm>
+          <a:prstGeom prst="rect">
+            <a:avLst/>
+          </a:prstGeom>
+          <a:solidFill>
+            <a:srgbClr val="2DD4BF"/>
+          </a:solidFill>
+          <a:ln>
+            <a:noFill/>
+          </a:ln>
+        </p:spPr>
+        <p:style>
+          <a:lnRef idx="1">
+            <a:schemeClr val="accent1"/>
+          </a:lnRef>
+          <a:fillRef idx="3">
+            <a:schemeClr val="accent1"/>
+          </a:fillRef>
+          <a:effectRef idx="2">
+            <a:schemeClr val="accent1"/>
+          </a:effectRef>
+          <a:fontRef idx="minor">
+            <a:schemeClr val="lt1"/>
+          </a:fontRef>
+        </p:style>
+        <p:txBody>
+          <a:bodyPr rtlCol="0" anchor="ctr"/>
+          <a:lstStyle/>
+          <a:p>
+            <a:pPr algn="ctr"/>
+          </a:p>
+        </p:txBody>
+      </p:sp>
+      <p:sp>
+        <p:nvSpPr>
+          <p:cNvPr id="7" name="Rectangle 6"/>
+          <p:cNvSpPr/>
+          <p:nvPr/>
+        </p:nvSpPr>
+        <p:spPr>
+          <a:xfrm>
+            <a:off x="274320" y="1143000"/>
+            <a:ext cx="2258568" cy="457200"/>
+          </a:xfrm>
+          <a:prstGeom prst="rect">
+            <a:avLst/>
+          </a:prstGeom>
+          <a:solidFill>
+            <a:srgbClr val="1E40AF"/>
+          </a:solidFill>
+          <a:ln>
+            <a:noFill/>
+          </a:ln>
+        </p:spPr>
+        <p:style>
+          <a:lnRef idx="1">
+            <a:schemeClr val="accent1"/>
+          </a:lnRef>
+          <a:fillRef idx="3">
+            <a:schemeClr val="accent1"/>
+          </a:fillRef>
+          <a:effectRef idx="2">
+            <a:schemeClr val="accent1"/>
+          </a:effectRef>
+          <a:fontRef idx="minor">
+            <a:schemeClr val="lt1"/>
+          </a:fontRef>
+        </p:style>
+        <p:txBody>
+          <a:bodyPr rtlCol="0" anchor="ctr"/>
+          <a:lstStyle/>
+          <a:p>
+            <a:pPr algn="ctr"/>
+          </a:p>
+        </p:txBody>
+      </p:sp>
+      <p:sp>
+        <p:nvSpPr>
+          <p:cNvPr id="8" name="TextBox 7"/>
           <p:cNvSpPr txBox="1"/>
           <p:nvPr/>
         </p:nvSpPr>
         <p:spPr>
           <a:xfrm>
-            <a:off x="1371600" y="1463040"/>
-            <a:ext cx="9418320" cy="1188720"/>
+            <a:off x="320040" y="1170432"/>
+            <a:ext cx="2194560" cy="402336"/>
           </a:xfrm>
           <a:prstGeom prst="rect">
             <a:avLst/>
@@ -4065,26 +3980,69 @@
           <a:p>
             <a:pPr algn="ctr"/>
             <a:r>
-              <a:rPr sz="4200" b="1" i="0">
+              <a:rPr sz="1300" b="1" i="0">
                 <a:solidFill>
                   <a:srgbClr val="FFFFFF"/>
                 </a:solidFill>
               </a:rPr>
-              <a:t>Danke fürs Zuhören!</a:t>
-            </a:r>
-          </a:p>
-        </p:txBody>
-      </p:sp>
-      <p:sp>
-        <p:nvSpPr>
-          <p:cNvPr id="11" name="TextBox 10"/>
+              <a:t>Schicht</a:t>
+            </a:r>
+          </a:p>
+        </p:txBody>
+      </p:sp>
+      <p:sp>
+        <p:nvSpPr>
+          <p:cNvPr id="9" name="Rectangle 8"/>
+          <p:cNvSpPr/>
+          <p:nvPr/>
+        </p:nvSpPr>
+        <p:spPr>
+          <a:xfrm>
+            <a:off x="2578608" y="1143000"/>
+            <a:ext cx="2258568" cy="457200"/>
+          </a:xfrm>
+          <a:prstGeom prst="rect">
+            <a:avLst/>
+          </a:prstGeom>
+          <a:solidFill>
+            <a:srgbClr val="1E40AF"/>
+          </a:solidFill>
+          <a:ln>
+            <a:noFill/>
+          </a:ln>
+        </p:spPr>
+        <p:style>
+          <a:lnRef idx="1">
+            <a:schemeClr val="accent1"/>
+          </a:lnRef>
+          <a:fillRef idx="3">
+            <a:schemeClr val="accent1"/>
+          </a:fillRef>
+          <a:effectRef idx="2">
+            <a:schemeClr val="accent1"/>
+          </a:effectRef>
+          <a:fontRef idx="minor">
+            <a:schemeClr val="lt1"/>
+          </a:fontRef>
+        </p:style>
+        <p:txBody>
+          <a:bodyPr rtlCol="0" anchor="ctr"/>
+          <a:lstStyle/>
+          <a:p>
+            <a:pPr algn="ctr"/>
+          </a:p>
+        </p:txBody>
+      </p:sp>
+      <p:sp>
+        <p:nvSpPr>
+          <p:cNvPr id="10" name="TextBox 9"/>
           <p:cNvSpPr txBox="1"/>
           <p:nvPr/>
         </p:nvSpPr>
         <p:spPr>
           <a:xfrm>
-            <a:off x="1371600" y="2606040"/>
-            <a:ext cx="9418320" cy="731520"/>
+            <a:off x="2624328" y="1170432"/>
+            <a:ext cx="2194560" cy="402336"/>
           </a:xfrm>
           <a:prstGeom prst="rect">
             <a:avLst/>
@@ -4099,69 +4057,69 @@
           <a:p>
             <a:pPr algn="ctr"/>
             <a:r>
-              <a:rPr sz="2800" b="0" i="0">
-                <a:solidFill>
-                  <a:srgbClr val="94A3B8"/>
-                </a:solidFill>
-              </a:rPr>
-              <a:t>Fragen?</a:t>
-            </a:r>
-          </a:p>
-        </p:txBody>
-      </p:sp>
-      <p:sp>
-        <p:nvSpPr>
-          <p:cNvPr id="12" name="Rectangle 11"/>
-          <p:cNvSpPr/>
-          <p:nvPr/>
-        </p:nvSpPr>
-        <p:spPr>
-          <a:xfrm>
-            <a:off x="2286000" y="3429000"/>
-            <a:ext cx="7616952" cy="36576"/>
-          </a:xfrm>
-          <a:prstGeom prst="rect">
-            <a:avLst/>
-          </a:prstGeom>
-          <a:solidFill>
-            <a:srgbClr val="2DD4BF"/>
-          </a:solidFill>
-          <a:ln>
-            <a:noFill/>
-          </a:ln>
-        </p:spPr>
-        <p:style>
-          <a:lnRef idx="1">
-            <a:schemeClr val="accent1"/>
-          </a:lnRef>
-          <a:fillRef idx="3">
-            <a:schemeClr val="accent1"/>
-          </a:fillRef>
-          <a:effectRef idx="2">
-            <a:schemeClr val="accent1"/>
-          </a:effectRef>
-          <a:fontRef idx="minor">
-            <a:schemeClr val="lt1"/>
-          </a:fontRef>
-        </p:style>
-        <p:txBody>
-          <a:bodyPr rtlCol="0" anchor="ctr"/>
-          <a:lstStyle/>
-          <a:p>
-            <a:pPr algn="ctr"/>
-          </a:p>
-        </p:txBody>
-      </p:sp>
-      <p:sp>
-        <p:nvSpPr>
-          <p:cNvPr id="13" name="TextBox 12"/>
+              <a:rPr sz="1300" b="1" i="0">
+                <a:solidFill>
+                  <a:srgbClr val="FFFFFF"/>
+                </a:solidFill>
+              </a:rPr>
+              <a:t>Tiefe</a:t>
+            </a:r>
+          </a:p>
+        </p:txBody>
+      </p:sp>
+      <p:sp>
+        <p:nvSpPr>
+          <p:cNvPr id="11" name="Rectangle 10"/>
+          <p:cNvSpPr/>
+          <p:nvPr/>
+        </p:nvSpPr>
+        <p:spPr>
+          <a:xfrm>
+            <a:off x="4882896" y="1143000"/>
+            <a:ext cx="2258568" cy="457200"/>
+          </a:xfrm>
+          <a:prstGeom prst="rect">
+            <a:avLst/>
+          </a:prstGeom>
+          <a:solidFill>
+            <a:srgbClr val="1E40AF"/>
+          </a:solidFill>
+          <a:ln>
+            <a:noFill/>
+          </a:ln>
+        </p:spPr>
+        <p:style>
+          <a:lnRef idx="1">
+            <a:schemeClr val="accent1"/>
+          </a:lnRef>
+          <a:fillRef idx="3">
+            <a:schemeClr val="accent1"/>
+          </a:fillRef>
+          <a:effectRef idx="2">
+            <a:schemeClr val="accent1"/>
+          </a:effectRef>
+          <a:fontRef idx="minor">
+            <a:schemeClr val="lt1"/>
+          </a:fontRef>
+        </p:style>
+        <p:txBody>
+          <a:bodyPr rtlCol="0" anchor="ctr"/>
+          <a:lstStyle/>
+          <a:p>
+            <a:pPr algn="ctr"/>
+          </a:p>
+        </p:txBody>
+      </p:sp>
+      <p:sp>
+        <p:nvSpPr>
+          <p:cNvPr id="12" name="TextBox 11"/>
           <p:cNvSpPr txBox="1"/>
           <p:nvPr/>
         </p:nvSpPr>
         <p:spPr>
           <a:xfrm>
-            <a:off x="1371600" y="3611880"/>
-            <a:ext cx="9418320" cy="548640"/>
+            <a:off x="4928616" y="1170432"/>
+            <a:ext cx="2194560" cy="402336"/>
           </a:xfrm>
           <a:prstGeom prst="rect">
             <a:avLst/>
@@ -4176,13 +4134,56 @@
           <a:p>
             <a:pPr algn="ctr"/>
             <a:r>
-              <a:rPr sz="1500" b="0" i="0">
-                <a:solidFill>
-                  <a:srgbClr val="94A3B8"/>
-                </a:solidFill>
-              </a:rPr>
-              <a:t>Aufbau der Erde  ·  Erdkruste  ·  Erdmantel  ·  Erdkern</a:t>
-            </a:r>
+              <a:rPr sz="1300" b="1" i="0">
+                <a:solidFill>
+                  <a:srgbClr val="FFFFFF"/>
+                </a:solidFill>
+              </a:rPr>
+              <a:t>Temperatur</a:t>
+            </a:r>
+          </a:p>
+        </p:txBody>
+      </p:sp>
+      <p:sp>
+        <p:nvSpPr>
+          <p:cNvPr id="13" name="Rectangle 12"/>
+          <p:cNvSpPr/>
+          <p:nvPr/>
+        </p:nvSpPr>
+        <p:spPr>
+          <a:xfrm>
+            <a:off x="7187184" y="1143000"/>
+            <a:ext cx="2258568" cy="457200"/>
+          </a:xfrm>
+          <a:prstGeom prst="rect">
+            <a:avLst/>
+          </a:prstGeom>
+          <a:solidFill>
+            <a:srgbClr val="1E40AF"/>
+          </a:solidFill>
+          <a:ln>
+            <a:noFill/>
+          </a:ln>
+        </p:spPr>
+        <p:style>
+          <a:lnRef idx="1">
+            <a:schemeClr val="accent1"/>
+          </a:lnRef>
+          <a:fillRef idx="3">
+            <a:schemeClr val="accent1"/>
+          </a:fillRef>
+          <a:effectRef idx="2">
+            <a:schemeClr val="accent1"/>
+          </a:effectRef>
+          <a:fontRef idx="minor">
+            <a:schemeClr val="lt1"/>
+          </a:fontRef>
+        </p:style>
+        <p:txBody>
+          <a:bodyPr rtlCol="0" anchor="ctr"/>
+          <a:lstStyle/>
+          <a:p>
+            <a:pPr algn="ctr"/>
           </a:p>
         </p:txBody>
       </p:sp>
@@ -4194,8 +4195,8 @@
         </p:nvSpPr>
         <p:spPr>
           <a:xfrm>
-            <a:off x="1371600" y="4251960"/>
-            <a:ext cx="9418320" cy="457200"/>
+            <a:off x="7232904" y="1170432"/>
+            <a:ext cx="2194560" cy="402336"/>
           </a:xfrm>
           <a:prstGeom prst="rect">
             <a:avLst/>
@@ -4210,6 +4211,1895 @@
           <a:p>
             <a:pPr algn="ctr"/>
             <a:r>
+              <a:rPr sz="1300" b="1" i="0">
+                <a:solidFill>
+                  <a:srgbClr val="FFFFFF"/>
+                </a:solidFill>
+              </a:rPr>
+              <a:t>Zustand</a:t>
+            </a:r>
+          </a:p>
+        </p:txBody>
+      </p:sp>
+      <p:sp>
+        <p:nvSpPr>
+          <p:cNvPr id="15" name="Rectangle 14"/>
+          <p:cNvSpPr/>
+          <p:nvPr/>
+        </p:nvSpPr>
+        <p:spPr>
+          <a:xfrm>
+            <a:off x="9491472" y="1143000"/>
+            <a:ext cx="2258568" cy="457200"/>
+          </a:xfrm>
+          <a:prstGeom prst="rect">
+            <a:avLst/>
+          </a:prstGeom>
+          <a:solidFill>
+            <a:srgbClr val="1E40AF"/>
+          </a:solidFill>
+          <a:ln>
+            <a:noFill/>
+          </a:ln>
+        </p:spPr>
+        <p:style>
+          <a:lnRef idx="1">
+            <a:schemeClr val="accent1"/>
+          </a:lnRef>
+          <a:fillRef idx="3">
+            <a:schemeClr val="accent1"/>
+          </a:fillRef>
+          <a:effectRef idx="2">
+            <a:schemeClr val="accent1"/>
+          </a:effectRef>
+          <a:fontRef idx="minor">
+            <a:schemeClr val="lt1"/>
+          </a:fontRef>
+        </p:style>
+        <p:txBody>
+          <a:bodyPr rtlCol="0" anchor="ctr"/>
+          <a:lstStyle/>
+          <a:p>
+            <a:pPr algn="ctr"/>
+          </a:p>
+        </p:txBody>
+      </p:sp>
+      <p:sp>
+        <p:nvSpPr>
+          <p:cNvPr id="16" name="TextBox 15"/>
+          <p:cNvSpPr txBox="1"/>
+          <p:nvPr/>
+        </p:nvSpPr>
+        <p:spPr>
+          <a:xfrm>
+            <a:off x="9537192" y="1170432"/>
+            <a:ext cx="2194560" cy="402336"/>
+          </a:xfrm>
+          <a:prstGeom prst="rect">
+            <a:avLst/>
+          </a:prstGeom>
+          <a:noFill/>
+        </p:spPr>
+        <p:txBody>
+          <a:bodyPr wrap="square">
+            <a:spAutoFit/>
+          </a:bodyPr>
+          <a:lstStyle/>
+          <a:p>
+            <a:pPr algn="ctr"/>
+            <a:r>
+              <a:rPr sz="1300" b="1" i="0">
+                <a:solidFill>
+                  <a:srgbClr val="FFFFFF"/>
+                </a:solidFill>
+              </a:rPr>
+              <a:t>Besonderheit</a:t>
+            </a:r>
+          </a:p>
+        </p:txBody>
+      </p:sp>
+      <p:sp>
+        <p:nvSpPr>
+          <p:cNvPr id="17" name="Rectangle 16"/>
+          <p:cNvSpPr/>
+          <p:nvPr/>
+        </p:nvSpPr>
+        <p:spPr>
+          <a:xfrm>
+            <a:off x="274320" y="1691640"/>
+            <a:ext cx="11521440" cy="914400"/>
+          </a:xfrm>
+          <a:prstGeom prst="rect">
+            <a:avLst/>
+          </a:prstGeom>
+          <a:solidFill>
+            <a:srgbClr val="0F233D"/>
+          </a:solidFill>
+          <a:ln>
+            <a:noFill/>
+          </a:ln>
+        </p:spPr>
+        <p:style>
+          <a:lnRef idx="1">
+            <a:schemeClr val="accent1"/>
+          </a:lnRef>
+          <a:fillRef idx="3">
+            <a:schemeClr val="accent1"/>
+          </a:fillRef>
+          <a:effectRef idx="2">
+            <a:schemeClr val="accent1"/>
+          </a:effectRef>
+          <a:fontRef idx="minor">
+            <a:schemeClr val="lt1"/>
+          </a:fontRef>
+        </p:style>
+        <p:txBody>
+          <a:bodyPr rtlCol="0" anchor="ctr"/>
+          <a:lstStyle/>
+          <a:p>
+            <a:pPr algn="ctr"/>
+          </a:p>
+        </p:txBody>
+      </p:sp>
+      <p:sp>
+        <p:nvSpPr>
+          <p:cNvPr id="18" name="Rectangle 17"/>
+          <p:cNvSpPr/>
+          <p:nvPr/>
+        </p:nvSpPr>
+        <p:spPr>
+          <a:xfrm>
+            <a:off x="274320" y="1691640"/>
+            <a:ext cx="54864" cy="914400"/>
+          </a:xfrm>
+          <a:prstGeom prst="rect">
+            <a:avLst/>
+          </a:prstGeom>
+          <a:solidFill>
+            <a:srgbClr val="4ADE80"/>
+          </a:solidFill>
+          <a:ln>
+            <a:noFill/>
+          </a:ln>
+        </p:spPr>
+        <p:style>
+          <a:lnRef idx="1">
+            <a:schemeClr val="accent1"/>
+          </a:lnRef>
+          <a:fillRef idx="3">
+            <a:schemeClr val="accent1"/>
+          </a:fillRef>
+          <a:effectRef idx="2">
+            <a:schemeClr val="accent1"/>
+          </a:effectRef>
+          <a:fontRef idx="minor">
+            <a:schemeClr val="lt1"/>
+          </a:fontRef>
+        </p:style>
+        <p:txBody>
+          <a:bodyPr rtlCol="0" anchor="ctr"/>
+          <a:lstStyle/>
+          <a:p>
+            <a:pPr algn="ctr"/>
+          </a:p>
+        </p:txBody>
+      </p:sp>
+      <p:sp>
+        <p:nvSpPr>
+          <p:cNvPr id="19" name="TextBox 18"/>
+          <p:cNvSpPr txBox="1"/>
+          <p:nvPr/>
+        </p:nvSpPr>
+        <p:spPr>
+          <a:xfrm>
+            <a:off x="384048" y="1947672"/>
+            <a:ext cx="2194560" cy="457200"/>
+          </a:xfrm>
+          <a:prstGeom prst="rect">
+            <a:avLst/>
+          </a:prstGeom>
+          <a:noFill/>
+        </p:spPr>
+        <p:txBody>
+          <a:bodyPr wrap="square">
+            <a:spAutoFit/>
+          </a:bodyPr>
+          <a:lstStyle/>
+          <a:p>
+            <a:pPr algn="ctr"/>
+            <a:r>
+              <a:rPr sz="1400" b="1" i="0">
+                <a:solidFill>
+                  <a:srgbClr val="4ADE80"/>
+                </a:solidFill>
+              </a:rPr>
+              <a:t>🟢 Erdkruste</a:t>
+            </a:r>
+          </a:p>
+        </p:txBody>
+      </p:sp>
+      <p:sp>
+        <p:nvSpPr>
+          <p:cNvPr id="20" name="TextBox 19"/>
+          <p:cNvSpPr txBox="1"/>
+          <p:nvPr/>
+        </p:nvSpPr>
+        <p:spPr>
+          <a:xfrm>
+            <a:off x="2688336" y="1947672"/>
+            <a:ext cx="2194560" cy="457200"/>
+          </a:xfrm>
+          <a:prstGeom prst="rect">
+            <a:avLst/>
+          </a:prstGeom>
+          <a:noFill/>
+        </p:spPr>
+        <p:txBody>
+          <a:bodyPr wrap="square">
+            <a:spAutoFit/>
+          </a:bodyPr>
+          <a:lstStyle/>
+          <a:p>
+            <a:pPr algn="ctr"/>
+            <a:r>
+              <a:rPr sz="1400" b="0" i="0">
+                <a:solidFill>
+                  <a:srgbClr val="FFFFFF"/>
+                </a:solidFill>
+              </a:rPr>
+              <a:t>0–70 km</a:t>
+            </a:r>
+          </a:p>
+        </p:txBody>
+      </p:sp>
+      <p:sp>
+        <p:nvSpPr>
+          <p:cNvPr id="21" name="TextBox 20"/>
+          <p:cNvSpPr txBox="1"/>
+          <p:nvPr/>
+        </p:nvSpPr>
+        <p:spPr>
+          <a:xfrm>
+            <a:off x="4992624" y="1947672"/>
+            <a:ext cx="2194560" cy="457200"/>
+          </a:xfrm>
+          <a:prstGeom prst="rect">
+            <a:avLst/>
+          </a:prstGeom>
+          <a:noFill/>
+        </p:spPr>
+        <p:txBody>
+          <a:bodyPr wrap="square">
+            <a:spAutoFit/>
+          </a:bodyPr>
+          <a:lstStyle/>
+          <a:p>
+            <a:pPr algn="ctr"/>
+            <a:r>
+              <a:rPr sz="1400" b="0" i="0">
+                <a:solidFill>
+                  <a:srgbClr val="FFFFFF"/>
+                </a:solidFill>
+              </a:rPr>
+              <a:t>0–1.000°C</a:t>
+            </a:r>
+          </a:p>
+        </p:txBody>
+      </p:sp>
+      <p:sp>
+        <p:nvSpPr>
+          <p:cNvPr id="22" name="TextBox 21"/>
+          <p:cNvSpPr txBox="1"/>
+          <p:nvPr/>
+        </p:nvSpPr>
+        <p:spPr>
+          <a:xfrm>
+            <a:off x="7296912" y="1947672"/>
+            <a:ext cx="2194560" cy="457200"/>
+          </a:xfrm>
+          <a:prstGeom prst="rect">
+            <a:avLst/>
+          </a:prstGeom>
+          <a:noFill/>
+        </p:spPr>
+        <p:txBody>
+          <a:bodyPr wrap="square">
+            <a:spAutoFit/>
+          </a:bodyPr>
+          <a:lstStyle/>
+          <a:p>
+            <a:pPr algn="ctr"/>
+            <a:r>
+              <a:rPr sz="1400" b="0" i="0">
+                <a:solidFill>
+                  <a:srgbClr val="FFFFFF"/>
+                </a:solidFill>
+              </a:rPr>
+              <a:t>Fest</a:t>
+            </a:r>
+          </a:p>
+        </p:txBody>
+      </p:sp>
+      <p:sp>
+        <p:nvSpPr>
+          <p:cNvPr id="23" name="TextBox 22"/>
+          <p:cNvSpPr txBox="1"/>
+          <p:nvPr/>
+        </p:nvSpPr>
+        <p:spPr>
+          <a:xfrm>
+            <a:off x="9601200" y="1947672"/>
+            <a:ext cx="2194560" cy="457200"/>
+          </a:xfrm>
+          <a:prstGeom prst="rect">
+            <a:avLst/>
+          </a:prstGeom>
+          <a:noFill/>
+        </p:spPr>
+        <p:txBody>
+          <a:bodyPr wrap="square">
+            <a:spAutoFit/>
+          </a:bodyPr>
+          <a:lstStyle/>
+          <a:p>
+            <a:pPr algn="ctr"/>
+            <a:r>
+              <a:rPr sz="1400" b="0" i="0">
+                <a:solidFill>
+                  <a:srgbClr val="FFFFFF"/>
+                </a:solidFill>
+              </a:rPr>
+              <a:t>Tektonische Platten</a:t>
+            </a:r>
+          </a:p>
+        </p:txBody>
+      </p:sp>
+      <p:sp>
+        <p:nvSpPr>
+          <p:cNvPr id="24" name="Rectangle 23"/>
+          <p:cNvSpPr/>
+          <p:nvPr/>
+        </p:nvSpPr>
+        <p:spPr>
+          <a:xfrm>
+            <a:off x="274320" y="2651760"/>
+            <a:ext cx="11521440" cy="914400"/>
+          </a:xfrm>
+          <a:prstGeom prst="rect">
+            <a:avLst/>
+          </a:prstGeom>
+          <a:solidFill>
+            <a:srgbClr val="0A1C35"/>
+          </a:solidFill>
+          <a:ln>
+            <a:noFill/>
+          </a:ln>
+        </p:spPr>
+        <p:style>
+          <a:lnRef idx="1">
+            <a:schemeClr val="accent1"/>
+          </a:lnRef>
+          <a:fillRef idx="3">
+            <a:schemeClr val="accent1"/>
+          </a:fillRef>
+          <a:effectRef idx="2">
+            <a:schemeClr val="accent1"/>
+          </a:effectRef>
+          <a:fontRef idx="minor">
+            <a:schemeClr val="lt1"/>
+          </a:fontRef>
+        </p:style>
+        <p:txBody>
+          <a:bodyPr rtlCol="0" anchor="ctr"/>
+          <a:lstStyle/>
+          <a:p>
+            <a:pPr algn="ctr"/>
+          </a:p>
+        </p:txBody>
+      </p:sp>
+      <p:sp>
+        <p:nvSpPr>
+          <p:cNvPr id="25" name="Rectangle 24"/>
+          <p:cNvSpPr/>
+          <p:nvPr/>
+        </p:nvSpPr>
+        <p:spPr>
+          <a:xfrm>
+            <a:off x="274320" y="2651760"/>
+            <a:ext cx="54864" cy="914400"/>
+          </a:xfrm>
+          <a:prstGeom prst="rect">
+            <a:avLst/>
+          </a:prstGeom>
+          <a:solidFill>
+            <a:srgbClr val="60A5FA"/>
+          </a:solidFill>
+          <a:ln>
+            <a:noFill/>
+          </a:ln>
+        </p:spPr>
+        <p:style>
+          <a:lnRef idx="1">
+            <a:schemeClr val="accent1"/>
+          </a:lnRef>
+          <a:fillRef idx="3">
+            <a:schemeClr val="accent1"/>
+          </a:fillRef>
+          <a:effectRef idx="2">
+            <a:schemeClr val="accent1"/>
+          </a:effectRef>
+          <a:fontRef idx="minor">
+            <a:schemeClr val="lt1"/>
+          </a:fontRef>
+        </p:style>
+        <p:txBody>
+          <a:bodyPr rtlCol="0" anchor="ctr"/>
+          <a:lstStyle/>
+          <a:p>
+            <a:pPr algn="ctr"/>
+          </a:p>
+        </p:txBody>
+      </p:sp>
+      <p:sp>
+        <p:nvSpPr>
+          <p:cNvPr id="26" name="TextBox 25"/>
+          <p:cNvSpPr txBox="1"/>
+          <p:nvPr/>
+        </p:nvSpPr>
+        <p:spPr>
+          <a:xfrm>
+            <a:off x="384048" y="2907792"/>
+            <a:ext cx="2194560" cy="457200"/>
+          </a:xfrm>
+          <a:prstGeom prst="rect">
+            <a:avLst/>
+          </a:prstGeom>
+          <a:noFill/>
+        </p:spPr>
+        <p:txBody>
+          <a:bodyPr wrap="square">
+            <a:spAutoFit/>
+          </a:bodyPr>
+          <a:lstStyle/>
+          <a:p>
+            <a:pPr algn="ctr"/>
+            <a:r>
+              <a:rPr sz="1400" b="1" i="0">
+                <a:solidFill>
+                  <a:srgbClr val="60A5FA"/>
+                </a:solidFill>
+              </a:rPr>
+              <a:t>🔵 Ob. Mantel</a:t>
+            </a:r>
+          </a:p>
+        </p:txBody>
+      </p:sp>
+      <p:sp>
+        <p:nvSpPr>
+          <p:cNvPr id="27" name="TextBox 26"/>
+          <p:cNvSpPr txBox="1"/>
+          <p:nvPr/>
+        </p:nvSpPr>
+        <p:spPr>
+          <a:xfrm>
+            <a:off x="2688336" y="2907792"/>
+            <a:ext cx="2194560" cy="457200"/>
+          </a:xfrm>
+          <a:prstGeom prst="rect">
+            <a:avLst/>
+          </a:prstGeom>
+          <a:noFill/>
+        </p:spPr>
+        <p:txBody>
+          <a:bodyPr wrap="square">
+            <a:spAutoFit/>
+          </a:bodyPr>
+          <a:lstStyle/>
+          <a:p>
+            <a:pPr algn="ctr"/>
+            <a:r>
+              <a:rPr sz="1400" b="0" i="0">
+                <a:solidFill>
+                  <a:srgbClr val="FFFFFF"/>
+                </a:solidFill>
+              </a:rPr>
+              <a:t>70–660 km</a:t>
+            </a:r>
+          </a:p>
+        </p:txBody>
+      </p:sp>
+      <p:sp>
+        <p:nvSpPr>
+          <p:cNvPr id="28" name="TextBox 27"/>
+          <p:cNvSpPr txBox="1"/>
+          <p:nvPr/>
+        </p:nvSpPr>
+        <p:spPr>
+          <a:xfrm>
+            <a:off x="4992624" y="2907792"/>
+            <a:ext cx="2194560" cy="457200"/>
+          </a:xfrm>
+          <a:prstGeom prst="rect">
+            <a:avLst/>
+          </a:prstGeom>
+          <a:noFill/>
+        </p:spPr>
+        <p:txBody>
+          <a:bodyPr wrap="square">
+            <a:spAutoFit/>
+          </a:bodyPr>
+          <a:lstStyle/>
+          <a:p>
+            <a:pPr algn="ctr"/>
+            <a:r>
+              <a:rPr sz="1400" b="0" i="0">
+                <a:solidFill>
+                  <a:srgbClr val="FFFFFF"/>
+                </a:solidFill>
+              </a:rPr>
+              <a:t>1.000–1.600°C</a:t>
+            </a:r>
+          </a:p>
+        </p:txBody>
+      </p:sp>
+      <p:sp>
+        <p:nvSpPr>
+          <p:cNvPr id="29" name="TextBox 28"/>
+          <p:cNvSpPr txBox="1"/>
+          <p:nvPr/>
+        </p:nvSpPr>
+        <p:spPr>
+          <a:xfrm>
+            <a:off x="7296912" y="2907792"/>
+            <a:ext cx="2194560" cy="457200"/>
+          </a:xfrm>
+          <a:prstGeom prst="rect">
+            <a:avLst/>
+          </a:prstGeom>
+          <a:noFill/>
+        </p:spPr>
+        <p:txBody>
+          <a:bodyPr wrap="square">
+            <a:spAutoFit/>
+          </a:bodyPr>
+          <a:lstStyle/>
+          <a:p>
+            <a:pPr algn="ctr"/>
+            <a:r>
+              <a:rPr sz="1400" b="0" i="0">
+                <a:solidFill>
+                  <a:srgbClr val="FFFFFF"/>
+                </a:solidFill>
+              </a:rPr>
+              <a:t>Zähflüssig</a:t>
+            </a:r>
+          </a:p>
+        </p:txBody>
+      </p:sp>
+      <p:sp>
+        <p:nvSpPr>
+          <p:cNvPr id="30" name="TextBox 29"/>
+          <p:cNvSpPr txBox="1"/>
+          <p:nvPr/>
+        </p:nvSpPr>
+        <p:spPr>
+          <a:xfrm>
+            <a:off x="9601200" y="2907792"/>
+            <a:ext cx="2194560" cy="457200"/>
+          </a:xfrm>
+          <a:prstGeom prst="rect">
+            <a:avLst/>
+          </a:prstGeom>
+          <a:noFill/>
+        </p:spPr>
+        <p:txBody>
+          <a:bodyPr wrap="square">
+            <a:spAutoFit/>
+          </a:bodyPr>
+          <a:lstStyle/>
+          <a:p>
+            <a:pPr algn="ctr"/>
+            <a:r>
+              <a:rPr sz="1400" b="0" i="0">
+                <a:solidFill>
+                  <a:srgbClr val="FFFFFF"/>
+                </a:solidFill>
+              </a:rPr>
+              <a:t>Platten schwimmen drauf</a:t>
+            </a:r>
+          </a:p>
+        </p:txBody>
+      </p:sp>
+      <p:sp>
+        <p:nvSpPr>
+          <p:cNvPr id="31" name="Rectangle 30"/>
+          <p:cNvSpPr/>
+          <p:nvPr/>
+        </p:nvSpPr>
+        <p:spPr>
+          <a:xfrm>
+            <a:off x="274320" y="3611880"/>
+            <a:ext cx="11521440" cy="914400"/>
+          </a:xfrm>
+          <a:prstGeom prst="rect">
+            <a:avLst/>
+          </a:prstGeom>
+          <a:solidFill>
+            <a:srgbClr val="0F233D"/>
+          </a:solidFill>
+          <a:ln>
+            <a:noFill/>
+          </a:ln>
+        </p:spPr>
+        <p:style>
+          <a:lnRef idx="1">
+            <a:schemeClr val="accent1"/>
+          </a:lnRef>
+          <a:fillRef idx="3">
+            <a:schemeClr val="accent1"/>
+          </a:fillRef>
+          <a:effectRef idx="2">
+            <a:schemeClr val="accent1"/>
+          </a:effectRef>
+          <a:fontRef idx="minor">
+            <a:schemeClr val="lt1"/>
+          </a:fontRef>
+        </p:style>
+        <p:txBody>
+          <a:bodyPr rtlCol="0" anchor="ctr"/>
+          <a:lstStyle/>
+          <a:p>
+            <a:pPr algn="ctr"/>
+          </a:p>
+        </p:txBody>
+      </p:sp>
+      <p:sp>
+        <p:nvSpPr>
+          <p:cNvPr id="32" name="Rectangle 31"/>
+          <p:cNvSpPr/>
+          <p:nvPr/>
+        </p:nvSpPr>
+        <p:spPr>
+          <a:xfrm>
+            <a:off x="274320" y="3611880"/>
+            <a:ext cx="54864" cy="914400"/>
+          </a:xfrm>
+          <a:prstGeom prst="rect">
+            <a:avLst/>
+          </a:prstGeom>
+          <a:solidFill>
+            <a:srgbClr val="FB923C"/>
+          </a:solidFill>
+          <a:ln>
+            <a:noFill/>
+          </a:ln>
+        </p:spPr>
+        <p:style>
+          <a:lnRef idx="1">
+            <a:schemeClr val="accent1"/>
+          </a:lnRef>
+          <a:fillRef idx="3">
+            <a:schemeClr val="accent1"/>
+          </a:fillRef>
+          <a:effectRef idx="2">
+            <a:schemeClr val="accent1"/>
+          </a:effectRef>
+          <a:fontRef idx="minor">
+            <a:schemeClr val="lt1"/>
+          </a:fontRef>
+        </p:style>
+        <p:txBody>
+          <a:bodyPr rtlCol="0" anchor="ctr"/>
+          <a:lstStyle/>
+          <a:p>
+            <a:pPr algn="ctr"/>
+          </a:p>
+        </p:txBody>
+      </p:sp>
+      <p:sp>
+        <p:nvSpPr>
+          <p:cNvPr id="33" name="TextBox 32"/>
+          <p:cNvSpPr txBox="1"/>
+          <p:nvPr/>
+        </p:nvSpPr>
+        <p:spPr>
+          <a:xfrm>
+            <a:off x="384048" y="3867912"/>
+            <a:ext cx="2194560" cy="457200"/>
+          </a:xfrm>
+          <a:prstGeom prst="rect">
+            <a:avLst/>
+          </a:prstGeom>
+          <a:noFill/>
+        </p:spPr>
+        <p:txBody>
+          <a:bodyPr wrap="square">
+            <a:spAutoFit/>
+          </a:bodyPr>
+          <a:lstStyle/>
+          <a:p>
+            <a:pPr algn="ctr"/>
+            <a:r>
+              <a:rPr sz="1400" b="1" i="0">
+                <a:solidFill>
+                  <a:srgbClr val="FB923C"/>
+                </a:solidFill>
+              </a:rPr>
+              <a:t>🟠 Unt. Mantel</a:t>
+            </a:r>
+          </a:p>
+        </p:txBody>
+      </p:sp>
+      <p:sp>
+        <p:nvSpPr>
+          <p:cNvPr id="34" name="TextBox 33"/>
+          <p:cNvSpPr txBox="1"/>
+          <p:nvPr/>
+        </p:nvSpPr>
+        <p:spPr>
+          <a:xfrm>
+            <a:off x="2688336" y="3867912"/>
+            <a:ext cx="2194560" cy="457200"/>
+          </a:xfrm>
+          <a:prstGeom prst="rect">
+            <a:avLst/>
+          </a:prstGeom>
+          <a:noFill/>
+        </p:spPr>
+        <p:txBody>
+          <a:bodyPr wrap="square">
+            <a:spAutoFit/>
+          </a:bodyPr>
+          <a:lstStyle/>
+          <a:p>
+            <a:pPr algn="ctr"/>
+            <a:r>
+              <a:rPr sz="1400" b="0" i="0">
+                <a:solidFill>
+                  <a:srgbClr val="FFFFFF"/>
+                </a:solidFill>
+              </a:rPr>
+              <a:t>660–2.900 km</a:t>
+            </a:r>
+          </a:p>
+        </p:txBody>
+      </p:sp>
+      <p:sp>
+        <p:nvSpPr>
+          <p:cNvPr id="35" name="TextBox 34"/>
+          <p:cNvSpPr txBox="1"/>
+          <p:nvPr/>
+        </p:nvSpPr>
+        <p:spPr>
+          <a:xfrm>
+            <a:off x="4992624" y="3867912"/>
+            <a:ext cx="2194560" cy="457200"/>
+          </a:xfrm>
+          <a:prstGeom prst="rect">
+            <a:avLst/>
+          </a:prstGeom>
+          <a:noFill/>
+        </p:spPr>
+        <p:txBody>
+          <a:bodyPr wrap="square">
+            <a:spAutoFit/>
+          </a:bodyPr>
+          <a:lstStyle/>
+          <a:p>
+            <a:pPr algn="ctr"/>
+            <a:r>
+              <a:rPr sz="1400" b="0" i="0">
+                <a:solidFill>
+                  <a:srgbClr val="FFFFFF"/>
+                </a:solidFill>
+              </a:rPr>
+              <a:t>1.600–3.700°C</a:t>
+            </a:r>
+          </a:p>
+        </p:txBody>
+      </p:sp>
+      <p:sp>
+        <p:nvSpPr>
+          <p:cNvPr id="36" name="TextBox 35"/>
+          <p:cNvSpPr txBox="1"/>
+          <p:nvPr/>
+        </p:nvSpPr>
+        <p:spPr>
+          <a:xfrm>
+            <a:off x="7296912" y="3867912"/>
+            <a:ext cx="2194560" cy="457200"/>
+          </a:xfrm>
+          <a:prstGeom prst="rect">
+            <a:avLst/>
+          </a:prstGeom>
+          <a:noFill/>
+        </p:spPr>
+        <p:txBody>
+          <a:bodyPr wrap="square">
+            <a:spAutoFit/>
+          </a:bodyPr>
+          <a:lstStyle/>
+          <a:p>
+            <a:pPr algn="ctr"/>
+            <a:r>
+              <a:rPr sz="1400" b="0" i="0">
+                <a:solidFill>
+                  <a:srgbClr val="FFFFFF"/>
+                </a:solidFill>
+              </a:rPr>
+              <a:t>Fest</a:t>
+            </a:r>
+          </a:p>
+        </p:txBody>
+      </p:sp>
+      <p:sp>
+        <p:nvSpPr>
+          <p:cNvPr id="37" name="TextBox 36"/>
+          <p:cNvSpPr txBox="1"/>
+          <p:nvPr/>
+        </p:nvSpPr>
+        <p:spPr>
+          <a:xfrm>
+            <a:off x="9601200" y="3867912"/>
+            <a:ext cx="2194560" cy="457200"/>
+          </a:xfrm>
+          <a:prstGeom prst="rect">
+            <a:avLst/>
+          </a:prstGeom>
+          <a:noFill/>
+        </p:spPr>
+        <p:txBody>
+          <a:bodyPr wrap="square">
+            <a:spAutoFit/>
+          </a:bodyPr>
+          <a:lstStyle/>
+          <a:p>
+            <a:pPr algn="ctr"/>
+            <a:r>
+              <a:rPr sz="1400" b="0" i="0">
+                <a:solidFill>
+                  <a:srgbClr val="FFFFFF"/>
+                </a:solidFill>
+              </a:rPr>
+              <a:t>Konvektion</a:t>
+            </a:r>
+          </a:p>
+        </p:txBody>
+      </p:sp>
+      <p:sp>
+        <p:nvSpPr>
+          <p:cNvPr id="38" name="Rectangle 37"/>
+          <p:cNvSpPr/>
+          <p:nvPr/>
+        </p:nvSpPr>
+        <p:spPr>
+          <a:xfrm>
+            <a:off x="274320" y="4572000"/>
+            <a:ext cx="11521440" cy="914400"/>
+          </a:xfrm>
+          <a:prstGeom prst="rect">
+            <a:avLst/>
+          </a:prstGeom>
+          <a:solidFill>
+            <a:srgbClr val="0A1C35"/>
+          </a:solidFill>
+          <a:ln>
+            <a:noFill/>
+          </a:ln>
+        </p:spPr>
+        <p:style>
+          <a:lnRef idx="1">
+            <a:schemeClr val="accent1"/>
+          </a:lnRef>
+          <a:fillRef idx="3">
+            <a:schemeClr val="accent1"/>
+          </a:fillRef>
+          <a:effectRef idx="2">
+            <a:schemeClr val="accent1"/>
+          </a:effectRef>
+          <a:fontRef idx="minor">
+            <a:schemeClr val="lt1"/>
+          </a:fontRef>
+        </p:style>
+        <p:txBody>
+          <a:bodyPr rtlCol="0" anchor="ctr"/>
+          <a:lstStyle/>
+          <a:p>
+            <a:pPr algn="ctr"/>
+          </a:p>
+        </p:txBody>
+      </p:sp>
+      <p:sp>
+        <p:nvSpPr>
+          <p:cNvPr id="39" name="Rectangle 38"/>
+          <p:cNvSpPr/>
+          <p:nvPr/>
+        </p:nvSpPr>
+        <p:spPr>
+          <a:xfrm>
+            <a:off x="274320" y="4572000"/>
+            <a:ext cx="54864" cy="914400"/>
+          </a:xfrm>
+          <a:prstGeom prst="rect">
+            <a:avLst/>
+          </a:prstGeom>
+          <a:solidFill>
+            <a:srgbClr val="F87171"/>
+          </a:solidFill>
+          <a:ln>
+            <a:noFill/>
+          </a:ln>
+        </p:spPr>
+        <p:style>
+          <a:lnRef idx="1">
+            <a:schemeClr val="accent1"/>
+          </a:lnRef>
+          <a:fillRef idx="3">
+            <a:schemeClr val="accent1"/>
+          </a:fillRef>
+          <a:effectRef idx="2">
+            <a:schemeClr val="accent1"/>
+          </a:effectRef>
+          <a:fontRef idx="minor">
+            <a:schemeClr val="lt1"/>
+          </a:fontRef>
+        </p:style>
+        <p:txBody>
+          <a:bodyPr rtlCol="0" anchor="ctr"/>
+          <a:lstStyle/>
+          <a:p>
+            <a:pPr algn="ctr"/>
+          </a:p>
+        </p:txBody>
+      </p:sp>
+      <p:sp>
+        <p:nvSpPr>
+          <p:cNvPr id="40" name="TextBox 39"/>
+          <p:cNvSpPr txBox="1"/>
+          <p:nvPr/>
+        </p:nvSpPr>
+        <p:spPr>
+          <a:xfrm>
+            <a:off x="384048" y="4828032"/>
+            <a:ext cx="2194560" cy="457200"/>
+          </a:xfrm>
+          <a:prstGeom prst="rect">
+            <a:avLst/>
+          </a:prstGeom>
+          <a:noFill/>
+        </p:spPr>
+        <p:txBody>
+          <a:bodyPr wrap="square">
+            <a:spAutoFit/>
+          </a:bodyPr>
+          <a:lstStyle/>
+          <a:p>
+            <a:pPr algn="ctr"/>
+            <a:r>
+              <a:rPr sz="1400" b="1" i="0">
+                <a:solidFill>
+                  <a:srgbClr val="F87171"/>
+                </a:solidFill>
+              </a:rPr>
+              <a:t>🔴 Äuß. Kern</a:t>
+            </a:r>
+          </a:p>
+        </p:txBody>
+      </p:sp>
+      <p:sp>
+        <p:nvSpPr>
+          <p:cNvPr id="41" name="TextBox 40"/>
+          <p:cNvSpPr txBox="1"/>
+          <p:nvPr/>
+        </p:nvSpPr>
+        <p:spPr>
+          <a:xfrm>
+            <a:off x="2688336" y="4828032"/>
+            <a:ext cx="2194560" cy="457200"/>
+          </a:xfrm>
+          <a:prstGeom prst="rect">
+            <a:avLst/>
+          </a:prstGeom>
+          <a:noFill/>
+        </p:spPr>
+        <p:txBody>
+          <a:bodyPr wrap="square">
+            <a:spAutoFit/>
+          </a:bodyPr>
+          <a:lstStyle/>
+          <a:p>
+            <a:pPr algn="ctr"/>
+            <a:r>
+              <a:rPr sz="1400" b="0" i="0">
+                <a:solidFill>
+                  <a:srgbClr val="FFFFFF"/>
+                </a:solidFill>
+              </a:rPr>
+              <a:t>2.900–5.150 km</a:t>
+            </a:r>
+          </a:p>
+        </p:txBody>
+      </p:sp>
+      <p:sp>
+        <p:nvSpPr>
+          <p:cNvPr id="42" name="TextBox 41"/>
+          <p:cNvSpPr txBox="1"/>
+          <p:nvPr/>
+        </p:nvSpPr>
+        <p:spPr>
+          <a:xfrm>
+            <a:off x="4992624" y="4828032"/>
+            <a:ext cx="2194560" cy="457200"/>
+          </a:xfrm>
+          <a:prstGeom prst="rect">
+            <a:avLst/>
+          </a:prstGeom>
+          <a:noFill/>
+        </p:spPr>
+        <p:txBody>
+          <a:bodyPr wrap="square">
+            <a:spAutoFit/>
+          </a:bodyPr>
+          <a:lstStyle/>
+          <a:p>
+            <a:pPr algn="ctr"/>
+            <a:r>
+              <a:rPr sz="1400" b="0" i="0">
+                <a:solidFill>
+                  <a:srgbClr val="FFFFFF"/>
+                </a:solidFill>
+              </a:rPr>
+              <a:t>4.000–5.000°C</a:t>
+            </a:r>
+          </a:p>
+        </p:txBody>
+      </p:sp>
+      <p:sp>
+        <p:nvSpPr>
+          <p:cNvPr id="43" name="TextBox 42"/>
+          <p:cNvSpPr txBox="1"/>
+          <p:nvPr/>
+        </p:nvSpPr>
+        <p:spPr>
+          <a:xfrm>
+            <a:off x="7296912" y="4828032"/>
+            <a:ext cx="2194560" cy="457200"/>
+          </a:xfrm>
+          <a:prstGeom prst="rect">
+            <a:avLst/>
+          </a:prstGeom>
+          <a:noFill/>
+        </p:spPr>
+        <p:txBody>
+          <a:bodyPr wrap="square">
+            <a:spAutoFit/>
+          </a:bodyPr>
+          <a:lstStyle/>
+          <a:p>
+            <a:pPr algn="ctr"/>
+            <a:r>
+              <a:rPr sz="1400" b="0" i="0">
+                <a:solidFill>
+                  <a:srgbClr val="FFFFFF"/>
+                </a:solidFill>
+              </a:rPr>
+              <a:t>Flüssig</a:t>
+            </a:r>
+          </a:p>
+        </p:txBody>
+      </p:sp>
+      <p:sp>
+        <p:nvSpPr>
+          <p:cNvPr id="44" name="TextBox 43"/>
+          <p:cNvSpPr txBox="1"/>
+          <p:nvPr/>
+        </p:nvSpPr>
+        <p:spPr>
+          <a:xfrm>
+            <a:off x="9601200" y="4828032"/>
+            <a:ext cx="2194560" cy="457200"/>
+          </a:xfrm>
+          <a:prstGeom prst="rect">
+            <a:avLst/>
+          </a:prstGeom>
+          <a:noFill/>
+        </p:spPr>
+        <p:txBody>
+          <a:bodyPr wrap="square">
+            <a:spAutoFit/>
+          </a:bodyPr>
+          <a:lstStyle/>
+          <a:p>
+            <a:pPr algn="ctr"/>
+            <a:r>
+              <a:rPr sz="1400" b="0" i="0">
+                <a:solidFill>
+                  <a:srgbClr val="FFFFFF"/>
+                </a:solidFill>
+              </a:rPr>
+              <a:t>Erzeugt Magnetfeld</a:t>
+            </a:r>
+          </a:p>
+        </p:txBody>
+      </p:sp>
+      <p:sp>
+        <p:nvSpPr>
+          <p:cNvPr id="45" name="Rectangle 44"/>
+          <p:cNvSpPr/>
+          <p:nvPr/>
+        </p:nvSpPr>
+        <p:spPr>
+          <a:xfrm>
+            <a:off x="274320" y="5532120"/>
+            <a:ext cx="11521440" cy="914400"/>
+          </a:xfrm>
+          <a:prstGeom prst="rect">
+            <a:avLst/>
+          </a:prstGeom>
+          <a:solidFill>
+            <a:srgbClr val="0F233D"/>
+          </a:solidFill>
+          <a:ln>
+            <a:noFill/>
+          </a:ln>
+        </p:spPr>
+        <p:style>
+          <a:lnRef idx="1">
+            <a:schemeClr val="accent1"/>
+          </a:lnRef>
+          <a:fillRef idx="3">
+            <a:schemeClr val="accent1"/>
+          </a:fillRef>
+          <a:effectRef idx="2">
+            <a:schemeClr val="accent1"/>
+          </a:effectRef>
+          <a:fontRef idx="minor">
+            <a:schemeClr val="lt1"/>
+          </a:fontRef>
+        </p:style>
+        <p:txBody>
+          <a:bodyPr rtlCol="0" anchor="ctr"/>
+          <a:lstStyle/>
+          <a:p>
+            <a:pPr algn="ctr"/>
+          </a:p>
+        </p:txBody>
+      </p:sp>
+      <p:sp>
+        <p:nvSpPr>
+          <p:cNvPr id="46" name="Rectangle 45"/>
+          <p:cNvSpPr/>
+          <p:nvPr/>
+        </p:nvSpPr>
+        <p:spPr>
+          <a:xfrm>
+            <a:off x="274320" y="5532120"/>
+            <a:ext cx="54864" cy="914400"/>
+          </a:xfrm>
+          <a:prstGeom prst="rect">
+            <a:avLst/>
+          </a:prstGeom>
+          <a:solidFill>
+            <a:srgbClr val="FBBF24"/>
+          </a:solidFill>
+          <a:ln>
+            <a:noFill/>
+          </a:ln>
+        </p:spPr>
+        <p:style>
+          <a:lnRef idx="1">
+            <a:schemeClr val="accent1"/>
+          </a:lnRef>
+          <a:fillRef idx="3">
+            <a:schemeClr val="accent1"/>
+          </a:fillRef>
+          <a:effectRef idx="2">
+            <a:schemeClr val="accent1"/>
+          </a:effectRef>
+          <a:fontRef idx="minor">
+            <a:schemeClr val="lt1"/>
+          </a:fontRef>
+        </p:style>
+        <p:txBody>
+          <a:bodyPr rtlCol="0" anchor="ctr"/>
+          <a:lstStyle/>
+          <a:p>
+            <a:pPr algn="ctr"/>
+          </a:p>
+        </p:txBody>
+      </p:sp>
+      <p:sp>
+        <p:nvSpPr>
+          <p:cNvPr id="47" name="TextBox 46"/>
+          <p:cNvSpPr txBox="1"/>
+          <p:nvPr/>
+        </p:nvSpPr>
+        <p:spPr>
+          <a:xfrm>
+            <a:off x="384048" y="5788152"/>
+            <a:ext cx="2194560" cy="457200"/>
+          </a:xfrm>
+          <a:prstGeom prst="rect">
+            <a:avLst/>
+          </a:prstGeom>
+          <a:noFill/>
+        </p:spPr>
+        <p:txBody>
+          <a:bodyPr wrap="square">
+            <a:spAutoFit/>
+          </a:bodyPr>
+          <a:lstStyle/>
+          <a:p>
+            <a:pPr algn="ctr"/>
+            <a:r>
+              <a:rPr sz="1400" b="1" i="0">
+                <a:solidFill>
+                  <a:srgbClr val="FBBF24"/>
+                </a:solidFill>
+              </a:rPr>
+              <a:t>🟡 Inn. Kern</a:t>
+            </a:r>
+          </a:p>
+        </p:txBody>
+      </p:sp>
+      <p:sp>
+        <p:nvSpPr>
+          <p:cNvPr id="48" name="TextBox 47"/>
+          <p:cNvSpPr txBox="1"/>
+          <p:nvPr/>
+        </p:nvSpPr>
+        <p:spPr>
+          <a:xfrm>
+            <a:off x="2688336" y="5788152"/>
+            <a:ext cx="2194560" cy="457200"/>
+          </a:xfrm>
+          <a:prstGeom prst="rect">
+            <a:avLst/>
+          </a:prstGeom>
+          <a:noFill/>
+        </p:spPr>
+        <p:txBody>
+          <a:bodyPr wrap="square">
+            <a:spAutoFit/>
+          </a:bodyPr>
+          <a:lstStyle/>
+          <a:p>
+            <a:pPr algn="ctr"/>
+            <a:r>
+              <a:rPr sz="1400" b="0" i="0">
+                <a:solidFill>
+                  <a:srgbClr val="FFFFFF"/>
+                </a:solidFill>
+              </a:rPr>
+              <a:t>5.150–6.371 km</a:t>
+            </a:r>
+          </a:p>
+        </p:txBody>
+      </p:sp>
+      <p:sp>
+        <p:nvSpPr>
+          <p:cNvPr id="49" name="TextBox 48"/>
+          <p:cNvSpPr txBox="1"/>
+          <p:nvPr/>
+        </p:nvSpPr>
+        <p:spPr>
+          <a:xfrm>
+            <a:off x="4992624" y="5788152"/>
+            <a:ext cx="2194560" cy="457200"/>
+          </a:xfrm>
+          <a:prstGeom prst="rect">
+            <a:avLst/>
+          </a:prstGeom>
+          <a:noFill/>
+        </p:spPr>
+        <p:txBody>
+          <a:bodyPr wrap="square">
+            <a:spAutoFit/>
+          </a:bodyPr>
+          <a:lstStyle/>
+          <a:p>
+            <a:pPr algn="ctr"/>
+            <a:r>
+              <a:rPr sz="1400" b="0" i="0">
+                <a:solidFill>
+                  <a:srgbClr val="FFFFFF"/>
+                </a:solidFill>
+              </a:rPr>
+              <a:t>~5.500°C</a:t>
+            </a:r>
+          </a:p>
+        </p:txBody>
+      </p:sp>
+      <p:sp>
+        <p:nvSpPr>
+          <p:cNvPr id="50" name="TextBox 49"/>
+          <p:cNvSpPr txBox="1"/>
+          <p:nvPr/>
+        </p:nvSpPr>
+        <p:spPr>
+          <a:xfrm>
+            <a:off x="7296912" y="5788152"/>
+            <a:ext cx="2194560" cy="457200"/>
+          </a:xfrm>
+          <a:prstGeom prst="rect">
+            <a:avLst/>
+          </a:prstGeom>
+          <a:noFill/>
+        </p:spPr>
+        <p:txBody>
+          <a:bodyPr wrap="square">
+            <a:spAutoFit/>
+          </a:bodyPr>
+          <a:lstStyle/>
+          <a:p>
+            <a:pPr algn="ctr"/>
+            <a:r>
+              <a:rPr sz="1400" b="0" i="0">
+                <a:solidFill>
+                  <a:srgbClr val="FFFFFF"/>
+                </a:solidFill>
+              </a:rPr>
+              <a:t>Fest</a:t>
+            </a:r>
+          </a:p>
+        </p:txBody>
+      </p:sp>
+      <p:sp>
+        <p:nvSpPr>
+          <p:cNvPr id="51" name="TextBox 50"/>
+          <p:cNvSpPr txBox="1"/>
+          <p:nvPr/>
+        </p:nvSpPr>
+        <p:spPr>
+          <a:xfrm>
+            <a:off x="9601200" y="5788152"/>
+            <a:ext cx="2194560" cy="457200"/>
+          </a:xfrm>
+          <a:prstGeom prst="rect">
+            <a:avLst/>
+          </a:prstGeom>
+          <a:noFill/>
+        </p:spPr>
+        <p:txBody>
+          <a:bodyPr wrap="square">
+            <a:spAutoFit/>
+          </a:bodyPr>
+          <a:lstStyle/>
+          <a:p>
+            <a:pPr algn="ctr"/>
+            <a:r>
+              <a:rPr sz="1400" b="0" i="0">
+                <a:solidFill>
+                  <a:srgbClr val="FFFFFF"/>
+                </a:solidFill>
+              </a:rPr>
+              <a:t>3,6 Mio. bar Druck</a:t>
+            </a:r>
+          </a:p>
+        </p:txBody>
+      </p:sp>
+      <p:sp>
+        <p:nvSpPr>
+          <p:cNvPr id="52" name="TextBox 51"/>
+          <p:cNvSpPr txBox="1"/>
+          <p:nvPr/>
+        </p:nvSpPr>
+        <p:spPr>
+          <a:xfrm>
+            <a:off x="274320" y="6400800"/>
+            <a:ext cx="11521440" cy="365760"/>
+          </a:xfrm>
+          <a:prstGeom prst="rect">
+            <a:avLst/>
+          </a:prstGeom>
+          <a:noFill/>
+        </p:spPr>
+        <p:txBody>
+          <a:bodyPr wrap="square">
+            <a:spAutoFit/>
+          </a:bodyPr>
+          <a:lstStyle/>
+          <a:p>
+            <a:pPr algn="ctr"/>
+            <a:r>
+              <a:rPr sz="1400" b="0" i="1">
+                <a:solidFill>
+                  <a:srgbClr val="2DD4BF"/>
+                </a:solidFill>
+              </a:rPr>
+              <a:t>Je tiefer → desto heißer, dichter und unter höherem Druck</a:t>
+            </a:r>
+          </a:p>
+        </p:txBody>
+      </p:sp>
+    </p:spTree>
+  </p:cSld>
+  <p:clrMapOvr>
+    <a:masterClrMapping/>
+  </p:clrMapOvr>
+</p:sld>
+</file>
+
+<file path=ppt/slides/slide11.xml><?xml version="1.0" encoding="utf-8"?>
+<p:sld xmlns:a="http://schemas.openxmlformats.org/drawingml/2006/main" xmlns:p="http://schemas.openxmlformats.org/presentationml/2006/main" xmlns:r="http://schemas.openxmlformats.org/officeDocument/2006/relationships">
+  <p:cSld>
+    <p:spTree>
+      <p:nvGrpSpPr>
+        <p:cNvPr id="1" name=""/>
+        <p:cNvGrpSpPr/>
+        <p:nvPr/>
+      </p:nvGrpSpPr>
+      <p:grpSpPr/>
+      <p:sp>
+        <p:nvSpPr>
+          <p:cNvPr id="2" name="Rectangle 1"/>
+          <p:cNvSpPr/>
+          <p:nvPr/>
+        </p:nvSpPr>
+        <p:spPr>
+          <a:xfrm>
+            <a:off x="0" y="0"/>
+            <a:ext cx="12188952" cy="6858000"/>
+          </a:xfrm>
+          <a:prstGeom prst="rect">
+            <a:avLst/>
+          </a:prstGeom>
+          <a:solidFill>
+            <a:srgbClr val="0A1628"/>
+          </a:solidFill>
+          <a:ln>
+            <a:noFill/>
+          </a:ln>
+        </p:spPr>
+        <p:style>
+          <a:lnRef idx="1">
+            <a:schemeClr val="accent1"/>
+          </a:lnRef>
+          <a:fillRef idx="3">
+            <a:schemeClr val="accent1"/>
+          </a:fillRef>
+          <a:effectRef idx="2">
+            <a:schemeClr val="accent1"/>
+          </a:effectRef>
+          <a:fontRef idx="minor">
+            <a:schemeClr val="lt1"/>
+          </a:fontRef>
+        </p:style>
+        <p:txBody>
+          <a:bodyPr rtlCol="0" anchor="ctr"/>
+          <a:lstStyle/>
+          <a:p>
+            <a:pPr algn="ctr"/>
+          </a:p>
+        </p:txBody>
+      </p:sp>
+      <p:sp>
+        <p:nvSpPr>
+          <p:cNvPr id="3" name="Oval 2"/>
+          <p:cNvSpPr/>
+          <p:nvPr/>
+        </p:nvSpPr>
+        <p:spPr>
+          <a:xfrm>
+            <a:off x="2889504" y="-91440"/>
+            <a:ext cx="6400800" cy="6400800"/>
+          </a:xfrm>
+          <a:prstGeom prst="ellipse">
+            <a:avLst/>
+          </a:prstGeom>
+          <a:solidFill>
+            <a:srgbClr val="0F233D"/>
+          </a:solidFill>
+          <a:ln>
+            <a:noFill/>
+          </a:ln>
+        </p:spPr>
+        <p:style>
+          <a:lnRef idx="1">
+            <a:schemeClr val="accent1"/>
+          </a:lnRef>
+          <a:fillRef idx="3">
+            <a:schemeClr val="accent1"/>
+          </a:fillRef>
+          <a:effectRef idx="2">
+            <a:schemeClr val="accent1"/>
+          </a:effectRef>
+          <a:fontRef idx="minor">
+            <a:schemeClr val="lt1"/>
+          </a:fontRef>
+        </p:style>
+        <p:txBody>
+          <a:bodyPr rtlCol="0" anchor="ctr"/>
+          <a:lstStyle/>
+          <a:p>
+            <a:pPr algn="ctr"/>
+          </a:p>
+        </p:txBody>
+      </p:sp>
+      <p:sp>
+        <p:nvSpPr>
+          <p:cNvPr id="4" name="Oval 3"/>
+          <p:cNvSpPr/>
+          <p:nvPr/>
+        </p:nvSpPr>
+        <p:spPr>
+          <a:xfrm>
+            <a:off x="3712464" y="731519"/>
+            <a:ext cx="4754880" cy="4754880"/>
+          </a:xfrm>
+          <a:prstGeom prst="ellipse">
+            <a:avLst/>
+          </a:prstGeom>
+          <a:solidFill>
+            <a:srgbClr val="1E40AF"/>
+          </a:solidFill>
+          <a:ln>
+            <a:noFill/>
+          </a:ln>
+        </p:spPr>
+        <p:style>
+          <a:lnRef idx="1">
+            <a:schemeClr val="accent1"/>
+          </a:lnRef>
+          <a:fillRef idx="3">
+            <a:schemeClr val="accent1"/>
+          </a:fillRef>
+          <a:effectRef idx="2">
+            <a:schemeClr val="accent1"/>
+          </a:effectRef>
+          <a:fontRef idx="minor">
+            <a:schemeClr val="lt1"/>
+          </a:fontRef>
+        </p:style>
+        <p:txBody>
+          <a:bodyPr rtlCol="0" anchor="ctr"/>
+          <a:lstStyle/>
+          <a:p>
+            <a:pPr algn="ctr"/>
+          </a:p>
+        </p:txBody>
+      </p:sp>
+      <p:sp>
+        <p:nvSpPr>
+          <p:cNvPr id="5" name="Oval 4"/>
+          <p:cNvSpPr/>
+          <p:nvPr/>
+        </p:nvSpPr>
+        <p:spPr>
+          <a:xfrm>
+            <a:off x="4443984" y="1463039"/>
+            <a:ext cx="3291840" cy="3291840"/>
+          </a:xfrm>
+          <a:prstGeom prst="ellipse">
+            <a:avLst/>
+          </a:prstGeom>
+          <a:solidFill>
+            <a:srgbClr val="FB923C"/>
+          </a:solidFill>
+          <a:ln>
+            <a:noFill/>
+          </a:ln>
+        </p:spPr>
+        <p:style>
+          <a:lnRef idx="1">
+            <a:schemeClr val="accent1"/>
+          </a:lnRef>
+          <a:fillRef idx="3">
+            <a:schemeClr val="accent1"/>
+          </a:fillRef>
+          <a:effectRef idx="2">
+            <a:schemeClr val="accent1"/>
+          </a:effectRef>
+          <a:fontRef idx="minor">
+            <a:schemeClr val="lt1"/>
+          </a:fontRef>
+        </p:style>
+        <p:txBody>
+          <a:bodyPr rtlCol="0" anchor="ctr"/>
+          <a:lstStyle/>
+          <a:p>
+            <a:pPr algn="ctr"/>
+          </a:p>
+        </p:txBody>
+      </p:sp>
+      <p:sp>
+        <p:nvSpPr>
+          <p:cNvPr id="6" name="Oval 5"/>
+          <p:cNvSpPr/>
+          <p:nvPr/>
+        </p:nvSpPr>
+        <p:spPr>
+          <a:xfrm>
+            <a:off x="5084064" y="2103120"/>
+            <a:ext cx="2011680" cy="2011680"/>
+          </a:xfrm>
+          <a:prstGeom prst="ellipse">
+            <a:avLst/>
+          </a:prstGeom>
+          <a:solidFill>
+            <a:srgbClr val="F87171"/>
+          </a:solidFill>
+          <a:ln>
+            <a:noFill/>
+          </a:ln>
+        </p:spPr>
+        <p:style>
+          <a:lnRef idx="1">
+            <a:schemeClr val="accent1"/>
+          </a:lnRef>
+          <a:fillRef idx="3">
+            <a:schemeClr val="accent1"/>
+          </a:fillRef>
+          <a:effectRef idx="2">
+            <a:schemeClr val="accent1"/>
+          </a:effectRef>
+          <a:fontRef idx="minor">
+            <a:schemeClr val="lt1"/>
+          </a:fontRef>
+        </p:style>
+        <p:txBody>
+          <a:bodyPr rtlCol="0" anchor="ctr"/>
+          <a:lstStyle/>
+          <a:p>
+            <a:pPr algn="ctr"/>
+          </a:p>
+        </p:txBody>
+      </p:sp>
+      <p:sp>
+        <p:nvSpPr>
+          <p:cNvPr id="7" name="Oval 6"/>
+          <p:cNvSpPr/>
+          <p:nvPr/>
+        </p:nvSpPr>
+        <p:spPr>
+          <a:xfrm>
+            <a:off x="5632704" y="2651760"/>
+            <a:ext cx="914400" cy="914400"/>
+          </a:xfrm>
+          <a:prstGeom prst="ellipse">
+            <a:avLst/>
+          </a:prstGeom>
+          <a:solidFill>
+            <a:srgbClr val="FBBF24"/>
+          </a:solidFill>
+          <a:ln>
+            <a:noFill/>
+          </a:ln>
+        </p:spPr>
+        <p:style>
+          <a:lnRef idx="1">
+            <a:schemeClr val="accent1"/>
+          </a:lnRef>
+          <a:fillRef idx="3">
+            <a:schemeClr val="accent1"/>
+          </a:fillRef>
+          <a:effectRef idx="2">
+            <a:schemeClr val="accent1"/>
+          </a:effectRef>
+          <a:fontRef idx="minor">
+            <a:schemeClr val="lt1"/>
+          </a:fontRef>
+        </p:style>
+        <p:txBody>
+          <a:bodyPr rtlCol="0" anchor="ctr"/>
+          <a:lstStyle/>
+          <a:p>
+            <a:pPr algn="ctr"/>
+          </a:p>
+        </p:txBody>
+      </p:sp>
+      <p:sp>
+        <p:nvSpPr>
+          <p:cNvPr id="8" name="Rectangle 7"/>
+          <p:cNvSpPr/>
+          <p:nvPr/>
+        </p:nvSpPr>
+        <p:spPr>
+          <a:xfrm>
+            <a:off x="0" y="0"/>
+            <a:ext cx="12188952" cy="6858000"/>
+          </a:xfrm>
+          <a:prstGeom prst="rect">
+            <a:avLst/>
+          </a:prstGeom>
+          <a:solidFill>
+            <a:srgbClr val="0A1628"/>
+          </a:solidFill>
+          <a:ln>
+            <a:noFill/>
+          </a:ln>
+        </p:spPr>
+        <p:style>
+          <a:lnRef idx="1">
+            <a:schemeClr val="accent1"/>
+          </a:lnRef>
+          <a:fillRef idx="3">
+            <a:schemeClr val="accent1"/>
+          </a:fillRef>
+          <a:effectRef idx="2">
+            <a:schemeClr val="accent1"/>
+          </a:effectRef>
+          <a:fontRef idx="minor">
+            <a:schemeClr val="lt1"/>
+          </a:fontRef>
+        </p:style>
+        <p:txBody>
+          <a:bodyPr rtlCol="0" anchor="ctr"/>
+          <a:lstStyle/>
+          <a:p>
+            <a:pPr algn="ctr"/>
+          </a:p>
+        </p:txBody>
+      </p:sp>
+      <p:sp>
+        <p:nvSpPr>
+          <p:cNvPr id="9" name="TextBox 8"/>
+          <p:cNvSpPr txBox="1"/>
+          <p:nvPr/>
+        </p:nvSpPr>
+        <p:spPr>
+          <a:xfrm>
+            <a:off x="5394960" y="274320"/>
+            <a:ext cx="1371600" cy="1097280"/>
+          </a:xfrm>
+          <a:prstGeom prst="rect">
+            <a:avLst/>
+          </a:prstGeom>
+          <a:noFill/>
+        </p:spPr>
+        <p:txBody>
+          <a:bodyPr wrap="square">
+            <a:spAutoFit/>
+          </a:bodyPr>
+          <a:lstStyle/>
+          <a:p>
+            <a:pPr algn="ctr"/>
+            <a:r>
+              <a:rPr sz="5200" b="0" i="0">
+                <a:solidFill>
+                  <a:srgbClr val="FFFFFF"/>
+                </a:solidFill>
+              </a:rPr>
+              <a:t>🌍</a:t>
+            </a:r>
+          </a:p>
+        </p:txBody>
+      </p:sp>
+      <p:sp>
+        <p:nvSpPr>
+          <p:cNvPr id="10" name="TextBox 9"/>
+          <p:cNvSpPr txBox="1"/>
+          <p:nvPr/>
+        </p:nvSpPr>
+        <p:spPr>
+          <a:xfrm>
+            <a:off x="1371600" y="1463040"/>
+            <a:ext cx="9418320" cy="1188720"/>
+          </a:xfrm>
+          <a:prstGeom prst="rect">
+            <a:avLst/>
+          </a:prstGeom>
+          <a:noFill/>
+        </p:spPr>
+        <p:txBody>
+          <a:bodyPr wrap="square">
+            <a:spAutoFit/>
+          </a:bodyPr>
+          <a:lstStyle/>
+          <a:p>
+            <a:pPr algn="ctr"/>
+            <a:r>
+              <a:rPr sz="4200" b="1" i="0">
+                <a:solidFill>
+                  <a:srgbClr val="FFFFFF"/>
+                </a:solidFill>
+              </a:rPr>
+              <a:t>Danke fürs Zuhören!</a:t>
+            </a:r>
+          </a:p>
+        </p:txBody>
+      </p:sp>
+      <p:sp>
+        <p:nvSpPr>
+          <p:cNvPr id="11" name="TextBox 10"/>
+          <p:cNvSpPr txBox="1"/>
+          <p:nvPr/>
+        </p:nvSpPr>
+        <p:spPr>
+          <a:xfrm>
+            <a:off x="1371600" y="2606040"/>
+            <a:ext cx="9418320" cy="731520"/>
+          </a:xfrm>
+          <a:prstGeom prst="rect">
+            <a:avLst/>
+          </a:prstGeom>
+          <a:noFill/>
+        </p:spPr>
+        <p:txBody>
+          <a:bodyPr wrap="square">
+            <a:spAutoFit/>
+          </a:bodyPr>
+          <a:lstStyle/>
+          <a:p>
+            <a:pPr algn="ctr"/>
+            <a:r>
+              <a:rPr sz="2800" b="0" i="0">
+                <a:solidFill>
+                  <a:srgbClr val="94A3B8"/>
+                </a:solidFill>
+              </a:rPr>
+              <a:t>Fragen?</a:t>
+            </a:r>
+          </a:p>
+        </p:txBody>
+      </p:sp>
+      <p:sp>
+        <p:nvSpPr>
+          <p:cNvPr id="12" name="Rectangle 11"/>
+          <p:cNvSpPr/>
+          <p:nvPr/>
+        </p:nvSpPr>
+        <p:spPr>
+          <a:xfrm>
+            <a:off x="2286000" y="3429000"/>
+            <a:ext cx="7616952" cy="36576"/>
+          </a:xfrm>
+          <a:prstGeom prst="rect">
+            <a:avLst/>
+          </a:prstGeom>
+          <a:solidFill>
+            <a:srgbClr val="2DD4BF"/>
+          </a:solidFill>
+          <a:ln>
+            <a:noFill/>
+          </a:ln>
+        </p:spPr>
+        <p:style>
+          <a:lnRef idx="1">
+            <a:schemeClr val="accent1"/>
+          </a:lnRef>
+          <a:fillRef idx="3">
+            <a:schemeClr val="accent1"/>
+          </a:fillRef>
+          <a:effectRef idx="2">
+            <a:schemeClr val="accent1"/>
+          </a:effectRef>
+          <a:fontRef idx="minor">
+            <a:schemeClr val="lt1"/>
+          </a:fontRef>
+        </p:style>
+        <p:txBody>
+          <a:bodyPr rtlCol="0" anchor="ctr"/>
+          <a:lstStyle/>
+          <a:p>
+            <a:pPr algn="ctr"/>
+          </a:p>
+        </p:txBody>
+      </p:sp>
+      <p:sp>
+        <p:nvSpPr>
+          <p:cNvPr id="13" name="TextBox 12"/>
+          <p:cNvSpPr txBox="1"/>
+          <p:nvPr/>
+        </p:nvSpPr>
+        <p:spPr>
+          <a:xfrm>
+            <a:off x="1371600" y="3703320"/>
+            <a:ext cx="9418320" cy="457200"/>
+          </a:xfrm>
+          <a:prstGeom prst="rect">
+            <a:avLst/>
+          </a:prstGeom>
+          <a:noFill/>
+        </p:spPr>
+        <p:txBody>
+          <a:bodyPr wrap="square">
+            <a:spAutoFit/>
+          </a:bodyPr>
+          <a:lstStyle/>
+          <a:p>
+            <a:pPr algn="ctr"/>
+            <a:r>
               <a:rPr sz="1300" b="0" i="0">
                 <a:solidFill>
                   <a:srgbClr val="2DD4BF"/>
@@ -4222,13 +6112,13 @@
       </p:sp>
       <p:sp>
         <p:nvSpPr>
-          <p:cNvPr id="15" name="TextBox 14"/>
+          <p:cNvPr id="14" name="TextBox 13"/>
           <p:cNvSpPr txBox="1"/>
           <p:nvPr/>
         </p:nvSpPr>
         <p:spPr>
           <a:xfrm>
-            <a:off x="1371600" y="4709160"/>
+            <a:off x="1371600" y="4160520"/>
             <a:ext cx="9418320" cy="457200"/>
           </a:xfrm>
           <a:prstGeom prst="rect">
@@ -4409,8 +6299,8 @@
         </p:nvSpPr>
         <p:spPr>
           <a:xfrm>
-            <a:off x="228600" y="73152"/>
-            <a:ext cx="9144000" cy="822960"/>
+            <a:off x="228600" y="91440"/>
+            <a:ext cx="8686800" cy="822960"/>
           </a:xfrm>
           <a:prstGeom prst="rect">
             <a:avLst/>
@@ -4425,7 +6315,7 @@
           <a:p>
             <a:pPr algn="l"/>
             <a:r>
-              <a:rPr sz="3200" b="1" i="0">
+              <a:rPr sz="3000" b="1" i="0">
                 <a:solidFill>
                   <a:srgbClr val="FFFFFF"/>
                 </a:solidFill>
@@ -4443,8 +6333,8 @@
         </p:nvSpPr>
         <p:spPr>
           <a:xfrm>
-            <a:off x="10058400" y="228600"/>
-            <a:ext cx="1920240" cy="548640"/>
+            <a:off x="9601200" y="256032"/>
+            <a:ext cx="2377440" cy="457200"/>
           </a:xfrm>
           <a:prstGeom prst="rect">
             <a:avLst/>
@@ -4459,7 +6349,7 @@
           <a:p>
             <a:pPr algn="r"/>
             <a:r>
-              <a:rPr sz="1400" b="1" i="0">
+              <a:rPr sz="1300" b="1" i="0">
                 <a:solidFill>
                   <a:srgbClr val="2DD4BF"/>
                 </a:solidFill>
@@ -4520,8 +6410,8 @@
         </p:nvSpPr>
         <p:spPr>
           <a:xfrm>
-            <a:off x="274320" y="1188720"/>
-            <a:ext cx="5577840" cy="2468880"/>
+            <a:off x="274320" y="1143000"/>
+            <a:ext cx="6949440" cy="2651760"/>
           </a:xfrm>
           <a:prstGeom prst="rect">
             <a:avLst/>
@@ -4563,8 +6453,8 @@
         </p:nvSpPr>
         <p:spPr>
           <a:xfrm>
-            <a:off x="274320" y="1188720"/>
-            <a:ext cx="54864" cy="2468880"/>
+            <a:off x="274320" y="1143000"/>
+            <a:ext cx="54864" cy="2651760"/>
           </a:xfrm>
           <a:prstGeom prst="rect">
             <a:avLst/>
@@ -4606,8 +6496,8 @@
         </p:nvSpPr>
         <p:spPr>
           <a:xfrm>
-            <a:off x="411479" y="1298448"/>
-            <a:ext cx="5349240" cy="347472"/>
+            <a:off x="411479" y="1234440"/>
+            <a:ext cx="6720840" cy="347472"/>
           </a:xfrm>
           <a:prstGeom prst="rect">
             <a:avLst/>
@@ -4622,12 +6512,12 @@
           <a:p>
             <a:pPr algn="l"/>
             <a:r>
-              <a:rPr sz="1500" b="1" i="0">
+              <a:rPr sz="1400" b="1" i="0">
                 <a:solidFill>
                   <a:srgbClr val="2DD4BF"/>
                 </a:solidFill>
               </a:rPr>
-              <a:t>Urknall &amp; Sonnensystem</a:t>
+              <a:t>Entstehung &amp; Differenzierung</a:t>
             </a:r>
           </a:p>
         </p:txBody>
@@ -4640,8 +6530,8 @@
         </p:nvSpPr>
         <p:spPr>
           <a:xfrm>
-            <a:off x="411479" y="1664208"/>
-            <a:ext cx="5349240" cy="1901952"/>
+            <a:off x="411479" y="1600200"/>
+            <a:ext cx="6720840" cy="2103120"/>
           </a:xfrm>
           <a:prstGeom prst="rect">
             <a:avLst/>
@@ -4656,56 +6546,56 @@
           <a:p>
             <a:pPr algn="l"/>
             <a:r>
-              <a:rPr sz="1700" b="0">
+              <a:rPr sz="1500" b="0">
                 <a:solidFill>
                   <a:srgbClr val="FFFFFF"/>
                 </a:solidFill>
               </a:rPr>
-              <a:t>• Vor ~4,6 Milliarden Jahren entstand die Erde</a:t>
+              <a:t>• Vor ~4,6 Mrd. Jahren aus Staub &amp; Gas</a:t>
             </a:r>
           </a:p>
           <a:p>
             <a:pPr algn="l"/>
             <a:r>
-              <a:rPr sz="1700" b="0">
+              <a:rPr sz="1500" b="0">
                 <a:solidFill>
                   <a:srgbClr val="FFFFFF"/>
                 </a:solidFill>
               </a:rPr>
-              <a:t>• Aus einer rotierenden Gas- und Staubscheibe</a:t>
+              <a:t>• Gravitation → Protoerde</a:t>
             </a:r>
           </a:p>
           <a:p>
             <a:pPr algn="l"/>
             <a:r>
-              <a:rPr sz="1700" b="0">
+              <a:rPr sz="1500" b="0">
                 <a:solidFill>
                   <a:srgbClr val="FFFFFF"/>
                 </a:solidFill>
               </a:rPr>
-              <a:t>• um die junge Sonne</a:t>
+              <a:t>• Erde war komplett geschmolzen</a:t>
             </a:r>
           </a:p>
           <a:p>
             <a:pPr algn="l"/>
             <a:r>
-              <a:rPr sz="1700" b="0">
+              <a:rPr sz="1500" b="0">
                 <a:solidFill>
                   <a:srgbClr val="FFFFFF"/>
                 </a:solidFill>
               </a:rPr>
-              <a:t>• Kleine Partikel zogen sich durch Gravitation zusammen</a:t>
+              <a:t>• Schwere Elemente (Eisen) → Kern</a:t>
             </a:r>
           </a:p>
           <a:p>
             <a:pPr algn="l"/>
             <a:r>
-              <a:rPr sz="1700" b="0">
+              <a:rPr sz="1500" b="0">
                 <a:solidFill>
                   <a:srgbClr val="FFFFFF"/>
                 </a:solidFill>
               </a:rPr>
-              <a:t>• → immer größerer Körper: Protoerde</a:t>
+              <a:t>• Leichte Gesteine → Kruste</a:t>
             </a:r>
           </a:p>
         </p:txBody>
@@ -4718,8 +6608,8 @@
         </p:nvSpPr>
         <p:spPr>
           <a:xfrm>
-            <a:off x="6035040" y="1188720"/>
-            <a:ext cx="5852160" cy="2468880"/>
+            <a:off x="274320" y="3931920"/>
+            <a:ext cx="6949440" cy="2651760"/>
           </a:xfrm>
           <a:prstGeom prst="rect">
             <a:avLst/>
@@ -4761,14 +6651,14 @@
         </p:nvSpPr>
         <p:spPr>
           <a:xfrm>
-            <a:off x="6035040" y="1188720"/>
-            <a:ext cx="54864" cy="2468880"/>
-          </a:xfrm>
-          <a:prstGeom prst="rect">
-            <a:avLst/>
-          </a:prstGeom>
-          <a:solidFill>
-            <a:srgbClr val="2DD4BF"/>
+            <a:off x="274320" y="3931920"/>
+            <a:ext cx="54864" cy="2651760"/>
+          </a:xfrm>
+          <a:prstGeom prst="rect">
+            <a:avLst/>
+          </a:prstGeom>
+          <a:solidFill>
+            <a:srgbClr val="FBBF24"/>
           </a:solidFill>
           <a:ln>
             <a:noFill/>
@@ -4804,8 +6694,8 @@
         </p:nvSpPr>
         <p:spPr>
           <a:xfrm>
-            <a:off x="6172200" y="1298448"/>
-            <a:ext cx="5623560" cy="347472"/>
+            <a:off x="411479" y="4023359"/>
+            <a:ext cx="6720840" cy="347472"/>
           </a:xfrm>
           <a:prstGeom prst="rect">
             <a:avLst/>
@@ -4820,12 +6710,12 @@
           <a:p>
             <a:pPr algn="l"/>
             <a:r>
-              <a:rPr sz="1500" b="1" i="0">
-                <a:solidFill>
-                  <a:srgbClr val="2DD4BF"/>
-                </a:solidFill>
-              </a:rPr>
-              <a:t>Differenzierung (Schichtenbildung)</a:t>
+              <a:rPr sz="1400" b="1" i="0">
+                <a:solidFill>
+                  <a:srgbClr val="FBBF24"/>
+                </a:solidFill>
+              </a:rPr>
+              <a:t>Abkühlung &amp; erste Erde</a:t>
             </a:r>
           </a:p>
         </p:txBody>
@@ -4838,8 +6728,8 @@
         </p:nvSpPr>
         <p:spPr>
           <a:xfrm>
-            <a:off x="6172200" y="1664208"/>
-            <a:ext cx="5623560" cy="1901952"/>
+            <a:off x="411479" y="4389120"/>
+            <a:ext cx="6720840" cy="2103120"/>
           </a:xfrm>
           <a:prstGeom prst="rect">
             <a:avLst/>
@@ -4854,45 +6744,56 @@
           <a:p>
             <a:pPr algn="l"/>
             <a:r>
-              <a:rPr sz="1700" b="0">
+              <a:rPr sz="1500" b="0">
                 <a:solidFill>
                   <a:srgbClr val="FFFFFF"/>
                 </a:solidFill>
               </a:rPr>
-              <a:t>• Die Erde war anfangs komplett geschmolzen</a:t>
+              <a:t>• Oberfläche kühlte langsam ab</a:t>
             </a:r>
           </a:p>
           <a:p>
             <a:pPr algn="l"/>
             <a:r>
-              <a:rPr sz="1700" b="0">
+              <a:rPr sz="1500" b="0">
                 <a:solidFill>
                   <a:srgbClr val="FFFFFF"/>
                 </a:solidFill>
               </a:rPr>
-              <a:t>• Schwere Elemente (Eisen, Nickel) sanken in die Mitte</a:t>
+              <a:t>• Erste feste Erdkruste entstand</a:t>
             </a:r>
           </a:p>
           <a:p>
             <a:pPr algn="l"/>
             <a:r>
-              <a:rPr sz="1700" b="0">
+              <a:rPr sz="1500" b="0">
                 <a:solidFill>
                   <a:srgbClr val="FFFFFF"/>
                 </a:solidFill>
               </a:rPr>
-              <a:t>• Leichtere Gesteine stiegen nach oben</a:t>
+              <a:t>• Wasser kondensierte → Ozeane</a:t>
             </a:r>
           </a:p>
           <a:p>
             <a:pPr algn="l"/>
             <a:r>
-              <a:rPr sz="1700" b="0">
+              <a:rPr sz="1500" b="0">
                 <a:solidFill>
                   <a:srgbClr val="FFFFFF"/>
                 </a:solidFill>
               </a:rPr>
-              <a:t>• → Kern, Mantel und Kruste bildeten sich</a:t>
+              <a:t>• Erdradius: 6.371 km</a:t>
+            </a:r>
+          </a:p>
+          <a:p>
+            <a:pPr algn="l"/>
+            <a:r>
+              <a:rPr sz="1500" b="0">
+                <a:solidFill>
+                  <a:srgbClr val="FFFFFF"/>
+                </a:solidFill>
+              </a:rPr>
+              <a:t>• 5 Schichten: je tiefer → heißer &amp; dichter</a:t>
             </a:r>
           </a:p>
         </p:txBody>
@@ -4905,14 +6806,14 @@
         </p:nvSpPr>
         <p:spPr>
           <a:xfrm>
-            <a:off x="274320" y="3840480"/>
-            <a:ext cx="5577840" cy="2560320"/>
-          </a:xfrm>
-          <a:prstGeom prst="rect">
-            <a:avLst/>
-          </a:prstGeom>
-          <a:solidFill>
-            <a:srgbClr val="0F233D"/>
+            <a:off x="7360920" y="1143000"/>
+            <a:ext cx="4572000" cy="5486400"/>
+          </a:xfrm>
+          <a:prstGeom prst="rect">
+            <a:avLst/>
+          </a:prstGeom>
+          <a:solidFill>
+            <a:srgbClr val="0D1E35"/>
           </a:solidFill>
           <a:ln>
             <a:noFill/>
@@ -4948,51 +6849,180 @@
         </p:nvSpPr>
         <p:spPr>
           <a:xfrm>
-            <a:off x="274320" y="3840480"/>
-            <a:ext cx="54864" cy="2560320"/>
-          </a:xfrm>
-          <a:prstGeom prst="rect">
-            <a:avLst/>
-          </a:prstGeom>
-          <a:solidFill>
-            <a:srgbClr val="2DD4BF"/>
-          </a:solidFill>
-          <a:ln>
-            <a:noFill/>
-          </a:ln>
-        </p:spPr>
-        <p:style>
-          <a:lnRef idx="1">
-            <a:schemeClr val="accent1"/>
-          </a:lnRef>
-          <a:fillRef idx="3">
-            <a:schemeClr val="accent1"/>
-          </a:fillRef>
-          <a:effectRef idx="2">
-            <a:schemeClr val="accent1"/>
-          </a:effectRef>
-          <a:fontRef idx="minor">
-            <a:schemeClr val="lt1"/>
-          </a:fontRef>
-        </p:style>
-        <p:txBody>
-          <a:bodyPr rtlCol="0" anchor="ctr"/>
-          <a:lstStyle/>
-          <a:p>
-            <a:pPr algn="ctr"/>
-          </a:p>
-        </p:txBody>
-      </p:sp>
-      <p:sp>
-        <p:nvSpPr>
-          <p:cNvPr id="18" name="TextBox 17"/>
+            <a:off x="7360920" y="1143000"/>
+            <a:ext cx="4572000" cy="36576"/>
+          </a:xfrm>
+          <a:prstGeom prst="rect">
+            <a:avLst/>
+          </a:prstGeom>
+          <a:solidFill>
+            <a:srgbClr val="94A3B8"/>
+          </a:solidFill>
+          <a:ln>
+            <a:noFill/>
+          </a:ln>
+        </p:spPr>
+        <p:style>
+          <a:lnRef idx="1">
+            <a:schemeClr val="accent1"/>
+          </a:lnRef>
+          <a:fillRef idx="3">
+            <a:schemeClr val="accent1"/>
+          </a:fillRef>
+          <a:effectRef idx="2">
+            <a:schemeClr val="accent1"/>
+          </a:effectRef>
+          <a:fontRef idx="minor">
+            <a:schemeClr val="lt1"/>
+          </a:fontRef>
+        </p:style>
+        <p:txBody>
+          <a:bodyPr rtlCol="0" anchor="ctr"/>
+          <a:lstStyle/>
+          <a:p>
+            <a:pPr algn="ctr"/>
+          </a:p>
+        </p:txBody>
+      </p:sp>
+      <p:sp>
+        <p:nvSpPr>
+          <p:cNvPr id="18" name="Rectangle 17"/>
+          <p:cNvSpPr/>
+          <p:nvPr/>
+        </p:nvSpPr>
+        <p:spPr>
+          <a:xfrm>
+            <a:off x="7360920" y="6592824"/>
+            <a:ext cx="4572000" cy="36576"/>
+          </a:xfrm>
+          <a:prstGeom prst="rect">
+            <a:avLst/>
+          </a:prstGeom>
+          <a:solidFill>
+            <a:srgbClr val="94A3B8"/>
+          </a:solidFill>
+          <a:ln>
+            <a:noFill/>
+          </a:ln>
+        </p:spPr>
+        <p:style>
+          <a:lnRef idx="1">
+            <a:schemeClr val="accent1"/>
+          </a:lnRef>
+          <a:fillRef idx="3">
+            <a:schemeClr val="accent1"/>
+          </a:fillRef>
+          <a:effectRef idx="2">
+            <a:schemeClr val="accent1"/>
+          </a:effectRef>
+          <a:fontRef idx="minor">
+            <a:schemeClr val="lt1"/>
+          </a:fontRef>
+        </p:style>
+        <p:txBody>
+          <a:bodyPr rtlCol="0" anchor="ctr"/>
+          <a:lstStyle/>
+          <a:p>
+            <a:pPr algn="ctr"/>
+          </a:p>
+        </p:txBody>
+      </p:sp>
+      <p:sp>
+        <p:nvSpPr>
+          <p:cNvPr id="19" name="Rectangle 18"/>
+          <p:cNvSpPr/>
+          <p:nvPr/>
+        </p:nvSpPr>
+        <p:spPr>
+          <a:xfrm>
+            <a:off x="7360920" y="1143000"/>
+            <a:ext cx="36576" cy="5486400"/>
+          </a:xfrm>
+          <a:prstGeom prst="rect">
+            <a:avLst/>
+          </a:prstGeom>
+          <a:solidFill>
+            <a:srgbClr val="94A3B8"/>
+          </a:solidFill>
+          <a:ln>
+            <a:noFill/>
+          </a:ln>
+        </p:spPr>
+        <p:style>
+          <a:lnRef idx="1">
+            <a:schemeClr val="accent1"/>
+          </a:lnRef>
+          <a:fillRef idx="3">
+            <a:schemeClr val="accent1"/>
+          </a:fillRef>
+          <a:effectRef idx="2">
+            <a:schemeClr val="accent1"/>
+          </a:effectRef>
+          <a:fontRef idx="minor">
+            <a:schemeClr val="lt1"/>
+          </a:fontRef>
+        </p:style>
+        <p:txBody>
+          <a:bodyPr rtlCol="0" anchor="ctr"/>
+          <a:lstStyle/>
+          <a:p>
+            <a:pPr algn="ctr"/>
+          </a:p>
+        </p:txBody>
+      </p:sp>
+      <p:sp>
+        <p:nvSpPr>
+          <p:cNvPr id="20" name="Rectangle 19"/>
+          <p:cNvSpPr/>
+          <p:nvPr/>
+        </p:nvSpPr>
+        <p:spPr>
+          <a:xfrm>
+            <a:off x="11896344" y="1143000"/>
+            <a:ext cx="36576" cy="5486400"/>
+          </a:xfrm>
+          <a:prstGeom prst="rect">
+            <a:avLst/>
+          </a:prstGeom>
+          <a:solidFill>
+            <a:srgbClr val="94A3B8"/>
+          </a:solidFill>
+          <a:ln>
+            <a:noFill/>
+          </a:ln>
+        </p:spPr>
+        <p:style>
+          <a:lnRef idx="1">
+            <a:schemeClr val="accent1"/>
+          </a:lnRef>
+          <a:fillRef idx="3">
+            <a:schemeClr val="accent1"/>
+          </a:fillRef>
+          <a:effectRef idx="2">
+            <a:schemeClr val="accent1"/>
+          </a:effectRef>
+          <a:fontRef idx="minor">
+            <a:schemeClr val="lt1"/>
+          </a:fontRef>
+        </p:style>
+        <p:txBody>
+          <a:bodyPr rtlCol="0" anchor="ctr"/>
+          <a:lstStyle/>
+          <a:p>
+            <a:pPr algn="ctr"/>
+          </a:p>
+        </p:txBody>
+      </p:sp>
+      <p:sp>
+        <p:nvSpPr>
+          <p:cNvPr id="21" name="TextBox 20"/>
           <p:cNvSpPr txBox="1"/>
           <p:nvPr/>
         </p:nvSpPr>
         <p:spPr>
           <a:xfrm>
-            <a:off x="411479" y="3950208"/>
-            <a:ext cx="5349240" cy="347472"/>
+            <a:off x="7360920" y="3611880"/>
+            <a:ext cx="4572000" cy="548640"/>
           </a:xfrm>
           <a:prstGeom prst="rect">
             <a:avLst/>
@@ -5005,279 +7035,14 @@
           </a:bodyPr>
           <a:lstStyle/>
           <a:p>
-            <a:pPr algn="l"/>
-            <a:r>
-              <a:rPr sz="1500" b="1" i="0">
-                <a:solidFill>
-                  <a:srgbClr val="2DD4BF"/>
-                </a:solidFill>
-              </a:rPr>
-              <a:t>Abkühlung &amp; erste Kruste</a:t>
-            </a:r>
-          </a:p>
-        </p:txBody>
-      </p:sp>
-      <p:sp>
-        <p:nvSpPr>
-          <p:cNvPr id="19" name="TextBox 18"/>
-          <p:cNvSpPr txBox="1"/>
-          <p:nvPr/>
-        </p:nvSpPr>
-        <p:spPr>
-          <a:xfrm>
-            <a:off x="411479" y="4315968"/>
-            <a:ext cx="5349240" cy="1993391"/>
-          </a:xfrm>
-          <a:prstGeom prst="rect">
-            <a:avLst/>
-          </a:prstGeom>
-          <a:noFill/>
-        </p:spPr>
-        <p:txBody>
-          <a:bodyPr wrap="square">
-            <a:spAutoFit/>
-          </a:bodyPr>
-          <a:lstStyle/>
-          <a:p>
-            <a:pPr algn="l"/>
-            <a:r>
-              <a:rPr sz="1700" b="0">
-                <a:solidFill>
-                  <a:srgbClr val="FFFFFF"/>
-                </a:solidFill>
-              </a:rPr>
-              <a:t>• Oberfläche kühlte langsam ab</a:t>
-            </a:r>
-          </a:p>
-          <a:p>
-            <a:pPr algn="l"/>
-            <a:r>
-              <a:rPr sz="1700" b="0">
-                <a:solidFill>
-                  <a:srgbClr val="FFFFFF"/>
-                </a:solidFill>
-              </a:rPr>
-              <a:t>• Erste feste Erdkruste entstand</a:t>
-            </a:r>
-          </a:p>
-          <a:p>
-            <a:pPr algn="l"/>
-            <a:r>
-              <a:rPr sz="1700" b="0">
-                <a:solidFill>
-                  <a:srgbClr val="FFFFFF"/>
-                </a:solidFill>
-              </a:rPr>
-              <a:t>• Wasser kondensierte → erste Ozeane</a:t>
-            </a:r>
-          </a:p>
-          <a:p>
-            <a:pPr algn="l"/>
-            <a:r>
-              <a:rPr sz="1700" b="0">
-                <a:solidFill>
-                  <a:srgbClr val="FFFFFF"/>
-                </a:solidFill>
-              </a:rPr>
-              <a:t>• Erste Atmosphäre bildete sich</a:t>
-            </a:r>
-          </a:p>
-        </p:txBody>
-      </p:sp>
-      <p:sp>
-        <p:nvSpPr>
-          <p:cNvPr id="20" name="Rectangle 19"/>
-          <p:cNvSpPr/>
-          <p:nvPr/>
-        </p:nvSpPr>
-        <p:spPr>
-          <a:xfrm>
-            <a:off x="6035040" y="3840480"/>
-            <a:ext cx="5852160" cy="2560320"/>
-          </a:xfrm>
-          <a:prstGeom prst="rect">
-            <a:avLst/>
-          </a:prstGeom>
-          <a:solidFill>
-            <a:srgbClr val="0F233D"/>
-          </a:solidFill>
-          <a:ln>
-            <a:noFill/>
-          </a:ln>
-        </p:spPr>
-        <p:style>
-          <a:lnRef idx="1">
-            <a:schemeClr val="accent1"/>
-          </a:lnRef>
-          <a:fillRef idx="3">
-            <a:schemeClr val="accent1"/>
-          </a:fillRef>
-          <a:effectRef idx="2">
-            <a:schemeClr val="accent1"/>
-          </a:effectRef>
-          <a:fontRef idx="minor">
-            <a:schemeClr val="lt1"/>
-          </a:fontRef>
-        </p:style>
-        <p:txBody>
-          <a:bodyPr rtlCol="0" anchor="ctr"/>
-          <a:lstStyle/>
-          <a:p>
-            <a:pPr algn="ctr"/>
-          </a:p>
-        </p:txBody>
-      </p:sp>
-      <p:sp>
-        <p:nvSpPr>
-          <p:cNvPr id="21" name="Rectangle 20"/>
-          <p:cNvSpPr/>
-          <p:nvPr/>
-        </p:nvSpPr>
-        <p:spPr>
-          <a:xfrm>
-            <a:off x="6035040" y="3840480"/>
-            <a:ext cx="54864" cy="2560320"/>
-          </a:xfrm>
-          <a:prstGeom prst="rect">
-            <a:avLst/>
-          </a:prstGeom>
-          <a:solidFill>
-            <a:srgbClr val="FBBF24"/>
-          </a:solidFill>
-          <a:ln>
-            <a:noFill/>
-          </a:ln>
-        </p:spPr>
-        <p:style>
-          <a:lnRef idx="1">
-            <a:schemeClr val="accent1"/>
-          </a:lnRef>
-          <a:fillRef idx="3">
-            <a:schemeClr val="accent1"/>
-          </a:fillRef>
-          <a:effectRef idx="2">
-            <a:schemeClr val="accent1"/>
-          </a:effectRef>
-          <a:fontRef idx="minor">
-            <a:schemeClr val="lt1"/>
-          </a:fontRef>
-        </p:style>
-        <p:txBody>
-          <a:bodyPr rtlCol="0" anchor="ctr"/>
-          <a:lstStyle/>
-          <a:p>
-            <a:pPr algn="ctr"/>
-          </a:p>
-        </p:txBody>
-      </p:sp>
-      <p:sp>
-        <p:nvSpPr>
-          <p:cNvPr id="22" name="TextBox 21"/>
-          <p:cNvSpPr txBox="1"/>
-          <p:nvPr/>
-        </p:nvSpPr>
-        <p:spPr>
-          <a:xfrm>
-            <a:off x="6172200" y="3950208"/>
-            <a:ext cx="5623560" cy="347472"/>
-          </a:xfrm>
-          <a:prstGeom prst="rect">
-            <a:avLst/>
-          </a:prstGeom>
-          <a:noFill/>
-        </p:spPr>
-        <p:txBody>
-          <a:bodyPr wrap="square">
-            <a:spAutoFit/>
-          </a:bodyPr>
-          <a:lstStyle/>
-          <a:p>
-            <a:pPr algn="l"/>
-            <a:r>
-              <a:rPr sz="1500" b="1" i="0">
-                <a:solidFill>
-                  <a:srgbClr val="FBBF24"/>
-                </a:solidFill>
-              </a:rPr>
-              <a:t>Wichtige Fakten</a:t>
-            </a:r>
-          </a:p>
-        </p:txBody>
-      </p:sp>
-      <p:sp>
-        <p:nvSpPr>
-          <p:cNvPr id="23" name="TextBox 22"/>
-          <p:cNvSpPr txBox="1"/>
-          <p:nvPr/>
-        </p:nvSpPr>
-        <p:spPr>
-          <a:xfrm>
-            <a:off x="6172200" y="4315968"/>
-            <a:ext cx="5623560" cy="1993391"/>
-          </a:xfrm>
-          <a:prstGeom prst="rect">
-            <a:avLst/>
-          </a:prstGeom>
-          <a:noFill/>
-        </p:spPr>
-        <p:txBody>
-          <a:bodyPr wrap="square">
-            <a:spAutoFit/>
-          </a:bodyPr>
-          <a:lstStyle/>
-          <a:p>
-            <a:pPr algn="l"/>
-            <a:r>
-              <a:rPr sz="1700" b="0">
-                <a:solidFill>
-                  <a:srgbClr val="FFFFFF"/>
-                </a:solidFill>
-              </a:rPr>
-              <a:t>• Alter der Erde: ~4,6 Mrd. Jahre</a:t>
-            </a:r>
-          </a:p>
-          <a:p>
-            <a:pPr algn="l"/>
-            <a:r>
-              <a:rPr sz="1700" b="0">
-                <a:solidFill>
-                  <a:srgbClr val="FFFFFF"/>
-                </a:solidFill>
-              </a:rPr>
-              <a:t>• Erdradius: 6.371 km</a:t>
-            </a:r>
-          </a:p>
-          <a:p>
-            <a:pPr algn="l"/>
-            <a:r>
-              <a:rPr sz="1700" b="0">
-                <a:solidFill>
-                  <a:srgbClr val="FFFFFF"/>
-                </a:solidFill>
-              </a:rPr>
-              <a:t>• 5 Schichten: Kruste, ob. Mantel,</a:t>
-            </a:r>
-          </a:p>
-          <a:p>
-            <a:pPr algn="l"/>
-            <a:r>
-              <a:rPr sz="1700" b="0">
-                <a:solidFill>
-                  <a:srgbClr val="FFFFFF"/>
-                </a:solidFill>
-              </a:rPr>
-              <a:t>  unt. Mantel, äuß. Kern, inn. Kern</a:t>
-            </a:r>
-          </a:p>
-          <a:p>
-            <a:pPr algn="l"/>
-            <a:r>
-              <a:rPr sz="1700" b="0">
-                <a:solidFill>
-                  <a:srgbClr val="FFFFFF"/>
-                </a:solidFill>
-              </a:rPr>
-              <a:t>• Je tiefer → heißer &amp; dichter</a:t>
+            <a:pPr algn="ctr"/>
+            <a:r>
+              <a:rPr sz="1500" b="0" i="1">
+                <a:solidFill>
+                  <a:srgbClr val="94A3B8"/>
+                </a:solidFill>
+              </a:rPr>
+              <a:t>📷  Bild: Entstehung der Erde</a:t>
             </a:r>
           </a:p>
         </p:txBody>
@@ -5437,8 +7202,8 @@
         </p:nvSpPr>
         <p:spPr>
           <a:xfrm>
-            <a:off x="228600" y="73152"/>
-            <a:ext cx="9144000" cy="822960"/>
+            <a:off x="228600" y="91440"/>
+            <a:ext cx="8686800" cy="822960"/>
           </a:xfrm>
           <a:prstGeom prst="rect">
             <a:avLst/>
@@ -5453,7 +7218,7 @@
           <a:p>
             <a:pPr algn="l"/>
             <a:r>
-              <a:rPr sz="3200" b="1" i="0">
+              <a:rPr sz="3000" b="1" i="0">
                 <a:solidFill>
                   <a:srgbClr val="FFFFFF"/>
                 </a:solidFill>
@@ -5471,8 +7236,8 @@
         </p:nvSpPr>
         <p:spPr>
           <a:xfrm>
-            <a:off x="10058400" y="228600"/>
-            <a:ext cx="1920240" cy="548640"/>
+            <a:off x="9601200" y="256032"/>
+            <a:ext cx="2377440" cy="457200"/>
           </a:xfrm>
           <a:prstGeom prst="rect">
             <a:avLst/>
@@ -5487,7 +7252,7 @@
           <a:p>
             <a:pPr algn="r"/>
             <a:r>
-              <a:rPr sz="1400" b="1" i="0">
+              <a:rPr sz="1300" b="1" i="0">
                 <a:solidFill>
                   <a:srgbClr val="4ADE80"/>
                 </a:solidFill>
@@ -5548,8 +7313,8 @@
         </p:nvSpPr>
         <p:spPr>
           <a:xfrm>
-            <a:off x="274320" y="1188720"/>
-            <a:ext cx="5577840" cy="2468880"/>
+            <a:off x="274320" y="1143000"/>
+            <a:ext cx="6949440" cy="2651760"/>
           </a:xfrm>
           <a:prstGeom prst="rect">
             <a:avLst/>
@@ -5591,8 +7356,8 @@
         </p:nvSpPr>
         <p:spPr>
           <a:xfrm>
-            <a:off x="274320" y="1188720"/>
-            <a:ext cx="54864" cy="2468880"/>
+            <a:off x="274320" y="1143000"/>
+            <a:ext cx="54864" cy="2651760"/>
           </a:xfrm>
           <a:prstGeom prst="rect">
             <a:avLst/>
@@ -5634,8 +7399,8 @@
         </p:nvSpPr>
         <p:spPr>
           <a:xfrm>
-            <a:off x="411479" y="1298448"/>
-            <a:ext cx="5349240" cy="347472"/>
+            <a:off x="411479" y="1234440"/>
+            <a:ext cx="6720840" cy="347472"/>
           </a:xfrm>
           <a:prstGeom prst="rect">
             <a:avLst/>
@@ -5650,12 +7415,12 @@
           <a:p>
             <a:pPr algn="l"/>
             <a:r>
-              <a:rPr sz="1500" b="1" i="0">
+              <a:rPr sz="1400" b="1" i="0">
                 <a:solidFill>
                   <a:srgbClr val="4ADE80"/>
                 </a:solidFill>
               </a:rPr>
-              <a:t>Kontinentale Kruste</a:t>
+              <a:t>Kontinentale &amp; Ozeanische Kruste</a:t>
             </a:r>
           </a:p>
         </p:txBody>
@@ -5668,8 +7433,8 @@
         </p:nvSpPr>
         <p:spPr>
           <a:xfrm>
-            <a:off x="411479" y="1664208"/>
-            <a:ext cx="5349240" cy="1901952"/>
+            <a:off x="411479" y="1600200"/>
+            <a:ext cx="6720840" cy="2103120"/>
           </a:xfrm>
           <a:prstGeom prst="rect">
             <a:avLst/>
@@ -5684,56 +7449,45 @@
           <a:p>
             <a:pPr algn="l"/>
             <a:r>
-              <a:rPr sz="1700" b="0">
+              <a:rPr sz="1500" b="0">
                 <a:solidFill>
                   <a:srgbClr val="FFFFFF"/>
                 </a:solidFill>
               </a:rPr>
-              <a:t>• Dicke: 30–70 km</a:t>
+              <a:t>• Kontinental: 30–70 km, Granit → Kontinente</a:t>
             </a:r>
           </a:p>
           <a:p>
             <a:pPr algn="l"/>
             <a:r>
-              <a:rPr sz="1700" b="0">
+              <a:rPr sz="1500" b="0">
                 <a:solidFill>
                   <a:srgbClr val="FFFFFF"/>
                 </a:solidFill>
               </a:rPr>
-              <a:t>• Gestein: Granit (leicht)</a:t>
+              <a:t>• Ozeanisch: 5–10 km, Basalt → Ozeane</a:t>
             </a:r>
           </a:p>
           <a:p>
             <a:pPr algn="l"/>
             <a:r>
-              <a:rPr sz="1700" b="0">
+              <a:rPr sz="1500" b="0">
                 <a:solidFill>
                   <a:srgbClr val="FFFFFF"/>
                 </a:solidFill>
               </a:rPr>
-              <a:t>• Trägt die Kontinente &amp; Gebirge</a:t>
+              <a:t>• Dünnste Schicht, nur 1% der Erdmasse</a:t>
             </a:r>
           </a:p>
           <a:p>
             <a:pPr algn="l"/>
             <a:r>
-              <a:rPr sz="1700" b="0">
+              <a:rPr sz="1500" b="0">
                 <a:solidFill>
                   <a:srgbClr val="FFFFFF"/>
                 </a:solidFill>
               </a:rPr>
-              <a:t>• Älter und leichter als ozeanische Kruste</a:t>
-            </a:r>
-          </a:p>
-          <a:p>
-            <a:pPr algn="l"/>
-            <a:r>
-              <a:rPr sz="1700" b="0">
-                <a:solidFill>
-                  <a:srgbClr val="FFFFFF"/>
-                </a:solidFill>
-              </a:rPr>
-              <a:t>• Temperatur: 0°C bis ~1.000°C</a:t>
+              <a:t>• Hauptelemente: Sauerstoff, Silizium</a:t>
             </a:r>
           </a:p>
         </p:txBody>
@@ -5746,8 +7500,8 @@
         </p:nvSpPr>
         <p:spPr>
           <a:xfrm>
-            <a:off x="6035040" y="1188720"/>
-            <a:ext cx="5852160" cy="2468880"/>
+            <a:off x="274320" y="3931920"/>
+            <a:ext cx="6949440" cy="2651760"/>
           </a:xfrm>
           <a:prstGeom prst="rect">
             <a:avLst/>
@@ -5789,14 +7543,14 @@
         </p:nvSpPr>
         <p:spPr>
           <a:xfrm>
-            <a:off x="6035040" y="1188720"/>
-            <a:ext cx="54864" cy="2468880"/>
-          </a:xfrm>
-          <a:prstGeom prst="rect">
-            <a:avLst/>
-          </a:prstGeom>
-          <a:solidFill>
-            <a:srgbClr val="60A5FA"/>
+            <a:off x="274320" y="3931920"/>
+            <a:ext cx="54864" cy="2651760"/>
+          </a:xfrm>
+          <a:prstGeom prst="rect">
+            <a:avLst/>
+          </a:prstGeom>
+          <a:solidFill>
+            <a:srgbClr val="FB923C"/>
           </a:solidFill>
           <a:ln>
             <a:noFill/>
@@ -5832,8 +7586,8 @@
         </p:nvSpPr>
         <p:spPr>
           <a:xfrm>
-            <a:off x="6172200" y="1298448"/>
-            <a:ext cx="5623560" cy="347472"/>
+            <a:off x="411479" y="4023359"/>
+            <a:ext cx="6720840" cy="347472"/>
           </a:xfrm>
           <a:prstGeom prst="rect">
             <a:avLst/>
@@ -5848,12 +7602,12 @@
           <a:p>
             <a:pPr algn="l"/>
             <a:r>
-              <a:rPr sz="1500" b="1" i="0">
-                <a:solidFill>
-                  <a:srgbClr val="60A5FA"/>
-                </a:solidFill>
-              </a:rPr>
-              <a:t>Ozeanische Kruste</a:t>
+              <a:rPr sz="1400" b="1" i="0">
+                <a:solidFill>
+                  <a:srgbClr val="FB923C"/>
+                </a:solidFill>
+              </a:rPr>
+              <a:t>Tektonische Platten</a:t>
             </a:r>
           </a:p>
         </p:txBody>
@@ -5866,8 +7620,8 @@
         </p:nvSpPr>
         <p:spPr>
           <a:xfrm>
-            <a:off x="6172200" y="1664208"/>
-            <a:ext cx="5623560" cy="1901952"/>
+            <a:off x="411479" y="4389120"/>
+            <a:ext cx="6720840" cy="2103120"/>
           </a:xfrm>
           <a:prstGeom prst="rect">
             <a:avLst/>
@@ -5882,56 +7636,45 @@
           <a:p>
             <a:pPr algn="l"/>
             <a:r>
-              <a:rPr sz="1700" b="0">
+              <a:rPr sz="1500" b="0">
                 <a:solidFill>
                   <a:srgbClr val="FFFFFF"/>
                 </a:solidFill>
               </a:rPr>
-              <a:t>• Dicke: 5–10 km</a:t>
+              <a:t>• Kruste in ~15 große Platten geteilt</a:t>
             </a:r>
           </a:p>
           <a:p>
             <a:pPr algn="l"/>
             <a:r>
-              <a:rPr sz="1700" b="0">
+              <a:rPr sz="1500" b="0">
                 <a:solidFill>
                   <a:srgbClr val="FFFFFF"/>
                 </a:solidFill>
               </a:rPr>
-              <a:t>• Gestein: Basalt (schwer, dunkel)</a:t>
+              <a:t>• Bewegung: 2–10 cm/Jahr</a:t>
             </a:r>
           </a:p>
           <a:p>
             <a:pPr algn="l"/>
             <a:r>
-              <a:rPr sz="1700" b="0">
+              <a:rPr sz="1500" b="0">
                 <a:solidFill>
                   <a:srgbClr val="FFFFFF"/>
                 </a:solidFill>
               </a:rPr>
-              <a:t>• Liegt unter den Weltmeeren</a:t>
+              <a:t>• Angetrieben durch Konvektion im Mantel</a:t>
             </a:r>
           </a:p>
           <a:p>
             <a:pPr algn="l"/>
             <a:r>
-              <a:rPr sz="1700" b="0">
+              <a:rPr sz="1500" b="0">
                 <a:solidFill>
                   <a:srgbClr val="FFFFFF"/>
                 </a:solidFill>
               </a:rPr>
-              <a:t>• Jünger und dichter als Kontinentalkruste</a:t>
-            </a:r>
-          </a:p>
-          <a:p>
-            <a:pPr algn="l"/>
-            <a:r>
-              <a:rPr sz="1700" b="0">
-                <a:solidFill>
-                  <a:srgbClr val="FFFFFF"/>
-                </a:solidFill>
-              </a:rPr>
-              <a:t>• Wird an Plattengrenzen neu gebildet</a:t>
+              <a:t>• An Grenzen: Erdbeben, Vulkane, Gebirge</a:t>
             </a:r>
           </a:p>
         </p:txBody>
@@ -5944,14 +7687,14 @@
         </p:nvSpPr>
         <p:spPr>
           <a:xfrm>
-            <a:off x="274320" y="3840480"/>
-            <a:ext cx="5577840" cy="2560320"/>
-          </a:xfrm>
-          <a:prstGeom prst="rect">
-            <a:avLst/>
-          </a:prstGeom>
-          <a:solidFill>
-            <a:srgbClr val="0F233D"/>
+            <a:off x="7360920" y="1143000"/>
+            <a:ext cx="4572000" cy="5486400"/>
+          </a:xfrm>
+          <a:prstGeom prst="rect">
+            <a:avLst/>
+          </a:prstGeom>
+          <a:solidFill>
+            <a:srgbClr val="0D1E35"/>
           </a:solidFill>
           <a:ln>
             <a:noFill/>
@@ -5987,51 +7730,180 @@
         </p:nvSpPr>
         <p:spPr>
           <a:xfrm>
-            <a:off x="274320" y="3840480"/>
-            <a:ext cx="54864" cy="2560320"/>
-          </a:xfrm>
-          <a:prstGeom prst="rect">
-            <a:avLst/>
-          </a:prstGeom>
-          <a:solidFill>
-            <a:srgbClr val="FB923C"/>
-          </a:solidFill>
-          <a:ln>
-            <a:noFill/>
-          </a:ln>
-        </p:spPr>
-        <p:style>
-          <a:lnRef idx="1">
-            <a:schemeClr val="accent1"/>
-          </a:lnRef>
-          <a:fillRef idx="3">
-            <a:schemeClr val="accent1"/>
-          </a:fillRef>
-          <a:effectRef idx="2">
-            <a:schemeClr val="accent1"/>
-          </a:effectRef>
-          <a:fontRef idx="minor">
-            <a:schemeClr val="lt1"/>
-          </a:fontRef>
-        </p:style>
-        <p:txBody>
-          <a:bodyPr rtlCol="0" anchor="ctr"/>
-          <a:lstStyle/>
-          <a:p>
-            <a:pPr algn="ctr"/>
-          </a:p>
-        </p:txBody>
-      </p:sp>
-      <p:sp>
-        <p:nvSpPr>
-          <p:cNvPr id="18" name="TextBox 17"/>
+            <a:off x="7360920" y="1143000"/>
+            <a:ext cx="4572000" cy="36576"/>
+          </a:xfrm>
+          <a:prstGeom prst="rect">
+            <a:avLst/>
+          </a:prstGeom>
+          <a:solidFill>
+            <a:srgbClr val="94A3B8"/>
+          </a:solidFill>
+          <a:ln>
+            <a:noFill/>
+          </a:ln>
+        </p:spPr>
+        <p:style>
+          <a:lnRef idx="1">
+            <a:schemeClr val="accent1"/>
+          </a:lnRef>
+          <a:fillRef idx="3">
+            <a:schemeClr val="accent1"/>
+          </a:fillRef>
+          <a:effectRef idx="2">
+            <a:schemeClr val="accent1"/>
+          </a:effectRef>
+          <a:fontRef idx="minor">
+            <a:schemeClr val="lt1"/>
+          </a:fontRef>
+        </p:style>
+        <p:txBody>
+          <a:bodyPr rtlCol="0" anchor="ctr"/>
+          <a:lstStyle/>
+          <a:p>
+            <a:pPr algn="ctr"/>
+          </a:p>
+        </p:txBody>
+      </p:sp>
+      <p:sp>
+        <p:nvSpPr>
+          <p:cNvPr id="18" name="Rectangle 17"/>
+          <p:cNvSpPr/>
+          <p:nvPr/>
+        </p:nvSpPr>
+        <p:spPr>
+          <a:xfrm>
+            <a:off x="7360920" y="6592824"/>
+            <a:ext cx="4572000" cy="36576"/>
+          </a:xfrm>
+          <a:prstGeom prst="rect">
+            <a:avLst/>
+          </a:prstGeom>
+          <a:solidFill>
+            <a:srgbClr val="94A3B8"/>
+          </a:solidFill>
+          <a:ln>
+            <a:noFill/>
+          </a:ln>
+        </p:spPr>
+        <p:style>
+          <a:lnRef idx="1">
+            <a:schemeClr val="accent1"/>
+          </a:lnRef>
+          <a:fillRef idx="3">
+            <a:schemeClr val="accent1"/>
+          </a:fillRef>
+          <a:effectRef idx="2">
+            <a:schemeClr val="accent1"/>
+          </a:effectRef>
+          <a:fontRef idx="minor">
+            <a:schemeClr val="lt1"/>
+          </a:fontRef>
+        </p:style>
+        <p:txBody>
+          <a:bodyPr rtlCol="0" anchor="ctr"/>
+          <a:lstStyle/>
+          <a:p>
+            <a:pPr algn="ctr"/>
+          </a:p>
+        </p:txBody>
+      </p:sp>
+      <p:sp>
+        <p:nvSpPr>
+          <p:cNvPr id="19" name="Rectangle 18"/>
+          <p:cNvSpPr/>
+          <p:nvPr/>
+        </p:nvSpPr>
+        <p:spPr>
+          <a:xfrm>
+            <a:off x="7360920" y="1143000"/>
+            <a:ext cx="36576" cy="5486400"/>
+          </a:xfrm>
+          <a:prstGeom prst="rect">
+            <a:avLst/>
+          </a:prstGeom>
+          <a:solidFill>
+            <a:srgbClr val="94A3B8"/>
+          </a:solidFill>
+          <a:ln>
+            <a:noFill/>
+          </a:ln>
+        </p:spPr>
+        <p:style>
+          <a:lnRef idx="1">
+            <a:schemeClr val="accent1"/>
+          </a:lnRef>
+          <a:fillRef idx="3">
+            <a:schemeClr val="accent1"/>
+          </a:fillRef>
+          <a:effectRef idx="2">
+            <a:schemeClr val="accent1"/>
+          </a:effectRef>
+          <a:fontRef idx="minor">
+            <a:schemeClr val="lt1"/>
+          </a:fontRef>
+        </p:style>
+        <p:txBody>
+          <a:bodyPr rtlCol="0" anchor="ctr"/>
+          <a:lstStyle/>
+          <a:p>
+            <a:pPr algn="ctr"/>
+          </a:p>
+        </p:txBody>
+      </p:sp>
+      <p:sp>
+        <p:nvSpPr>
+          <p:cNvPr id="20" name="Rectangle 19"/>
+          <p:cNvSpPr/>
+          <p:nvPr/>
+        </p:nvSpPr>
+        <p:spPr>
+          <a:xfrm>
+            <a:off x="11896344" y="1143000"/>
+            <a:ext cx="36576" cy="5486400"/>
+          </a:xfrm>
+          <a:prstGeom prst="rect">
+            <a:avLst/>
+          </a:prstGeom>
+          <a:solidFill>
+            <a:srgbClr val="94A3B8"/>
+          </a:solidFill>
+          <a:ln>
+            <a:noFill/>
+          </a:ln>
+        </p:spPr>
+        <p:style>
+          <a:lnRef idx="1">
+            <a:schemeClr val="accent1"/>
+          </a:lnRef>
+          <a:fillRef idx="3">
+            <a:schemeClr val="accent1"/>
+          </a:fillRef>
+          <a:effectRef idx="2">
+            <a:schemeClr val="accent1"/>
+          </a:effectRef>
+          <a:fontRef idx="minor">
+            <a:schemeClr val="lt1"/>
+          </a:fontRef>
+        </p:style>
+        <p:txBody>
+          <a:bodyPr rtlCol="0" anchor="ctr"/>
+          <a:lstStyle/>
+          <a:p>
+            <a:pPr algn="ctr"/>
+          </a:p>
+        </p:txBody>
+      </p:sp>
+      <p:sp>
+        <p:nvSpPr>
+          <p:cNvPr id="21" name="TextBox 20"/>
           <p:cNvSpPr txBox="1"/>
           <p:nvPr/>
         </p:nvSpPr>
         <p:spPr>
           <a:xfrm>
-            <a:off x="411479" y="3950208"/>
-            <a:ext cx="5349240" cy="347472"/>
+            <a:off x="7360920" y="3611880"/>
+            <a:ext cx="4572000" cy="548640"/>
           </a:xfrm>
           <a:prstGeom prst="rect">
             <a:avLst/>
@@ -6044,279 +7916,14 @@
           </a:bodyPr>
           <a:lstStyle/>
           <a:p>
-            <a:pPr algn="l"/>
-            <a:r>
-              <a:rPr sz="1500" b="1" i="0">
-                <a:solidFill>
-                  <a:srgbClr val="FB923C"/>
-                </a:solidFill>
-              </a:rPr>
-              <a:t>Tektonische Platten</a:t>
-            </a:r>
-          </a:p>
-        </p:txBody>
-      </p:sp>
-      <p:sp>
-        <p:nvSpPr>
-          <p:cNvPr id="19" name="TextBox 18"/>
-          <p:cNvSpPr txBox="1"/>
-          <p:nvPr/>
-        </p:nvSpPr>
-        <p:spPr>
-          <a:xfrm>
-            <a:off x="411479" y="4315968"/>
-            <a:ext cx="5349240" cy="1993391"/>
-          </a:xfrm>
-          <a:prstGeom prst="rect">
-            <a:avLst/>
-          </a:prstGeom>
-          <a:noFill/>
-        </p:spPr>
-        <p:txBody>
-          <a:bodyPr wrap="square">
-            <a:spAutoFit/>
-          </a:bodyPr>
-          <a:lstStyle/>
-          <a:p>
-            <a:pPr algn="l"/>
-            <a:r>
-              <a:rPr sz="1700" b="0">
-                <a:solidFill>
-                  <a:srgbClr val="FFFFFF"/>
-                </a:solidFill>
-              </a:rPr>
-              <a:t>• Erdkruste ist in ~15 große Platten geteilt</a:t>
-            </a:r>
-          </a:p>
-          <a:p>
-            <a:pPr algn="l"/>
-            <a:r>
-              <a:rPr sz="1700" b="0">
-                <a:solidFill>
-                  <a:srgbClr val="FFFFFF"/>
-                </a:solidFill>
-              </a:rPr>
-              <a:t>• Platten bewegen sich: 2–10 cm/Jahr</a:t>
-            </a:r>
-          </a:p>
-          <a:p>
-            <a:pPr algn="l"/>
-            <a:r>
-              <a:rPr sz="1700" b="0">
-                <a:solidFill>
-                  <a:srgbClr val="FFFFFF"/>
-                </a:solidFill>
-              </a:rPr>
-              <a:t>• Angetrieben durch Konvektion im Mantel</a:t>
-            </a:r>
-          </a:p>
-          <a:p>
-            <a:pPr algn="l"/>
-            <a:r>
-              <a:rPr sz="1700" b="0">
-                <a:solidFill>
-                  <a:srgbClr val="FFFFFF"/>
-                </a:solidFill>
-              </a:rPr>
-              <a:t>• An Grenzen: Erdbeben, Vulkane, Gebirge</a:t>
-            </a:r>
-          </a:p>
-        </p:txBody>
-      </p:sp>
-      <p:sp>
-        <p:nvSpPr>
-          <p:cNvPr id="20" name="Rectangle 19"/>
-          <p:cNvSpPr/>
-          <p:nvPr/>
-        </p:nvSpPr>
-        <p:spPr>
-          <a:xfrm>
-            <a:off x="6035040" y="3840480"/>
-            <a:ext cx="5852160" cy="2560320"/>
-          </a:xfrm>
-          <a:prstGeom prst="rect">
-            <a:avLst/>
-          </a:prstGeom>
-          <a:solidFill>
-            <a:srgbClr val="0F233D"/>
-          </a:solidFill>
-          <a:ln>
-            <a:noFill/>
-          </a:ln>
-        </p:spPr>
-        <p:style>
-          <a:lnRef idx="1">
-            <a:schemeClr val="accent1"/>
-          </a:lnRef>
-          <a:fillRef idx="3">
-            <a:schemeClr val="accent1"/>
-          </a:fillRef>
-          <a:effectRef idx="2">
-            <a:schemeClr val="accent1"/>
-          </a:effectRef>
-          <a:fontRef idx="minor">
-            <a:schemeClr val="lt1"/>
-          </a:fontRef>
-        </p:style>
-        <p:txBody>
-          <a:bodyPr rtlCol="0" anchor="ctr"/>
-          <a:lstStyle/>
-          <a:p>
-            <a:pPr algn="ctr"/>
-          </a:p>
-        </p:txBody>
-      </p:sp>
-      <p:sp>
-        <p:nvSpPr>
-          <p:cNvPr id="21" name="Rectangle 20"/>
-          <p:cNvSpPr/>
-          <p:nvPr/>
-        </p:nvSpPr>
-        <p:spPr>
-          <a:xfrm>
-            <a:off x="6035040" y="3840480"/>
-            <a:ext cx="54864" cy="2560320"/>
-          </a:xfrm>
-          <a:prstGeom prst="rect">
-            <a:avLst/>
-          </a:prstGeom>
-          <a:solidFill>
-            <a:srgbClr val="4ADE80"/>
-          </a:solidFill>
-          <a:ln>
-            <a:noFill/>
-          </a:ln>
-        </p:spPr>
-        <p:style>
-          <a:lnRef idx="1">
-            <a:schemeClr val="accent1"/>
-          </a:lnRef>
-          <a:fillRef idx="3">
-            <a:schemeClr val="accent1"/>
-          </a:fillRef>
-          <a:effectRef idx="2">
-            <a:schemeClr val="accent1"/>
-          </a:effectRef>
-          <a:fontRef idx="minor">
-            <a:schemeClr val="lt1"/>
-          </a:fontRef>
-        </p:style>
-        <p:txBody>
-          <a:bodyPr rtlCol="0" anchor="ctr"/>
-          <a:lstStyle/>
-          <a:p>
-            <a:pPr algn="ctr"/>
-          </a:p>
-        </p:txBody>
-      </p:sp>
-      <p:sp>
-        <p:nvSpPr>
-          <p:cNvPr id="22" name="TextBox 21"/>
-          <p:cNvSpPr txBox="1"/>
-          <p:nvPr/>
-        </p:nvSpPr>
-        <p:spPr>
-          <a:xfrm>
-            <a:off x="6172200" y="3950208"/>
-            <a:ext cx="5623560" cy="347472"/>
-          </a:xfrm>
-          <a:prstGeom prst="rect">
-            <a:avLst/>
-          </a:prstGeom>
-          <a:noFill/>
-        </p:spPr>
-        <p:txBody>
-          <a:bodyPr wrap="square">
-            <a:spAutoFit/>
-          </a:bodyPr>
-          <a:lstStyle/>
-          <a:p>
-            <a:pPr algn="l"/>
-            <a:r>
-              <a:rPr sz="1500" b="1" i="0">
-                <a:solidFill>
-                  <a:srgbClr val="4ADE80"/>
-                </a:solidFill>
-              </a:rPr>
-              <a:t>Wichtige Fakten</a:t>
-            </a:r>
-          </a:p>
-        </p:txBody>
-      </p:sp>
-      <p:sp>
-        <p:nvSpPr>
-          <p:cNvPr id="23" name="TextBox 22"/>
-          <p:cNvSpPr txBox="1"/>
-          <p:nvPr/>
-        </p:nvSpPr>
-        <p:spPr>
-          <a:xfrm>
-            <a:off x="6172200" y="4315968"/>
-            <a:ext cx="5623560" cy="1993391"/>
-          </a:xfrm>
-          <a:prstGeom prst="rect">
-            <a:avLst/>
-          </a:prstGeom>
-          <a:noFill/>
-        </p:spPr>
-        <p:txBody>
-          <a:bodyPr wrap="square">
-            <a:spAutoFit/>
-          </a:bodyPr>
-          <a:lstStyle/>
-          <a:p>
-            <a:pPr algn="l"/>
-            <a:r>
-              <a:rPr sz="1700" b="0">
-                <a:solidFill>
-                  <a:srgbClr val="FFFFFF"/>
-                </a:solidFill>
-              </a:rPr>
-              <a:t>• Dünnste Schicht der Erde</a:t>
-            </a:r>
-          </a:p>
-          <a:p>
-            <a:pPr algn="l"/>
-            <a:r>
-              <a:rPr sz="1700" b="0">
-                <a:solidFill>
-                  <a:srgbClr val="FFFFFF"/>
-                </a:solidFill>
-              </a:rPr>
-              <a:t>• Nur ~1% der Erdmasse</a:t>
-            </a:r>
-          </a:p>
-          <a:p>
-            <a:pPr algn="l"/>
-            <a:r>
-              <a:rPr sz="1700" b="0">
-                <a:solidFill>
-                  <a:srgbClr val="FFFFFF"/>
-                </a:solidFill>
-              </a:rPr>
-              <a:t>• Hauptelemente: Sauerstoff, Silizium,</a:t>
-            </a:r>
-          </a:p>
-          <a:p>
-            <a:pPr algn="l"/>
-            <a:r>
-              <a:rPr sz="1700" b="0">
-                <a:solidFill>
-                  <a:srgbClr val="FFFFFF"/>
-                </a:solidFill>
-              </a:rPr>
-              <a:t>  Aluminium</a:t>
-            </a:r>
-          </a:p>
-          <a:p>
-            <a:pPr algn="l"/>
-            <a:r>
-              <a:rPr sz="1700" b="0">
-                <a:solidFill>
-                  <a:srgbClr val="FFFFFF"/>
-                </a:solidFill>
-              </a:rPr>
-              <a:t>• Dichte: 2,7–3,0 g/cm³</a:t>
+            <a:pPr algn="ctr"/>
+            <a:r>
+              <a:rPr sz="1500" b="0" i="1">
+                <a:solidFill>
+                  <a:srgbClr val="94A3B8"/>
+                </a:solidFill>
+              </a:rPr>
+              <a:t>📷  Bild: Erdkruste / Platten</a:t>
             </a:r>
           </a:p>
         </p:txBody>
@@ -6476,8 +8083,8 @@
         </p:nvSpPr>
         <p:spPr>
           <a:xfrm>
-            <a:off x="228600" y="73152"/>
-            <a:ext cx="9144000" cy="822960"/>
+            <a:off x="228600" y="91440"/>
+            <a:ext cx="8686800" cy="822960"/>
           </a:xfrm>
           <a:prstGeom prst="rect">
             <a:avLst/>
@@ -6492,7 +8099,7 @@
           <a:p>
             <a:pPr algn="l"/>
             <a:r>
-              <a:rPr sz="3200" b="1" i="0">
+              <a:rPr sz="3000" b="1" i="0">
                 <a:solidFill>
                   <a:srgbClr val="FFFFFF"/>
                 </a:solidFill>
@@ -6510,8 +8117,8 @@
         </p:nvSpPr>
         <p:spPr>
           <a:xfrm>
-            <a:off x="10058400" y="228600"/>
-            <a:ext cx="1920240" cy="548640"/>
+            <a:off x="9601200" y="256032"/>
+            <a:ext cx="2377440" cy="457200"/>
           </a:xfrm>
           <a:prstGeom prst="rect">
             <a:avLst/>
@@ -6526,7 +8133,7 @@
           <a:p>
             <a:pPr algn="r"/>
             <a:r>
-              <a:rPr sz="1400" b="1" i="0">
+              <a:rPr sz="1300" b="1" i="0">
                 <a:solidFill>
                   <a:srgbClr val="60A5FA"/>
                 </a:solidFill>
@@ -6587,8 +8194,8 @@
         </p:nvSpPr>
         <p:spPr>
           <a:xfrm>
-            <a:off x="274320" y="1188720"/>
-            <a:ext cx="5577840" cy="2468880"/>
+            <a:off x="274320" y="1143000"/>
+            <a:ext cx="6949440" cy="2651760"/>
           </a:xfrm>
           <a:prstGeom prst="rect">
             <a:avLst/>
@@ -6630,8 +8237,8 @@
         </p:nvSpPr>
         <p:spPr>
           <a:xfrm>
-            <a:off x="274320" y="1188720"/>
-            <a:ext cx="54864" cy="2468880"/>
+            <a:off x="274320" y="1143000"/>
+            <a:ext cx="54864" cy="2651760"/>
           </a:xfrm>
           <a:prstGeom prst="rect">
             <a:avLst/>
@@ -6673,8 +8280,8 @@
         </p:nvSpPr>
         <p:spPr>
           <a:xfrm>
-            <a:off x="411479" y="1298448"/>
-            <a:ext cx="5349240" cy="347472"/>
+            <a:off x="411479" y="1234440"/>
+            <a:ext cx="6720840" cy="347472"/>
           </a:xfrm>
           <a:prstGeom prst="rect">
             <a:avLst/>
@@ -6689,12 +8296,12 @@
           <a:p>
             <a:pPr algn="l"/>
             <a:r>
-              <a:rPr sz="1500" b="1" i="0">
+              <a:rPr sz="1400" b="1" i="0">
                 <a:solidFill>
                   <a:srgbClr val="60A5FA"/>
                 </a:solidFill>
               </a:rPr>
-              <a:t>Aufbau &amp; Eigenschaften</a:t>
+              <a:t>Aufbau &amp; Asthenosphäre</a:t>
             </a:r>
           </a:p>
         </p:txBody>
@@ -6707,8 +8314,8 @@
         </p:nvSpPr>
         <p:spPr>
           <a:xfrm>
-            <a:off x="411479" y="1664208"/>
-            <a:ext cx="5349240" cy="1901952"/>
+            <a:off x="411479" y="1600200"/>
+            <a:ext cx="6720840" cy="2103120"/>
           </a:xfrm>
           <a:prstGeom prst="rect">
             <a:avLst/>
@@ -6723,7 +8330,7 @@
           <a:p>
             <a:pPr algn="l"/>
             <a:r>
-              <a:rPr sz="1700" b="0">
+              <a:rPr sz="1500" b="0">
                 <a:solidFill>
                   <a:srgbClr val="FFFFFF"/>
                 </a:solidFill>
@@ -6734,7 +8341,7 @@
           <a:p>
             <a:pPr algn="l"/>
             <a:r>
-              <a:rPr sz="1700" b="0">
+              <a:rPr sz="1500" b="0">
                 <a:solidFill>
                   <a:srgbClr val="FFFFFF"/>
                 </a:solidFill>
@@ -6745,34 +8352,34 @@
           <a:p>
             <a:pPr algn="l"/>
             <a:r>
-              <a:rPr sz="1700" b="0">
+              <a:rPr sz="1500" b="0">
                 <a:solidFill>
                   <a:srgbClr val="FFFFFF"/>
                 </a:solidFill>
               </a:rPr>
-              <a:t>• Gestein: Peridotit, Olivin</a:t>
+              <a:t>• Temperatur: 1.000 – 1.600°C</a:t>
             </a:r>
           </a:p>
           <a:p>
             <a:pPr algn="l"/>
             <a:r>
-              <a:rPr sz="1700" b="0">
+              <a:rPr sz="1500" b="0">
                 <a:solidFill>
                   <a:srgbClr val="FFFFFF"/>
                 </a:solidFill>
               </a:rPr>
-              <a:t>• Temperatur: 1.000 – 1.600°C</a:t>
+              <a:t>• Platten 'schwimmen' auf der Asthenosphäre</a:t>
             </a:r>
           </a:p>
           <a:p>
             <a:pPr algn="l"/>
             <a:r>
-              <a:rPr sz="1700" b="0">
+              <a:rPr sz="1500" b="0">
                 <a:solidFill>
                   <a:srgbClr val="FFFFFF"/>
                 </a:solidFill>
               </a:rPr>
-              <a:t>• Dichte: 3,3 – 3,5 g/cm³</a:t>
+              <a:t>• Magma kann hier entstehen</a:t>
             </a:r>
           </a:p>
         </p:txBody>
@@ -6785,8 +8392,8 @@
         </p:nvSpPr>
         <p:spPr>
           <a:xfrm>
-            <a:off x="6035040" y="1188720"/>
-            <a:ext cx="5852160" cy="2468880"/>
+            <a:off x="274320" y="3931920"/>
+            <a:ext cx="6949440" cy="2651760"/>
           </a:xfrm>
           <a:prstGeom prst="rect">
             <a:avLst/>
@@ -6828,8 +8435,8 @@
         </p:nvSpPr>
         <p:spPr>
           <a:xfrm>
-            <a:off x="6035040" y="1188720"/>
-            <a:ext cx="54864" cy="2468880"/>
+            <a:off x="274320" y="3931920"/>
+            <a:ext cx="54864" cy="2651760"/>
           </a:xfrm>
           <a:prstGeom prst="rect">
             <a:avLst/>
@@ -6871,8 +8478,8 @@
         </p:nvSpPr>
         <p:spPr>
           <a:xfrm>
-            <a:off x="6172200" y="1298448"/>
-            <a:ext cx="5623560" cy="347472"/>
+            <a:off x="411479" y="4023359"/>
+            <a:ext cx="6720840" cy="347472"/>
           </a:xfrm>
           <a:prstGeom prst="rect">
             <a:avLst/>
@@ -6887,12 +8494,12 @@
           <a:p>
             <a:pPr algn="l"/>
             <a:r>
-              <a:rPr sz="1500" b="1" i="0">
+              <a:rPr sz="1400" b="1" i="0">
                 <a:solidFill>
                   <a:srgbClr val="2DD4BF"/>
                 </a:solidFill>
               </a:rPr>
-              <a:t>Asthenosphäre</a:t>
+              <a:t>Konvektion</a:t>
             </a:r>
           </a:p>
         </p:txBody>
@@ -6905,8 +8512,8 @@
         </p:nvSpPr>
         <p:spPr>
           <a:xfrm>
-            <a:off x="6172200" y="1664208"/>
-            <a:ext cx="5623560" cy="1901952"/>
+            <a:off x="411479" y="4389120"/>
+            <a:ext cx="6720840" cy="2103120"/>
           </a:xfrm>
           <a:prstGeom prst="rect">
             <a:avLst/>
@@ -6921,56 +8528,45 @@
           <a:p>
             <a:pPr algn="l"/>
             <a:r>
-              <a:rPr sz="1700" b="0">
+              <a:rPr sz="1500" b="0">
                 <a:solidFill>
                   <a:srgbClr val="FFFFFF"/>
                 </a:solidFill>
               </a:rPr>
-              <a:t>• Oberer Teil des Mantels</a:t>
+              <a:t>• Heißes Gestein steigt auf</a:t>
             </a:r>
           </a:p>
           <a:p>
             <a:pPr algn="l"/>
             <a:r>
-              <a:rPr sz="1700" b="0">
+              <a:rPr sz="1500" b="0">
                 <a:solidFill>
                   <a:srgbClr val="FFFFFF"/>
                 </a:solidFill>
               </a:rPr>
-              <a:t>• Plastisch verformbar wie Kaugummi</a:t>
+              <a:t>• Kühlt ab und sinkt wieder</a:t>
             </a:r>
           </a:p>
           <a:p>
             <a:pPr algn="l"/>
             <a:r>
-              <a:rPr sz="1700" b="0">
+              <a:rPr sz="1500" b="0">
                 <a:solidFill>
                   <a:srgbClr val="FFFFFF"/>
                 </a:solidFill>
               </a:rPr>
-              <a:t>• Tektonische Platten 'schwimmen' darauf</a:t>
+              <a:t>• Wie in einem Kochtopf</a:t>
             </a:r>
           </a:p>
           <a:p>
             <a:pPr algn="l"/>
             <a:r>
-              <a:rPr sz="1700" b="0">
+              <a:rPr sz="1500" b="0">
                 <a:solidFill>
                   <a:srgbClr val="FFFFFF"/>
                 </a:solidFill>
               </a:rPr>
-              <a:t>• Magma kann hier entstehen</a:t>
-            </a:r>
-          </a:p>
-          <a:p>
-            <a:pPr algn="l"/>
-            <a:r>
-              <a:rPr sz="1700" b="0">
-                <a:solidFill>
-                  <a:srgbClr val="FFFFFF"/>
-                </a:solidFill>
-              </a:rPr>
-              <a:t>• Ermöglicht Plattenbewegung</a:t>
+              <a:t>• Treibt die tektonischen Platten an</a:t>
             </a:r>
           </a:p>
         </p:txBody>
@@ -6983,14 +8579,14 @@
         </p:nvSpPr>
         <p:spPr>
           <a:xfrm>
-            <a:off x="274320" y="3840480"/>
-            <a:ext cx="5577840" cy="2560320"/>
-          </a:xfrm>
-          <a:prstGeom prst="rect">
-            <a:avLst/>
-          </a:prstGeom>
-          <a:solidFill>
-            <a:srgbClr val="0F233D"/>
+            <a:off x="7360920" y="1143000"/>
+            <a:ext cx="4572000" cy="5486400"/>
+          </a:xfrm>
+          <a:prstGeom prst="rect">
+            <a:avLst/>
+          </a:prstGeom>
+          <a:solidFill>
+            <a:srgbClr val="0D1E35"/>
           </a:solidFill>
           <a:ln>
             <a:noFill/>
@@ -7026,51 +8622,180 @@
         </p:nvSpPr>
         <p:spPr>
           <a:xfrm>
-            <a:off x="274320" y="3840480"/>
-            <a:ext cx="54864" cy="2560320"/>
-          </a:xfrm>
-          <a:prstGeom prst="rect">
-            <a:avLst/>
-          </a:prstGeom>
-          <a:solidFill>
-            <a:srgbClr val="FB923C"/>
-          </a:solidFill>
-          <a:ln>
-            <a:noFill/>
-          </a:ln>
-        </p:spPr>
-        <p:style>
-          <a:lnRef idx="1">
-            <a:schemeClr val="accent1"/>
-          </a:lnRef>
-          <a:fillRef idx="3">
-            <a:schemeClr val="accent1"/>
-          </a:fillRef>
-          <a:effectRef idx="2">
-            <a:schemeClr val="accent1"/>
-          </a:effectRef>
-          <a:fontRef idx="minor">
-            <a:schemeClr val="lt1"/>
-          </a:fontRef>
-        </p:style>
-        <p:txBody>
-          <a:bodyPr rtlCol="0" anchor="ctr"/>
-          <a:lstStyle/>
-          <a:p>
-            <a:pPr algn="ctr"/>
-          </a:p>
-        </p:txBody>
-      </p:sp>
-      <p:sp>
-        <p:nvSpPr>
-          <p:cNvPr id="18" name="TextBox 17"/>
+            <a:off x="7360920" y="1143000"/>
+            <a:ext cx="4572000" cy="36576"/>
+          </a:xfrm>
+          <a:prstGeom prst="rect">
+            <a:avLst/>
+          </a:prstGeom>
+          <a:solidFill>
+            <a:srgbClr val="94A3B8"/>
+          </a:solidFill>
+          <a:ln>
+            <a:noFill/>
+          </a:ln>
+        </p:spPr>
+        <p:style>
+          <a:lnRef idx="1">
+            <a:schemeClr val="accent1"/>
+          </a:lnRef>
+          <a:fillRef idx="3">
+            <a:schemeClr val="accent1"/>
+          </a:fillRef>
+          <a:effectRef idx="2">
+            <a:schemeClr val="accent1"/>
+          </a:effectRef>
+          <a:fontRef idx="minor">
+            <a:schemeClr val="lt1"/>
+          </a:fontRef>
+        </p:style>
+        <p:txBody>
+          <a:bodyPr rtlCol="0" anchor="ctr"/>
+          <a:lstStyle/>
+          <a:p>
+            <a:pPr algn="ctr"/>
+          </a:p>
+        </p:txBody>
+      </p:sp>
+      <p:sp>
+        <p:nvSpPr>
+          <p:cNvPr id="18" name="Rectangle 17"/>
+          <p:cNvSpPr/>
+          <p:nvPr/>
+        </p:nvSpPr>
+        <p:spPr>
+          <a:xfrm>
+            <a:off x="7360920" y="6592824"/>
+            <a:ext cx="4572000" cy="36576"/>
+          </a:xfrm>
+          <a:prstGeom prst="rect">
+            <a:avLst/>
+          </a:prstGeom>
+          <a:solidFill>
+            <a:srgbClr val="94A3B8"/>
+          </a:solidFill>
+          <a:ln>
+            <a:noFill/>
+          </a:ln>
+        </p:spPr>
+        <p:style>
+          <a:lnRef idx="1">
+            <a:schemeClr val="accent1"/>
+          </a:lnRef>
+          <a:fillRef idx="3">
+            <a:schemeClr val="accent1"/>
+          </a:fillRef>
+          <a:effectRef idx="2">
+            <a:schemeClr val="accent1"/>
+          </a:effectRef>
+          <a:fontRef idx="minor">
+            <a:schemeClr val="lt1"/>
+          </a:fontRef>
+        </p:style>
+        <p:txBody>
+          <a:bodyPr rtlCol="0" anchor="ctr"/>
+          <a:lstStyle/>
+          <a:p>
+            <a:pPr algn="ctr"/>
+          </a:p>
+        </p:txBody>
+      </p:sp>
+      <p:sp>
+        <p:nvSpPr>
+          <p:cNvPr id="19" name="Rectangle 18"/>
+          <p:cNvSpPr/>
+          <p:nvPr/>
+        </p:nvSpPr>
+        <p:spPr>
+          <a:xfrm>
+            <a:off x="7360920" y="1143000"/>
+            <a:ext cx="36576" cy="5486400"/>
+          </a:xfrm>
+          <a:prstGeom prst="rect">
+            <a:avLst/>
+          </a:prstGeom>
+          <a:solidFill>
+            <a:srgbClr val="94A3B8"/>
+          </a:solidFill>
+          <a:ln>
+            <a:noFill/>
+          </a:ln>
+        </p:spPr>
+        <p:style>
+          <a:lnRef idx="1">
+            <a:schemeClr val="accent1"/>
+          </a:lnRef>
+          <a:fillRef idx="3">
+            <a:schemeClr val="accent1"/>
+          </a:fillRef>
+          <a:effectRef idx="2">
+            <a:schemeClr val="accent1"/>
+          </a:effectRef>
+          <a:fontRef idx="minor">
+            <a:schemeClr val="lt1"/>
+          </a:fontRef>
+        </p:style>
+        <p:txBody>
+          <a:bodyPr rtlCol="0" anchor="ctr"/>
+          <a:lstStyle/>
+          <a:p>
+            <a:pPr algn="ctr"/>
+          </a:p>
+        </p:txBody>
+      </p:sp>
+      <p:sp>
+        <p:nvSpPr>
+          <p:cNvPr id="20" name="Rectangle 19"/>
+          <p:cNvSpPr/>
+          <p:nvPr/>
+        </p:nvSpPr>
+        <p:spPr>
+          <a:xfrm>
+            <a:off x="11896344" y="1143000"/>
+            <a:ext cx="36576" cy="5486400"/>
+          </a:xfrm>
+          <a:prstGeom prst="rect">
+            <a:avLst/>
+          </a:prstGeom>
+          <a:solidFill>
+            <a:srgbClr val="94A3B8"/>
+          </a:solidFill>
+          <a:ln>
+            <a:noFill/>
+          </a:ln>
+        </p:spPr>
+        <p:style>
+          <a:lnRef idx="1">
+            <a:schemeClr val="accent1"/>
+          </a:lnRef>
+          <a:fillRef idx="3">
+            <a:schemeClr val="accent1"/>
+          </a:fillRef>
+          <a:effectRef idx="2">
+            <a:schemeClr val="accent1"/>
+          </a:effectRef>
+          <a:fontRef idx="minor">
+            <a:schemeClr val="lt1"/>
+          </a:fontRef>
+        </p:style>
+        <p:txBody>
+          <a:bodyPr rtlCol="0" anchor="ctr"/>
+          <a:lstStyle/>
+          <a:p>
+            <a:pPr algn="ctr"/>
+          </a:p>
+        </p:txBody>
+      </p:sp>
+      <p:sp>
+        <p:nvSpPr>
+          <p:cNvPr id="21" name="TextBox 20"/>
           <p:cNvSpPr txBox="1"/>
           <p:nvPr/>
         </p:nvSpPr>
         <p:spPr>
           <a:xfrm>
-            <a:off x="411479" y="3950208"/>
-            <a:ext cx="5349240" cy="347472"/>
+            <a:off x="7360920" y="3611880"/>
+            <a:ext cx="4572000" cy="548640"/>
           </a:xfrm>
           <a:prstGeom prst="rect">
             <a:avLst/>
@@ -7083,279 +8808,14 @@
           </a:bodyPr>
           <a:lstStyle/>
           <a:p>
-            <a:pPr algn="l"/>
-            <a:r>
-              <a:rPr sz="1500" b="1" i="0">
-                <a:solidFill>
-                  <a:srgbClr val="FB923C"/>
-                </a:solidFill>
-              </a:rPr>
-              <a:t>Konvektion</a:t>
-            </a:r>
-          </a:p>
-        </p:txBody>
-      </p:sp>
-      <p:sp>
-        <p:nvSpPr>
-          <p:cNvPr id="19" name="TextBox 18"/>
-          <p:cNvSpPr txBox="1"/>
-          <p:nvPr/>
-        </p:nvSpPr>
-        <p:spPr>
-          <a:xfrm>
-            <a:off x="411479" y="4315968"/>
-            <a:ext cx="5349240" cy="1993391"/>
-          </a:xfrm>
-          <a:prstGeom prst="rect">
-            <a:avLst/>
-          </a:prstGeom>
-          <a:noFill/>
-        </p:spPr>
-        <p:txBody>
-          <a:bodyPr wrap="square">
-            <a:spAutoFit/>
-          </a:bodyPr>
-          <a:lstStyle/>
-          <a:p>
-            <a:pPr algn="l"/>
-            <a:r>
-              <a:rPr sz="1700" b="0">
-                <a:solidFill>
-                  <a:srgbClr val="FFFFFF"/>
-                </a:solidFill>
-              </a:rPr>
-              <a:t>• Heißes Gestein steigt auf</a:t>
-            </a:r>
-          </a:p>
-          <a:p>
-            <a:pPr algn="l"/>
-            <a:r>
-              <a:rPr sz="1700" b="0">
-                <a:solidFill>
-                  <a:srgbClr val="FFFFFF"/>
-                </a:solidFill>
-              </a:rPr>
-              <a:t>• Kühlt sich ab und sinkt wieder</a:t>
-            </a:r>
-          </a:p>
-          <a:p>
-            <a:pPr algn="l"/>
-            <a:r>
-              <a:rPr sz="1700" b="0">
-                <a:solidFill>
-                  <a:srgbClr val="FFFFFF"/>
-                </a:solidFill>
-              </a:rPr>
-              <a:t>• Wie in einem Kochtopf</a:t>
-            </a:r>
-          </a:p>
-          <a:p>
-            <a:pPr algn="l"/>
-            <a:r>
-              <a:rPr sz="1700" b="0">
-                <a:solidFill>
-                  <a:srgbClr val="FFFFFF"/>
-                </a:solidFill>
-              </a:rPr>
-              <a:t>• Treibt die tektonischen Platten an</a:t>
-            </a:r>
-          </a:p>
-        </p:txBody>
-      </p:sp>
-      <p:sp>
-        <p:nvSpPr>
-          <p:cNvPr id="20" name="Rectangle 19"/>
-          <p:cNvSpPr/>
-          <p:nvPr/>
-        </p:nvSpPr>
-        <p:spPr>
-          <a:xfrm>
-            <a:off x="6035040" y="3840480"/>
-            <a:ext cx="5852160" cy="2560320"/>
-          </a:xfrm>
-          <a:prstGeom prst="rect">
-            <a:avLst/>
-          </a:prstGeom>
-          <a:solidFill>
-            <a:srgbClr val="0F233D"/>
-          </a:solidFill>
-          <a:ln>
-            <a:noFill/>
-          </a:ln>
-        </p:spPr>
-        <p:style>
-          <a:lnRef idx="1">
-            <a:schemeClr val="accent1"/>
-          </a:lnRef>
-          <a:fillRef idx="3">
-            <a:schemeClr val="accent1"/>
-          </a:fillRef>
-          <a:effectRef idx="2">
-            <a:schemeClr val="accent1"/>
-          </a:effectRef>
-          <a:fontRef idx="minor">
-            <a:schemeClr val="lt1"/>
-          </a:fontRef>
-        </p:style>
-        <p:txBody>
-          <a:bodyPr rtlCol="0" anchor="ctr"/>
-          <a:lstStyle/>
-          <a:p>
-            <a:pPr algn="ctr"/>
-          </a:p>
-        </p:txBody>
-      </p:sp>
-      <p:sp>
-        <p:nvSpPr>
-          <p:cNvPr id="21" name="Rectangle 20"/>
-          <p:cNvSpPr/>
-          <p:nvPr/>
-        </p:nvSpPr>
-        <p:spPr>
-          <a:xfrm>
-            <a:off x="6035040" y="3840480"/>
-            <a:ext cx="54864" cy="2560320"/>
-          </a:xfrm>
-          <a:prstGeom prst="rect">
-            <a:avLst/>
-          </a:prstGeom>
-          <a:solidFill>
-            <a:srgbClr val="60A5FA"/>
-          </a:solidFill>
-          <a:ln>
-            <a:noFill/>
-          </a:ln>
-        </p:spPr>
-        <p:style>
-          <a:lnRef idx="1">
-            <a:schemeClr val="accent1"/>
-          </a:lnRef>
-          <a:fillRef idx="3">
-            <a:schemeClr val="accent1"/>
-          </a:fillRef>
-          <a:effectRef idx="2">
-            <a:schemeClr val="accent1"/>
-          </a:effectRef>
-          <a:fontRef idx="minor">
-            <a:schemeClr val="lt1"/>
-          </a:fontRef>
-        </p:style>
-        <p:txBody>
-          <a:bodyPr rtlCol="0" anchor="ctr"/>
-          <a:lstStyle/>
-          <a:p>
-            <a:pPr algn="ctr"/>
-          </a:p>
-        </p:txBody>
-      </p:sp>
-      <p:sp>
-        <p:nvSpPr>
-          <p:cNvPr id="22" name="TextBox 21"/>
-          <p:cNvSpPr txBox="1"/>
-          <p:nvPr/>
-        </p:nvSpPr>
-        <p:spPr>
-          <a:xfrm>
-            <a:off x="6172200" y="3950208"/>
-            <a:ext cx="5623560" cy="347472"/>
-          </a:xfrm>
-          <a:prstGeom prst="rect">
-            <a:avLst/>
-          </a:prstGeom>
-          <a:noFill/>
-        </p:spPr>
-        <p:txBody>
-          <a:bodyPr wrap="square">
-            <a:spAutoFit/>
-          </a:bodyPr>
-          <a:lstStyle/>
-          <a:p>
-            <a:pPr algn="l"/>
-            <a:r>
-              <a:rPr sz="1500" b="1" i="0">
-                <a:solidFill>
-                  <a:srgbClr val="60A5FA"/>
-                </a:solidFill>
-              </a:rPr>
-              <a:t>Wichtige Fakten</a:t>
-            </a:r>
-          </a:p>
-        </p:txBody>
-      </p:sp>
-      <p:sp>
-        <p:nvSpPr>
-          <p:cNvPr id="23" name="TextBox 22"/>
-          <p:cNvSpPr txBox="1"/>
-          <p:nvPr/>
-        </p:nvSpPr>
-        <p:spPr>
-          <a:xfrm>
-            <a:off x="6172200" y="4315968"/>
-            <a:ext cx="5623560" cy="1993391"/>
-          </a:xfrm>
-          <a:prstGeom prst="rect">
-            <a:avLst/>
-          </a:prstGeom>
-          <a:noFill/>
-        </p:spPr>
-        <p:txBody>
-          <a:bodyPr wrap="square">
-            <a:spAutoFit/>
-          </a:bodyPr>
-          <a:lstStyle/>
-          <a:p>
-            <a:pPr algn="l"/>
-            <a:r>
-              <a:rPr sz="1700" b="0">
-                <a:solidFill>
-                  <a:srgbClr val="FFFFFF"/>
-                </a:solidFill>
-              </a:rPr>
-              <a:t>• Macht ~10% des Erdvolumens aus</a:t>
-            </a:r>
-          </a:p>
-          <a:p>
-            <a:pPr algn="l"/>
-            <a:r>
-              <a:rPr sz="1700" b="0">
-                <a:solidFill>
-                  <a:srgbClr val="FFFFFF"/>
-                </a:solidFill>
-              </a:rPr>
-              <a:t>• Hauptelemente: Sauerstoff,</a:t>
-            </a:r>
-          </a:p>
-          <a:p>
-            <a:pPr algn="l"/>
-            <a:r>
-              <a:rPr sz="1700" b="0">
-                <a:solidFill>
-                  <a:srgbClr val="FFFFFF"/>
-                </a:solidFill>
-              </a:rPr>
-              <a:t>  Magnesium, Silizium, Eisen</a:t>
-            </a:r>
-          </a:p>
-          <a:p>
-            <a:pPr algn="l"/>
-            <a:r>
-              <a:rPr sz="1700" b="0">
-                <a:solidFill>
-                  <a:srgbClr val="FFFFFF"/>
-                </a:solidFill>
-              </a:rPr>
-              <a:t>• Verbindung zur Erdkruste:</a:t>
-            </a:r>
-          </a:p>
-          <a:p>
-            <a:pPr algn="l"/>
-            <a:r>
-              <a:rPr sz="1700" b="0">
-                <a:solidFill>
-                  <a:srgbClr val="FFFFFF"/>
-                </a:solidFill>
-              </a:rPr>
-              <a:t>  Lithosphäre = Kruste + ob. Mantel</a:t>
+            <a:pPr algn="ctr"/>
+            <a:r>
+              <a:rPr sz="1500" b="0" i="1">
+                <a:solidFill>
+                  <a:srgbClr val="94A3B8"/>
+                </a:solidFill>
+              </a:rPr>
+              <a:t>📷  Bild: Oberer Erdmantel</a:t>
             </a:r>
           </a:p>
         </p:txBody>
@@ -7515,8 +8975,8 @@
         </p:nvSpPr>
         <p:spPr>
           <a:xfrm>
-            <a:off x="228600" y="73152"/>
-            <a:ext cx="9144000" cy="822960"/>
+            <a:off x="228600" y="91440"/>
+            <a:ext cx="8686800" cy="822960"/>
           </a:xfrm>
           <a:prstGeom prst="rect">
             <a:avLst/>
@@ -7531,7 +8991,7 @@
           <a:p>
             <a:pPr algn="l"/>
             <a:r>
-              <a:rPr sz="3200" b="1" i="0">
+              <a:rPr sz="3000" b="1" i="0">
                 <a:solidFill>
                   <a:srgbClr val="FFFFFF"/>
                 </a:solidFill>
@@ -7549,8 +9009,8 @@
         </p:nvSpPr>
         <p:spPr>
           <a:xfrm>
-            <a:off x="10058400" y="228600"/>
-            <a:ext cx="1920240" cy="548640"/>
+            <a:off x="9601200" y="256032"/>
+            <a:ext cx="2377440" cy="457200"/>
           </a:xfrm>
           <a:prstGeom prst="rect">
             <a:avLst/>
@@ -7565,7 +9025,7 @@
           <a:p>
             <a:pPr algn="r"/>
             <a:r>
-              <a:rPr sz="1400" b="1" i="0">
+              <a:rPr sz="1300" b="1" i="0">
                 <a:solidFill>
                   <a:srgbClr val="FB923C"/>
                 </a:solidFill>
@@ -7626,8 +9086,8 @@
         </p:nvSpPr>
         <p:spPr>
           <a:xfrm>
-            <a:off x="274320" y="1188720"/>
-            <a:ext cx="5577840" cy="2468880"/>
+            <a:off x="274320" y="1143000"/>
+            <a:ext cx="6949440" cy="2651760"/>
           </a:xfrm>
           <a:prstGeom prst="rect">
             <a:avLst/>
@@ -7669,8 +9129,8 @@
         </p:nvSpPr>
         <p:spPr>
           <a:xfrm>
-            <a:off x="274320" y="1188720"/>
-            <a:ext cx="54864" cy="2468880"/>
+            <a:off x="274320" y="1143000"/>
+            <a:ext cx="54864" cy="2651760"/>
           </a:xfrm>
           <a:prstGeom prst="rect">
             <a:avLst/>
@@ -7712,8 +9172,8 @@
         </p:nvSpPr>
         <p:spPr>
           <a:xfrm>
-            <a:off x="411479" y="1298448"/>
-            <a:ext cx="5349240" cy="347472"/>
+            <a:off x="411479" y="1234440"/>
+            <a:ext cx="6720840" cy="347472"/>
           </a:xfrm>
           <a:prstGeom prst="rect">
             <a:avLst/>
@@ -7728,12 +9188,12 @@
           <a:p>
             <a:pPr algn="l"/>
             <a:r>
-              <a:rPr sz="1500" b="1" i="0">
+              <a:rPr sz="1400" b="1" i="0">
                 <a:solidFill>
                   <a:srgbClr val="FB923C"/>
                 </a:solidFill>
               </a:rPr>
-              <a:t>Aufbau &amp; Eigenschaften</a:t>
+              <a:t>Aufbau &amp; Mesosphäre</a:t>
             </a:r>
           </a:p>
         </p:txBody>
@@ -7746,8 +9206,8 @@
         </p:nvSpPr>
         <p:spPr>
           <a:xfrm>
-            <a:off x="411479" y="1664208"/>
-            <a:ext cx="5349240" cy="1901952"/>
+            <a:off x="411479" y="1600200"/>
+            <a:ext cx="6720840" cy="2103120"/>
           </a:xfrm>
           <a:prstGeom prst="rect">
             <a:avLst/>
@@ -7762,7 +9222,7 @@
           <a:p>
             <a:pPr algn="l"/>
             <a:r>
-              <a:rPr sz="1700" b="0">
+              <a:rPr sz="1500" b="0">
                 <a:solidFill>
                   <a:srgbClr val="FFFFFF"/>
                 </a:solidFill>
@@ -7773,45 +9233,45 @@
           <a:p>
             <a:pPr algn="l"/>
             <a:r>
-              <a:rPr sz="1700" b="0">
+              <a:rPr sz="1500" b="0">
                 <a:solidFill>
                   <a:srgbClr val="FFFFFF"/>
                 </a:solidFill>
               </a:rPr>
-              <a:t>• Zustand: FEST (trotz Hitze!)</a:t>
+              <a:t>• Zustand: FEST (wegen extremem Druck!)</a:t>
             </a:r>
           </a:p>
           <a:p>
             <a:pPr algn="l"/>
             <a:r>
-              <a:rPr sz="1700" b="0">
+              <a:rPr sz="1500" b="0">
                 <a:solidFill>
                   <a:srgbClr val="FFFFFF"/>
                 </a:solidFill>
               </a:rPr>
-              <a:t>• Grund: extremer Druck</a:t>
+              <a:t>• Temperatur: 1.600 – 3.700°C</a:t>
             </a:r>
           </a:p>
           <a:p>
             <a:pPr algn="l"/>
             <a:r>
-              <a:rPr sz="1700" b="0">
+              <a:rPr sz="1500" b="0">
                 <a:solidFill>
                   <a:srgbClr val="FFFFFF"/>
                 </a:solidFill>
               </a:rPr>
-              <a:t>• Temperatur: 1.600 – 3.700°C</a:t>
+              <a:t>• Dickste Schicht → 74% des Erdvolumens</a:t>
             </a:r>
           </a:p>
           <a:p>
             <a:pPr algn="l"/>
             <a:r>
-              <a:rPr sz="1700" b="0">
+              <a:rPr sz="1500" b="0">
                 <a:solidFill>
                   <a:srgbClr val="FFFFFF"/>
                 </a:solidFill>
               </a:rPr>
-              <a:t>• Dichte: 3,5 – 5,6 g/cm³</a:t>
+              <a:t>• Gestein: Silikate &amp; Oxide</a:t>
             </a:r>
           </a:p>
         </p:txBody>
@@ -7824,8 +9284,8 @@
         </p:nvSpPr>
         <p:spPr>
           <a:xfrm>
-            <a:off x="6035040" y="1188720"/>
-            <a:ext cx="5852160" cy="2468880"/>
+            <a:off x="274320" y="3931920"/>
+            <a:ext cx="6949440" cy="2651760"/>
           </a:xfrm>
           <a:prstGeom prst="rect">
             <a:avLst/>
@@ -7867,8 +9327,8 @@
         </p:nvSpPr>
         <p:spPr>
           <a:xfrm>
-            <a:off x="6035040" y="1188720"/>
-            <a:ext cx="54864" cy="2468880"/>
+            <a:off x="274320" y="3931920"/>
+            <a:ext cx="54864" cy="2651760"/>
           </a:xfrm>
           <a:prstGeom prst="rect">
             <a:avLst/>
@@ -7910,8 +9370,8 @@
         </p:nvSpPr>
         <p:spPr>
           <a:xfrm>
-            <a:off x="6172200" y="1298448"/>
-            <a:ext cx="5623560" cy="347472"/>
+            <a:off x="411479" y="4023359"/>
+            <a:ext cx="6720840" cy="347472"/>
           </a:xfrm>
           <a:prstGeom prst="rect">
             <a:avLst/>
@@ -7926,12 +9386,12 @@
           <a:p>
             <a:pPr algn="l"/>
             <a:r>
-              <a:rPr sz="1500" b="1" i="0">
+              <a:rPr sz="1400" b="1" i="0">
                 <a:solidFill>
                   <a:srgbClr val="F87171"/>
                 </a:solidFill>
               </a:rPr>
-              <a:t>Mesosphäre</a:t>
+              <a:t>Bedeutung</a:t>
             </a:r>
           </a:p>
         </p:txBody>
@@ -7944,8 +9404,8 @@
         </p:nvSpPr>
         <p:spPr>
           <a:xfrm>
-            <a:off x="6172200" y="1664208"/>
-            <a:ext cx="5623560" cy="1901952"/>
+            <a:off x="411479" y="4389120"/>
+            <a:ext cx="6720840" cy="2103120"/>
           </a:xfrm>
           <a:prstGeom prst="rect">
             <a:avLst/>
@@ -7960,56 +9420,45 @@
           <a:p>
             <a:pPr algn="l"/>
             <a:r>
-              <a:rPr sz="1700" b="0">
+              <a:rPr sz="1500" b="0">
                 <a:solidFill>
                   <a:srgbClr val="FFFFFF"/>
                 </a:solidFill>
               </a:rPr>
-              <a:t>• Unterer Mantel = Mesosphäre</a:t>
+              <a:t>• Wärmeleitung vom Kern zur Kruste</a:t>
             </a:r>
           </a:p>
           <a:p>
             <a:pPr algn="l"/>
             <a:r>
-              <a:rPr sz="1700" b="0">
+              <a:rPr sz="1500" b="0">
                 <a:solidFill>
                   <a:srgbClr val="FFFFFF"/>
                 </a:solidFill>
               </a:rPr>
-              <a:t>• Dickste Schicht der Erde</a:t>
+              <a:t>• Übergang zum Kern bei 2.900 km</a:t>
             </a:r>
           </a:p>
           <a:p>
             <a:pPr algn="l"/>
             <a:r>
-              <a:rPr sz="1700" b="0">
+              <a:rPr sz="1500" b="0">
                 <a:solidFill>
                   <a:srgbClr val="FFFFFF"/>
                 </a:solidFill>
               </a:rPr>
-              <a:t>• Gestein fest wegen Druck</a:t>
+              <a:t>• Grenze: Gutenberg-Diskontinuität</a:t>
             </a:r>
           </a:p>
           <a:p>
             <a:pPr algn="l"/>
             <a:r>
-              <a:rPr sz="1700" b="0">
+              <a:rPr sz="1500" b="0">
                 <a:solidFill>
                   <a:srgbClr val="FFFFFF"/>
                 </a:solidFill>
               </a:rPr>
-              <a:t>• Sehr langsame Konvektionsströmungen</a:t>
-            </a:r>
-          </a:p>
-          <a:p>
-            <a:pPr algn="l"/>
-            <a:r>
-              <a:rPr sz="1700" b="0">
-                <a:solidFill>
-                  <a:srgbClr val="FFFFFF"/>
-                </a:solidFill>
-              </a:rPr>
-              <a:t>• Material: Silikate &amp; Oxide</a:t>
+              <a:t>• Treibt langfristig Plattenbewegung</a:t>
             </a:r>
           </a:p>
         </p:txBody>
@@ -8022,14 +9471,14 @@
         </p:nvSpPr>
         <p:spPr>
           <a:xfrm>
-            <a:off x="274320" y="3840480"/>
-            <a:ext cx="5577840" cy="2560320"/>
-          </a:xfrm>
-          <a:prstGeom prst="rect">
-            <a:avLst/>
-          </a:prstGeom>
-          <a:solidFill>
-            <a:srgbClr val="0F233D"/>
+            <a:off x="7360920" y="1143000"/>
+            <a:ext cx="4572000" cy="5486400"/>
+          </a:xfrm>
+          <a:prstGeom prst="rect">
+            <a:avLst/>
+          </a:prstGeom>
+          <a:solidFill>
+            <a:srgbClr val="0D1E35"/>
           </a:solidFill>
           <a:ln>
             <a:noFill/>
@@ -8065,51 +9514,180 @@
         </p:nvSpPr>
         <p:spPr>
           <a:xfrm>
-            <a:off x="274320" y="3840480"/>
-            <a:ext cx="54864" cy="2560320"/>
-          </a:xfrm>
-          <a:prstGeom prst="rect">
-            <a:avLst/>
-          </a:prstGeom>
-          <a:solidFill>
-            <a:srgbClr val="FB923C"/>
-          </a:solidFill>
-          <a:ln>
-            <a:noFill/>
-          </a:ln>
-        </p:spPr>
-        <p:style>
-          <a:lnRef idx="1">
-            <a:schemeClr val="accent1"/>
-          </a:lnRef>
-          <a:fillRef idx="3">
-            <a:schemeClr val="accent1"/>
-          </a:fillRef>
-          <a:effectRef idx="2">
-            <a:schemeClr val="accent1"/>
-          </a:effectRef>
-          <a:fontRef idx="minor">
-            <a:schemeClr val="lt1"/>
-          </a:fontRef>
-        </p:style>
-        <p:txBody>
-          <a:bodyPr rtlCol="0" anchor="ctr"/>
-          <a:lstStyle/>
-          <a:p>
-            <a:pPr algn="ctr"/>
-          </a:p>
-        </p:txBody>
-      </p:sp>
-      <p:sp>
-        <p:nvSpPr>
-          <p:cNvPr id="18" name="TextBox 17"/>
+            <a:off x="7360920" y="1143000"/>
+            <a:ext cx="4572000" cy="36576"/>
+          </a:xfrm>
+          <a:prstGeom prst="rect">
+            <a:avLst/>
+          </a:prstGeom>
+          <a:solidFill>
+            <a:srgbClr val="94A3B8"/>
+          </a:solidFill>
+          <a:ln>
+            <a:noFill/>
+          </a:ln>
+        </p:spPr>
+        <p:style>
+          <a:lnRef idx="1">
+            <a:schemeClr val="accent1"/>
+          </a:lnRef>
+          <a:fillRef idx="3">
+            <a:schemeClr val="accent1"/>
+          </a:fillRef>
+          <a:effectRef idx="2">
+            <a:schemeClr val="accent1"/>
+          </a:effectRef>
+          <a:fontRef idx="minor">
+            <a:schemeClr val="lt1"/>
+          </a:fontRef>
+        </p:style>
+        <p:txBody>
+          <a:bodyPr rtlCol="0" anchor="ctr"/>
+          <a:lstStyle/>
+          <a:p>
+            <a:pPr algn="ctr"/>
+          </a:p>
+        </p:txBody>
+      </p:sp>
+      <p:sp>
+        <p:nvSpPr>
+          <p:cNvPr id="18" name="Rectangle 17"/>
+          <p:cNvSpPr/>
+          <p:nvPr/>
+        </p:nvSpPr>
+        <p:spPr>
+          <a:xfrm>
+            <a:off x="7360920" y="6592824"/>
+            <a:ext cx="4572000" cy="36576"/>
+          </a:xfrm>
+          <a:prstGeom prst="rect">
+            <a:avLst/>
+          </a:prstGeom>
+          <a:solidFill>
+            <a:srgbClr val="94A3B8"/>
+          </a:solidFill>
+          <a:ln>
+            <a:noFill/>
+          </a:ln>
+        </p:spPr>
+        <p:style>
+          <a:lnRef idx="1">
+            <a:schemeClr val="accent1"/>
+          </a:lnRef>
+          <a:fillRef idx="3">
+            <a:schemeClr val="accent1"/>
+          </a:fillRef>
+          <a:effectRef idx="2">
+            <a:schemeClr val="accent1"/>
+          </a:effectRef>
+          <a:fontRef idx="minor">
+            <a:schemeClr val="lt1"/>
+          </a:fontRef>
+        </p:style>
+        <p:txBody>
+          <a:bodyPr rtlCol="0" anchor="ctr"/>
+          <a:lstStyle/>
+          <a:p>
+            <a:pPr algn="ctr"/>
+          </a:p>
+        </p:txBody>
+      </p:sp>
+      <p:sp>
+        <p:nvSpPr>
+          <p:cNvPr id="19" name="Rectangle 18"/>
+          <p:cNvSpPr/>
+          <p:nvPr/>
+        </p:nvSpPr>
+        <p:spPr>
+          <a:xfrm>
+            <a:off x="7360920" y="1143000"/>
+            <a:ext cx="36576" cy="5486400"/>
+          </a:xfrm>
+          <a:prstGeom prst="rect">
+            <a:avLst/>
+          </a:prstGeom>
+          <a:solidFill>
+            <a:srgbClr val="94A3B8"/>
+          </a:solidFill>
+          <a:ln>
+            <a:noFill/>
+          </a:ln>
+        </p:spPr>
+        <p:style>
+          <a:lnRef idx="1">
+            <a:schemeClr val="accent1"/>
+          </a:lnRef>
+          <a:fillRef idx="3">
+            <a:schemeClr val="accent1"/>
+          </a:fillRef>
+          <a:effectRef idx="2">
+            <a:schemeClr val="accent1"/>
+          </a:effectRef>
+          <a:fontRef idx="minor">
+            <a:schemeClr val="lt1"/>
+          </a:fontRef>
+        </p:style>
+        <p:txBody>
+          <a:bodyPr rtlCol="0" anchor="ctr"/>
+          <a:lstStyle/>
+          <a:p>
+            <a:pPr algn="ctr"/>
+          </a:p>
+        </p:txBody>
+      </p:sp>
+      <p:sp>
+        <p:nvSpPr>
+          <p:cNvPr id="20" name="Rectangle 19"/>
+          <p:cNvSpPr/>
+          <p:nvPr/>
+        </p:nvSpPr>
+        <p:spPr>
+          <a:xfrm>
+            <a:off x="11896344" y="1143000"/>
+            <a:ext cx="36576" cy="5486400"/>
+          </a:xfrm>
+          <a:prstGeom prst="rect">
+            <a:avLst/>
+          </a:prstGeom>
+          <a:solidFill>
+            <a:srgbClr val="94A3B8"/>
+          </a:solidFill>
+          <a:ln>
+            <a:noFill/>
+          </a:ln>
+        </p:spPr>
+        <p:style>
+          <a:lnRef idx="1">
+            <a:schemeClr val="accent1"/>
+          </a:lnRef>
+          <a:fillRef idx="3">
+            <a:schemeClr val="accent1"/>
+          </a:fillRef>
+          <a:effectRef idx="2">
+            <a:schemeClr val="accent1"/>
+          </a:effectRef>
+          <a:fontRef idx="minor">
+            <a:schemeClr val="lt1"/>
+          </a:fontRef>
+        </p:style>
+        <p:txBody>
+          <a:bodyPr rtlCol="0" anchor="ctr"/>
+          <a:lstStyle/>
+          <a:p>
+            <a:pPr algn="ctr"/>
+          </a:p>
+        </p:txBody>
+      </p:sp>
+      <p:sp>
+        <p:nvSpPr>
+          <p:cNvPr id="21" name="TextBox 20"/>
           <p:cNvSpPr txBox="1"/>
           <p:nvPr/>
         </p:nvSpPr>
         <p:spPr>
           <a:xfrm>
-            <a:off x="411479" y="3950208"/>
-            <a:ext cx="5349240" cy="347472"/>
+            <a:off x="7360920" y="3611880"/>
+            <a:ext cx="4572000" cy="548640"/>
           </a:xfrm>
           <a:prstGeom prst="rect">
             <a:avLst/>
@@ -8122,279 +9700,14 @@
           </a:bodyPr>
           <a:lstStyle/>
           <a:p>
-            <a:pPr algn="l"/>
-            <a:r>
-              <a:rPr sz="1500" b="1" i="0">
-                <a:solidFill>
-                  <a:srgbClr val="FB923C"/>
-                </a:solidFill>
-              </a:rPr>
-              <a:t>Bedeutung</a:t>
-            </a:r>
-          </a:p>
-        </p:txBody>
-      </p:sp>
-      <p:sp>
-        <p:nvSpPr>
-          <p:cNvPr id="19" name="TextBox 18"/>
-          <p:cNvSpPr txBox="1"/>
-          <p:nvPr/>
-        </p:nvSpPr>
-        <p:spPr>
-          <a:xfrm>
-            <a:off x="411479" y="4315968"/>
-            <a:ext cx="5349240" cy="1993391"/>
-          </a:xfrm>
-          <a:prstGeom prst="rect">
-            <a:avLst/>
-          </a:prstGeom>
-          <a:noFill/>
-        </p:spPr>
-        <p:txBody>
-          <a:bodyPr wrap="square">
-            <a:spAutoFit/>
-          </a:bodyPr>
-          <a:lstStyle/>
-          <a:p>
-            <a:pPr algn="l"/>
-            <a:r>
-              <a:rPr sz="1700" b="0">
-                <a:solidFill>
-                  <a:srgbClr val="FFFFFF"/>
-                </a:solidFill>
-              </a:rPr>
-              <a:t>• Macht ~74% des Erdvolumens aus</a:t>
-            </a:r>
-          </a:p>
-          <a:p>
-            <a:pPr algn="l"/>
-            <a:r>
-              <a:rPr sz="1700" b="0">
-                <a:solidFill>
-                  <a:srgbClr val="FFFFFF"/>
-                </a:solidFill>
-              </a:rPr>
-              <a:t>• Gesamter Mantel: ~84% Erdvolumen</a:t>
-            </a:r>
-          </a:p>
-          <a:p>
-            <a:pPr algn="l"/>
-            <a:r>
-              <a:rPr sz="1700" b="0">
-                <a:solidFill>
-                  <a:srgbClr val="FFFFFF"/>
-                </a:solidFill>
-              </a:rPr>
-              <a:t>• Wärmeleitung vom Kern zur Kruste</a:t>
-            </a:r>
-          </a:p>
-          <a:p>
-            <a:pPr algn="l"/>
-            <a:r>
-              <a:rPr sz="1700" b="0">
-                <a:solidFill>
-                  <a:srgbClr val="FFFFFF"/>
-                </a:solidFill>
-              </a:rPr>
-              <a:t>• Treibt langfristig Plattenbewegung</a:t>
-            </a:r>
-          </a:p>
-        </p:txBody>
-      </p:sp>
-      <p:sp>
-        <p:nvSpPr>
-          <p:cNvPr id="20" name="Rectangle 19"/>
-          <p:cNvSpPr/>
-          <p:nvPr/>
-        </p:nvSpPr>
-        <p:spPr>
-          <a:xfrm>
-            <a:off x="6035040" y="3840480"/>
-            <a:ext cx="5852160" cy="2560320"/>
-          </a:xfrm>
-          <a:prstGeom prst="rect">
-            <a:avLst/>
-          </a:prstGeom>
-          <a:solidFill>
-            <a:srgbClr val="0F233D"/>
-          </a:solidFill>
-          <a:ln>
-            <a:noFill/>
-          </a:ln>
-        </p:spPr>
-        <p:style>
-          <a:lnRef idx="1">
-            <a:schemeClr val="accent1"/>
-          </a:lnRef>
-          <a:fillRef idx="3">
-            <a:schemeClr val="accent1"/>
-          </a:fillRef>
-          <a:effectRef idx="2">
-            <a:schemeClr val="accent1"/>
-          </a:effectRef>
-          <a:fontRef idx="minor">
-            <a:schemeClr val="lt1"/>
-          </a:fontRef>
-        </p:style>
-        <p:txBody>
-          <a:bodyPr rtlCol="0" anchor="ctr"/>
-          <a:lstStyle/>
-          <a:p>
-            <a:pPr algn="ctr"/>
-          </a:p>
-        </p:txBody>
-      </p:sp>
-      <p:sp>
-        <p:nvSpPr>
-          <p:cNvPr id="21" name="Rectangle 20"/>
-          <p:cNvSpPr/>
-          <p:nvPr/>
-        </p:nvSpPr>
-        <p:spPr>
-          <a:xfrm>
-            <a:off x="6035040" y="3840480"/>
-            <a:ext cx="54864" cy="2560320"/>
-          </a:xfrm>
-          <a:prstGeom prst="rect">
-            <a:avLst/>
-          </a:prstGeom>
-          <a:solidFill>
-            <a:srgbClr val="FBBF24"/>
-          </a:solidFill>
-          <a:ln>
-            <a:noFill/>
-          </a:ln>
-        </p:spPr>
-        <p:style>
-          <a:lnRef idx="1">
-            <a:schemeClr val="accent1"/>
-          </a:lnRef>
-          <a:fillRef idx="3">
-            <a:schemeClr val="accent1"/>
-          </a:fillRef>
-          <a:effectRef idx="2">
-            <a:schemeClr val="accent1"/>
-          </a:effectRef>
-          <a:fontRef idx="minor">
-            <a:schemeClr val="lt1"/>
-          </a:fontRef>
-        </p:style>
-        <p:txBody>
-          <a:bodyPr rtlCol="0" anchor="ctr"/>
-          <a:lstStyle/>
-          <a:p>
-            <a:pPr algn="ctr"/>
-          </a:p>
-        </p:txBody>
-      </p:sp>
-      <p:sp>
-        <p:nvSpPr>
-          <p:cNvPr id="22" name="TextBox 21"/>
-          <p:cNvSpPr txBox="1"/>
-          <p:nvPr/>
-        </p:nvSpPr>
-        <p:spPr>
-          <a:xfrm>
-            <a:off x="6172200" y="3950208"/>
-            <a:ext cx="5623560" cy="347472"/>
-          </a:xfrm>
-          <a:prstGeom prst="rect">
-            <a:avLst/>
-          </a:prstGeom>
-          <a:noFill/>
-        </p:spPr>
-        <p:txBody>
-          <a:bodyPr wrap="square">
-            <a:spAutoFit/>
-          </a:bodyPr>
-          <a:lstStyle/>
-          <a:p>
-            <a:pPr algn="l"/>
-            <a:r>
-              <a:rPr sz="1500" b="1" i="0">
-                <a:solidFill>
-                  <a:srgbClr val="FBBF24"/>
-                </a:solidFill>
-              </a:rPr>
-              <a:t>Wichtige Fakten</a:t>
-            </a:r>
-          </a:p>
-        </p:txBody>
-      </p:sp>
-      <p:sp>
-        <p:nvSpPr>
-          <p:cNvPr id="23" name="TextBox 22"/>
-          <p:cNvSpPr txBox="1"/>
-          <p:nvPr/>
-        </p:nvSpPr>
-        <p:spPr>
-          <a:xfrm>
-            <a:off x="6172200" y="4315968"/>
-            <a:ext cx="5623560" cy="1993391"/>
-          </a:xfrm>
-          <a:prstGeom prst="rect">
-            <a:avLst/>
-          </a:prstGeom>
-          <a:noFill/>
-        </p:spPr>
-        <p:txBody>
-          <a:bodyPr wrap="square">
-            <a:spAutoFit/>
-          </a:bodyPr>
-          <a:lstStyle/>
-          <a:p>
-            <a:pPr algn="l"/>
-            <a:r>
-              <a:rPr sz="1700" b="0">
-                <a:solidFill>
-                  <a:srgbClr val="FFFFFF"/>
-                </a:solidFill>
-              </a:rPr>
-              <a:t>• Dickste Einzelschicht</a:t>
-            </a:r>
-          </a:p>
-          <a:p>
-            <a:pPr algn="l"/>
-            <a:r>
-              <a:rPr sz="1700" b="0">
-                <a:solidFill>
-                  <a:srgbClr val="FFFFFF"/>
-                </a:solidFill>
-              </a:rPr>
-              <a:t>• Hauptgestein: Peridotit</a:t>
-            </a:r>
-          </a:p>
-          <a:p>
-            <a:pPr algn="l"/>
-            <a:r>
-              <a:rPr sz="1700" b="0">
-                <a:solidFill>
-                  <a:srgbClr val="FFFFFF"/>
-                </a:solidFill>
-              </a:rPr>
-              <a:t>• Übergang zum Kern bei 2.900 km</a:t>
-            </a:r>
-          </a:p>
-          <a:p>
-            <a:pPr algn="l"/>
-            <a:r>
-              <a:rPr sz="1700" b="0">
-                <a:solidFill>
-                  <a:srgbClr val="FFFFFF"/>
-                </a:solidFill>
-              </a:rPr>
-              <a:t>• Grenze heißt: Kern-Mantel-Grenze</a:t>
-            </a:r>
-          </a:p>
-          <a:p>
-            <a:pPr algn="l"/>
-            <a:r>
-              <a:rPr sz="1700" b="0">
-                <a:solidFill>
-                  <a:srgbClr val="FFFFFF"/>
-                </a:solidFill>
-              </a:rPr>
-              <a:t>  (Gutenberg-Diskontinuität)</a:t>
+            <a:pPr algn="ctr"/>
+            <a:r>
+              <a:rPr sz="1500" b="0" i="1">
+                <a:solidFill>
+                  <a:srgbClr val="94A3B8"/>
+                </a:solidFill>
+              </a:rPr>
+              <a:t>📷  Bild: Unterer Erdmantel</a:t>
             </a:r>
           </a:p>
         </p:txBody>
@@ -8554,8 +9867,8 @@
         </p:nvSpPr>
         <p:spPr>
           <a:xfrm>
-            <a:off x="228600" y="73152"/>
-            <a:ext cx="9144000" cy="822960"/>
+            <a:off x="228600" y="91440"/>
+            <a:ext cx="8686800" cy="822960"/>
           </a:xfrm>
           <a:prstGeom prst="rect">
             <a:avLst/>
@@ -8570,7 +9883,7 @@
           <a:p>
             <a:pPr algn="l"/>
             <a:r>
-              <a:rPr sz="3200" b="1" i="0">
+              <a:rPr sz="3000" b="1" i="0">
                 <a:solidFill>
                   <a:srgbClr val="FFFFFF"/>
                 </a:solidFill>
@@ -8588,8 +9901,8 @@
         </p:nvSpPr>
         <p:spPr>
           <a:xfrm>
-            <a:off x="10058400" y="228600"/>
-            <a:ext cx="1920240" cy="548640"/>
+            <a:off x="9601200" y="256032"/>
+            <a:ext cx="2377440" cy="457200"/>
           </a:xfrm>
           <a:prstGeom prst="rect">
             <a:avLst/>
@@ -8604,7 +9917,7 @@
           <a:p>
             <a:pPr algn="r"/>
             <a:r>
-              <a:rPr sz="1400" b="1" i="0">
+              <a:rPr sz="1300" b="1" i="0">
                 <a:solidFill>
                   <a:srgbClr val="F87171"/>
                 </a:solidFill>
@@ -8665,8 +9978,8 @@
         </p:nvSpPr>
         <p:spPr>
           <a:xfrm>
-            <a:off x="274320" y="1188720"/>
-            <a:ext cx="5577840" cy="2468880"/>
+            <a:off x="274320" y="1143000"/>
+            <a:ext cx="6949440" cy="2651760"/>
           </a:xfrm>
           <a:prstGeom prst="rect">
             <a:avLst/>
@@ -8708,8 +10021,8 @@
         </p:nvSpPr>
         <p:spPr>
           <a:xfrm>
-            <a:off x="274320" y="1188720"/>
-            <a:ext cx="54864" cy="2468880"/>
+            <a:off x="274320" y="1143000"/>
+            <a:ext cx="54864" cy="2651760"/>
           </a:xfrm>
           <a:prstGeom prst="rect">
             <a:avLst/>
@@ -8751,8 +10064,8 @@
         </p:nvSpPr>
         <p:spPr>
           <a:xfrm>
-            <a:off x="411479" y="1298448"/>
-            <a:ext cx="5349240" cy="347472"/>
+            <a:off x="411479" y="1234440"/>
+            <a:ext cx="6720840" cy="347472"/>
           </a:xfrm>
           <a:prstGeom prst="rect">
             <a:avLst/>
@@ -8767,7 +10080,7 @@
           <a:p>
             <a:pPr algn="l"/>
             <a:r>
-              <a:rPr sz="1500" b="1" i="0">
+              <a:rPr sz="1400" b="1" i="0">
                 <a:solidFill>
                   <a:srgbClr val="F87171"/>
                 </a:solidFill>
@@ -8785,8 +10098,8 @@
         </p:nvSpPr>
         <p:spPr>
           <a:xfrm>
-            <a:off x="411479" y="1664208"/>
-            <a:ext cx="5349240" cy="1901952"/>
+            <a:off x="411479" y="1600200"/>
+            <a:ext cx="6720840" cy="2103120"/>
           </a:xfrm>
           <a:prstGeom prst="rect">
             <a:avLst/>
@@ -8801,7 +10114,7 @@
           <a:p>
             <a:pPr algn="l"/>
             <a:r>
-              <a:rPr sz="1700" b="0">
+              <a:rPr sz="1500" b="0">
                 <a:solidFill>
                   <a:srgbClr val="FFFFFF"/>
                 </a:solidFill>
@@ -8812,7 +10125,7 @@
           <a:p>
             <a:pPr algn="l"/>
             <a:r>
-              <a:rPr sz="1700" b="0">
+              <a:rPr sz="1500" b="0">
                 <a:solidFill>
                   <a:srgbClr val="FFFFFF"/>
                 </a:solidFill>
@@ -8823,7 +10136,7 @@
           <a:p>
             <a:pPr algn="l"/>
             <a:r>
-              <a:rPr sz="1700" b="0">
+              <a:rPr sz="1500" b="0">
                 <a:solidFill>
                   <a:srgbClr val="FFFFFF"/>
                 </a:solidFill>
@@ -8834,7 +10147,7 @@
           <a:p>
             <a:pPr algn="l"/>
             <a:r>
-              <a:rPr sz="1700" b="0">
+              <a:rPr sz="1500" b="0">
                 <a:solidFill>
                   <a:srgbClr val="FFFFFF"/>
                 </a:solidFill>
@@ -8842,17 +10155,6 @@
               <a:t>• Temperatur: 4.000 – 5.000°C</a:t>
             </a:r>
           </a:p>
-          <a:p>
-            <a:pPr algn="l"/>
-            <a:r>
-              <a:rPr sz="1700" b="0">
-                <a:solidFill>
-                  <a:srgbClr val="FFFFFF"/>
-                </a:solidFill>
-              </a:rPr>
-              <a:t>• Dichte: ~10–12 g/cm³</a:t>
-            </a:r>
-          </a:p>
         </p:txBody>
       </p:sp>
       <p:sp>
@@ -8863,8 +10165,8 @@
         </p:nvSpPr>
         <p:spPr>
           <a:xfrm>
-            <a:off x="6035040" y="1188720"/>
-            <a:ext cx="5852160" cy="2468880"/>
+            <a:off x="274320" y="3931920"/>
+            <a:ext cx="6949440" cy="2651760"/>
           </a:xfrm>
           <a:prstGeom prst="rect">
             <a:avLst/>
@@ -8906,14 +10208,14 @@
         </p:nvSpPr>
         <p:spPr>
           <a:xfrm>
-            <a:off x="6035040" y="1188720"/>
-            <a:ext cx="54864" cy="2468880"/>
-          </a:xfrm>
-          <a:prstGeom prst="rect">
-            <a:avLst/>
-          </a:prstGeom>
-          <a:solidFill>
-            <a:srgbClr val="F472B6"/>
+            <a:off x="274320" y="3931920"/>
+            <a:ext cx="54864" cy="2651760"/>
+          </a:xfrm>
+          <a:prstGeom prst="rect">
+            <a:avLst/>
+          </a:prstGeom>
+          <a:solidFill>
+            <a:srgbClr val="C084FC"/>
           </a:solidFill>
           <a:ln>
             <a:noFill/>
@@ -8949,8 +10251,8 @@
         </p:nvSpPr>
         <p:spPr>
           <a:xfrm>
-            <a:off x="6172200" y="1298448"/>
-            <a:ext cx="5623560" cy="347472"/>
+            <a:off x="411479" y="4023359"/>
+            <a:ext cx="6720840" cy="347472"/>
           </a:xfrm>
           <a:prstGeom prst="rect">
             <a:avLst/>
@@ -8965,9 +10267,9 @@
           <a:p>
             <a:pPr algn="l"/>
             <a:r>
-              <a:rPr sz="1500" b="1" i="0">
-                <a:solidFill>
-                  <a:srgbClr val="F472B6"/>
+              <a:rPr sz="1400" b="1" i="0">
+                <a:solidFill>
+                  <a:srgbClr val="C084FC"/>
                 </a:solidFill>
               </a:rPr>
               <a:t>Das Magnetfeld</a:t>
@@ -8983,8 +10285,8 @@
         </p:nvSpPr>
         <p:spPr>
           <a:xfrm>
-            <a:off x="6172200" y="1664208"/>
-            <a:ext cx="5623560" cy="1901952"/>
+            <a:off x="411479" y="4389120"/>
+            <a:ext cx="6720840" cy="2103120"/>
           </a:xfrm>
           <a:prstGeom prst="rect">
             <a:avLst/>
@@ -8999,56 +10301,45 @@
           <a:p>
             <a:pPr algn="l"/>
             <a:r>
-              <a:rPr sz="1700" b="0">
+              <a:rPr sz="1500" b="0">
                 <a:solidFill>
                   <a:srgbClr val="FFFFFF"/>
                 </a:solidFill>
               </a:rPr>
-              <a:t>• Flüssiges Eisen rotiert mit der Erde</a:t>
+              <a:t>• Flüssiges Eisen rotiert → Dynamo-Effekt</a:t>
             </a:r>
           </a:p>
           <a:p>
             <a:pPr algn="l"/>
             <a:r>
-              <a:rPr sz="1700" b="0">
+              <a:rPr sz="1500" b="0">
                 <a:solidFill>
                   <a:srgbClr val="FFFFFF"/>
                 </a:solidFill>
               </a:rPr>
-              <a:t>• → erzeugt elektrische Ströme</a:t>
+              <a:t>• → Erdmagnetfeld entsteht</a:t>
             </a:r>
           </a:p>
           <a:p>
             <a:pPr algn="l"/>
             <a:r>
-              <a:rPr sz="1700" b="0">
+              <a:rPr sz="1500" b="0">
                 <a:solidFill>
                   <a:srgbClr val="FFFFFF"/>
                 </a:solidFill>
               </a:rPr>
-              <a:t>• → erzeugt das Erdmagnetfeld</a:t>
+              <a:t>• Magnetfeld schützt vor Sonnenwind</a:t>
             </a:r>
           </a:p>
           <a:p>
             <a:pPr algn="l"/>
             <a:r>
-              <a:rPr sz="1700" b="0">
+              <a:rPr sz="1500" b="0">
                 <a:solidFill>
                   <a:srgbClr val="FFFFFF"/>
                 </a:solidFill>
               </a:rPr>
-              <a:t>• Magnetfeld schützt vor Sonnenwind</a:t>
-            </a:r>
-          </a:p>
-          <a:p>
-            <a:pPr algn="l"/>
-            <a:r>
-              <a:rPr sz="1700" b="0">
-                <a:solidFill>
-                  <a:srgbClr val="FFFFFF"/>
-                </a:solidFill>
-              </a:rPr>
-              <a:t>• Ohne Magnetfeld: kein Leben auf Erde!</a:t>
+              <a:t>• Ohne Magnetfeld → kein Leben auf Erde!</a:t>
             </a:r>
           </a:p>
         </p:txBody>
@@ -9061,14 +10352,14 @@
         </p:nvSpPr>
         <p:spPr>
           <a:xfrm>
-            <a:off x="274320" y="3840480"/>
-            <a:ext cx="5577840" cy="2560320"/>
-          </a:xfrm>
-          <a:prstGeom prst="rect">
-            <a:avLst/>
-          </a:prstGeom>
-          <a:solidFill>
-            <a:srgbClr val="0F233D"/>
+            <a:off x="7360920" y="1143000"/>
+            <a:ext cx="4572000" cy="5486400"/>
+          </a:xfrm>
+          <a:prstGeom prst="rect">
+            <a:avLst/>
+          </a:prstGeom>
+          <a:solidFill>
+            <a:srgbClr val="0D1E35"/>
           </a:solidFill>
           <a:ln>
             <a:noFill/>
@@ -9104,51 +10395,180 @@
         </p:nvSpPr>
         <p:spPr>
           <a:xfrm>
-            <a:off x="274320" y="3840480"/>
-            <a:ext cx="54864" cy="2560320"/>
-          </a:xfrm>
-          <a:prstGeom prst="rect">
-            <a:avLst/>
-          </a:prstGeom>
-          <a:solidFill>
-            <a:srgbClr val="F87171"/>
-          </a:solidFill>
-          <a:ln>
-            <a:noFill/>
-          </a:ln>
-        </p:spPr>
-        <p:style>
-          <a:lnRef idx="1">
-            <a:schemeClr val="accent1"/>
-          </a:lnRef>
-          <a:fillRef idx="3">
-            <a:schemeClr val="accent1"/>
-          </a:fillRef>
-          <a:effectRef idx="2">
-            <a:schemeClr val="accent1"/>
-          </a:effectRef>
-          <a:fontRef idx="minor">
-            <a:schemeClr val="lt1"/>
-          </a:fontRef>
-        </p:style>
-        <p:txBody>
-          <a:bodyPr rtlCol="0" anchor="ctr"/>
-          <a:lstStyle/>
-          <a:p>
-            <a:pPr algn="ctr"/>
-          </a:p>
-        </p:txBody>
-      </p:sp>
-      <p:sp>
-        <p:nvSpPr>
-          <p:cNvPr id="18" name="TextBox 17"/>
+            <a:off x="7360920" y="1143000"/>
+            <a:ext cx="4572000" cy="36576"/>
+          </a:xfrm>
+          <a:prstGeom prst="rect">
+            <a:avLst/>
+          </a:prstGeom>
+          <a:solidFill>
+            <a:srgbClr val="94A3B8"/>
+          </a:solidFill>
+          <a:ln>
+            <a:noFill/>
+          </a:ln>
+        </p:spPr>
+        <p:style>
+          <a:lnRef idx="1">
+            <a:schemeClr val="accent1"/>
+          </a:lnRef>
+          <a:fillRef idx="3">
+            <a:schemeClr val="accent1"/>
+          </a:fillRef>
+          <a:effectRef idx="2">
+            <a:schemeClr val="accent1"/>
+          </a:effectRef>
+          <a:fontRef idx="minor">
+            <a:schemeClr val="lt1"/>
+          </a:fontRef>
+        </p:style>
+        <p:txBody>
+          <a:bodyPr rtlCol="0" anchor="ctr"/>
+          <a:lstStyle/>
+          <a:p>
+            <a:pPr algn="ctr"/>
+          </a:p>
+        </p:txBody>
+      </p:sp>
+      <p:sp>
+        <p:nvSpPr>
+          <p:cNvPr id="18" name="Rectangle 17"/>
+          <p:cNvSpPr/>
+          <p:nvPr/>
+        </p:nvSpPr>
+        <p:spPr>
+          <a:xfrm>
+            <a:off x="7360920" y="6592824"/>
+            <a:ext cx="4572000" cy="36576"/>
+          </a:xfrm>
+          <a:prstGeom prst="rect">
+            <a:avLst/>
+          </a:prstGeom>
+          <a:solidFill>
+            <a:srgbClr val="94A3B8"/>
+          </a:solidFill>
+          <a:ln>
+            <a:noFill/>
+          </a:ln>
+        </p:spPr>
+        <p:style>
+          <a:lnRef idx="1">
+            <a:schemeClr val="accent1"/>
+          </a:lnRef>
+          <a:fillRef idx="3">
+            <a:schemeClr val="accent1"/>
+          </a:fillRef>
+          <a:effectRef idx="2">
+            <a:schemeClr val="accent1"/>
+          </a:effectRef>
+          <a:fontRef idx="minor">
+            <a:schemeClr val="lt1"/>
+          </a:fontRef>
+        </p:style>
+        <p:txBody>
+          <a:bodyPr rtlCol="0" anchor="ctr"/>
+          <a:lstStyle/>
+          <a:p>
+            <a:pPr algn="ctr"/>
+          </a:p>
+        </p:txBody>
+      </p:sp>
+      <p:sp>
+        <p:nvSpPr>
+          <p:cNvPr id="19" name="Rectangle 18"/>
+          <p:cNvSpPr/>
+          <p:nvPr/>
+        </p:nvSpPr>
+        <p:spPr>
+          <a:xfrm>
+            <a:off x="7360920" y="1143000"/>
+            <a:ext cx="36576" cy="5486400"/>
+          </a:xfrm>
+          <a:prstGeom prst="rect">
+            <a:avLst/>
+          </a:prstGeom>
+          <a:solidFill>
+            <a:srgbClr val="94A3B8"/>
+          </a:solidFill>
+          <a:ln>
+            <a:noFill/>
+          </a:ln>
+        </p:spPr>
+        <p:style>
+          <a:lnRef idx="1">
+            <a:schemeClr val="accent1"/>
+          </a:lnRef>
+          <a:fillRef idx="3">
+            <a:schemeClr val="accent1"/>
+          </a:fillRef>
+          <a:effectRef idx="2">
+            <a:schemeClr val="accent1"/>
+          </a:effectRef>
+          <a:fontRef idx="minor">
+            <a:schemeClr val="lt1"/>
+          </a:fontRef>
+        </p:style>
+        <p:txBody>
+          <a:bodyPr rtlCol="0" anchor="ctr"/>
+          <a:lstStyle/>
+          <a:p>
+            <a:pPr algn="ctr"/>
+          </a:p>
+        </p:txBody>
+      </p:sp>
+      <p:sp>
+        <p:nvSpPr>
+          <p:cNvPr id="20" name="Rectangle 19"/>
+          <p:cNvSpPr/>
+          <p:nvPr/>
+        </p:nvSpPr>
+        <p:spPr>
+          <a:xfrm>
+            <a:off x="11896344" y="1143000"/>
+            <a:ext cx="36576" cy="5486400"/>
+          </a:xfrm>
+          <a:prstGeom prst="rect">
+            <a:avLst/>
+          </a:prstGeom>
+          <a:solidFill>
+            <a:srgbClr val="94A3B8"/>
+          </a:solidFill>
+          <a:ln>
+            <a:noFill/>
+          </a:ln>
+        </p:spPr>
+        <p:style>
+          <a:lnRef idx="1">
+            <a:schemeClr val="accent1"/>
+          </a:lnRef>
+          <a:fillRef idx="3">
+            <a:schemeClr val="accent1"/>
+          </a:fillRef>
+          <a:effectRef idx="2">
+            <a:schemeClr val="accent1"/>
+          </a:effectRef>
+          <a:fontRef idx="minor">
+            <a:schemeClr val="lt1"/>
+          </a:fontRef>
+        </p:style>
+        <p:txBody>
+          <a:bodyPr rtlCol="0" anchor="ctr"/>
+          <a:lstStyle/>
+          <a:p>
+            <a:pPr algn="ctr"/>
+          </a:p>
+        </p:txBody>
+      </p:sp>
+      <p:sp>
+        <p:nvSpPr>
+          <p:cNvPr id="21" name="TextBox 20"/>
           <p:cNvSpPr txBox="1"/>
           <p:nvPr/>
         </p:nvSpPr>
         <p:spPr>
           <a:xfrm>
-            <a:off x="411479" y="3950208"/>
-            <a:ext cx="5349240" cy="347472"/>
+            <a:off x="7360920" y="3611880"/>
+            <a:ext cx="4572000" cy="548640"/>
           </a:xfrm>
           <a:prstGeom prst="rect">
             <a:avLst/>
@@ -9161,279 +10581,14 @@
           </a:bodyPr>
           <a:lstStyle/>
           <a:p>
-            <a:pPr algn="l"/>
-            <a:r>
-              <a:rPr sz="1500" b="1" i="0">
-                <a:solidFill>
-                  <a:srgbClr val="F87171"/>
-                </a:solidFill>
-              </a:rPr>
-              <a:t>Konvektion im Kern</a:t>
-            </a:r>
-          </a:p>
-        </p:txBody>
-      </p:sp>
-      <p:sp>
-        <p:nvSpPr>
-          <p:cNvPr id="19" name="TextBox 18"/>
-          <p:cNvSpPr txBox="1"/>
-          <p:nvPr/>
-        </p:nvSpPr>
-        <p:spPr>
-          <a:xfrm>
-            <a:off x="411479" y="4315968"/>
-            <a:ext cx="5349240" cy="1993391"/>
-          </a:xfrm>
-          <a:prstGeom prst="rect">
-            <a:avLst/>
-          </a:prstGeom>
-          <a:noFill/>
-        </p:spPr>
-        <p:txBody>
-          <a:bodyPr wrap="square">
-            <a:spAutoFit/>
-          </a:bodyPr>
-          <a:lstStyle/>
-          <a:p>
-            <a:pPr algn="l"/>
-            <a:r>
-              <a:rPr sz="1700" b="0">
-                <a:solidFill>
-                  <a:srgbClr val="FFFFFF"/>
-                </a:solidFill>
-              </a:rPr>
-              <a:t>• Heiße Metallschmelze steigt auf</a:t>
-            </a:r>
-          </a:p>
-          <a:p>
-            <a:pPr algn="l"/>
-            <a:r>
-              <a:rPr sz="1700" b="0">
-                <a:solidFill>
-                  <a:srgbClr val="FFFFFF"/>
-                </a:solidFill>
-              </a:rPr>
-              <a:t>• Kühlt ab und sinkt wieder</a:t>
-            </a:r>
-          </a:p>
-          <a:p>
-            <a:pPr algn="l"/>
-            <a:r>
-              <a:rPr sz="1700" b="0">
-                <a:solidFill>
-                  <a:srgbClr val="FFFFFF"/>
-                </a:solidFill>
-              </a:rPr>
-              <a:t>• Bewegung durch Erdrotation</a:t>
-            </a:r>
-          </a:p>
-          <a:p>
-            <a:pPr algn="l"/>
-            <a:r>
-              <a:rPr sz="1700" b="0">
-                <a:solidFill>
-                  <a:srgbClr val="FFFFFF"/>
-                </a:solidFill>
-              </a:rPr>
-              <a:t>• → Dynamo-Effekt → Magnetfeld</a:t>
-            </a:r>
-          </a:p>
-        </p:txBody>
-      </p:sp>
-      <p:sp>
-        <p:nvSpPr>
-          <p:cNvPr id="20" name="Rectangle 19"/>
-          <p:cNvSpPr/>
-          <p:nvPr/>
-        </p:nvSpPr>
-        <p:spPr>
-          <a:xfrm>
-            <a:off x="6035040" y="3840480"/>
-            <a:ext cx="5852160" cy="2560320"/>
-          </a:xfrm>
-          <a:prstGeom prst="rect">
-            <a:avLst/>
-          </a:prstGeom>
-          <a:solidFill>
-            <a:srgbClr val="0F233D"/>
-          </a:solidFill>
-          <a:ln>
-            <a:noFill/>
-          </a:ln>
-        </p:spPr>
-        <p:style>
-          <a:lnRef idx="1">
-            <a:schemeClr val="accent1"/>
-          </a:lnRef>
-          <a:fillRef idx="3">
-            <a:schemeClr val="accent1"/>
-          </a:fillRef>
-          <a:effectRef idx="2">
-            <a:schemeClr val="accent1"/>
-          </a:effectRef>
-          <a:fontRef idx="minor">
-            <a:schemeClr val="lt1"/>
-          </a:fontRef>
-        </p:style>
-        <p:txBody>
-          <a:bodyPr rtlCol="0" anchor="ctr"/>
-          <a:lstStyle/>
-          <a:p>
-            <a:pPr algn="ctr"/>
-          </a:p>
-        </p:txBody>
-      </p:sp>
-      <p:sp>
-        <p:nvSpPr>
-          <p:cNvPr id="21" name="Rectangle 20"/>
-          <p:cNvSpPr/>
-          <p:nvPr/>
-        </p:nvSpPr>
-        <p:spPr>
-          <a:xfrm>
-            <a:off x="6035040" y="3840480"/>
-            <a:ext cx="54864" cy="2560320"/>
-          </a:xfrm>
-          <a:prstGeom prst="rect">
-            <a:avLst/>
-          </a:prstGeom>
-          <a:solidFill>
-            <a:srgbClr val="FBBF24"/>
-          </a:solidFill>
-          <a:ln>
-            <a:noFill/>
-          </a:ln>
-        </p:spPr>
-        <p:style>
-          <a:lnRef idx="1">
-            <a:schemeClr val="accent1"/>
-          </a:lnRef>
-          <a:fillRef idx="3">
-            <a:schemeClr val="accent1"/>
-          </a:fillRef>
-          <a:effectRef idx="2">
-            <a:schemeClr val="accent1"/>
-          </a:effectRef>
-          <a:fontRef idx="minor">
-            <a:schemeClr val="lt1"/>
-          </a:fontRef>
-        </p:style>
-        <p:txBody>
-          <a:bodyPr rtlCol="0" anchor="ctr"/>
-          <a:lstStyle/>
-          <a:p>
-            <a:pPr algn="ctr"/>
-          </a:p>
-        </p:txBody>
-      </p:sp>
-      <p:sp>
-        <p:nvSpPr>
-          <p:cNvPr id="22" name="TextBox 21"/>
-          <p:cNvSpPr txBox="1"/>
-          <p:nvPr/>
-        </p:nvSpPr>
-        <p:spPr>
-          <a:xfrm>
-            <a:off x="6172200" y="3950208"/>
-            <a:ext cx="5623560" cy="347472"/>
-          </a:xfrm>
-          <a:prstGeom prst="rect">
-            <a:avLst/>
-          </a:prstGeom>
-          <a:noFill/>
-        </p:spPr>
-        <p:txBody>
-          <a:bodyPr wrap="square">
-            <a:spAutoFit/>
-          </a:bodyPr>
-          <a:lstStyle/>
-          <a:p>
-            <a:pPr algn="l"/>
-            <a:r>
-              <a:rPr sz="1500" b="1" i="0">
-                <a:solidFill>
-                  <a:srgbClr val="FBBF24"/>
-                </a:solidFill>
-              </a:rPr>
-              <a:t>Wichtige Fakten</a:t>
-            </a:r>
-          </a:p>
-        </p:txBody>
-      </p:sp>
-      <p:sp>
-        <p:nvSpPr>
-          <p:cNvPr id="23" name="TextBox 22"/>
-          <p:cNvSpPr txBox="1"/>
-          <p:nvPr/>
-        </p:nvSpPr>
-        <p:spPr>
-          <a:xfrm>
-            <a:off x="6172200" y="4315968"/>
-            <a:ext cx="5623560" cy="1993391"/>
-          </a:xfrm>
-          <a:prstGeom prst="rect">
-            <a:avLst/>
-          </a:prstGeom>
-          <a:noFill/>
-        </p:spPr>
-        <p:txBody>
-          <a:bodyPr wrap="square">
-            <a:spAutoFit/>
-          </a:bodyPr>
-          <a:lstStyle/>
-          <a:p>
-            <a:pPr algn="l"/>
-            <a:r>
-              <a:rPr sz="1700" b="0">
-                <a:solidFill>
-                  <a:srgbClr val="FFFFFF"/>
-                </a:solidFill>
-              </a:rPr>
-              <a:t>• Dicke: ~2.250 km</a:t>
-            </a:r>
-          </a:p>
-          <a:p>
-            <a:pPr algn="l"/>
-            <a:r>
-              <a:rPr sz="1700" b="0">
-                <a:solidFill>
-                  <a:srgbClr val="FFFFFF"/>
-                </a:solidFill>
-              </a:rPr>
-              <a:t>• Entdeckt durch Erdbebenwellen</a:t>
-            </a:r>
-          </a:p>
-          <a:p>
-            <a:pPr algn="l"/>
-            <a:r>
-              <a:rPr sz="1700" b="0">
-                <a:solidFill>
-                  <a:srgbClr val="FFFFFF"/>
-                </a:solidFill>
-              </a:rPr>
-              <a:t>• Schallwellen können flüssige</a:t>
-            </a:r>
-          </a:p>
-          <a:p>
-            <a:pPr algn="l"/>
-            <a:r>
-              <a:rPr sz="1700" b="0">
-                <a:solidFill>
-                  <a:srgbClr val="FFFFFF"/>
-                </a:solidFill>
-              </a:rPr>
-              <a:t>  Schicht nicht durchdringen</a:t>
-            </a:r>
-          </a:p>
-          <a:p>
-            <a:pPr algn="l"/>
-            <a:r>
-              <a:rPr sz="1700" b="0">
-                <a:solidFill>
-                  <a:srgbClr val="FFFFFF"/>
-                </a:solidFill>
-              </a:rPr>
-              <a:t>• ~30% der Erdmasse</a:t>
+            <a:pPr algn="ctr"/>
+            <a:r>
+              <a:rPr sz="1500" b="0" i="1">
+                <a:solidFill>
+                  <a:srgbClr val="94A3B8"/>
+                </a:solidFill>
+              </a:rPr>
+              <a:t>📷  Bild: Äußerer Erdkern</a:t>
             </a:r>
           </a:p>
         </p:txBody>
@@ -9593,8 +10748,8 @@
         </p:nvSpPr>
         <p:spPr>
           <a:xfrm>
-            <a:off x="228600" y="73152"/>
-            <a:ext cx="9144000" cy="822960"/>
+            <a:off x="228600" y="91440"/>
+            <a:ext cx="8686800" cy="822960"/>
           </a:xfrm>
           <a:prstGeom prst="rect">
             <a:avLst/>
@@ -9609,7 +10764,7 @@
           <a:p>
             <a:pPr algn="l"/>
             <a:r>
-              <a:rPr sz="3200" b="1" i="0">
+              <a:rPr sz="3000" b="1" i="0">
                 <a:solidFill>
                   <a:srgbClr val="FFFFFF"/>
                 </a:solidFill>
@@ -9627,8 +10782,8 @@
         </p:nvSpPr>
         <p:spPr>
           <a:xfrm>
-            <a:off x="10058400" y="228600"/>
-            <a:ext cx="1920240" cy="548640"/>
+            <a:off x="9601200" y="256032"/>
+            <a:ext cx="2377440" cy="457200"/>
           </a:xfrm>
           <a:prstGeom prst="rect">
             <a:avLst/>
@@ -9643,7 +10798,7 @@
           <a:p>
             <a:pPr algn="r"/>
             <a:r>
-              <a:rPr sz="1400" b="1" i="0">
+              <a:rPr sz="1300" b="1" i="0">
                 <a:solidFill>
                   <a:srgbClr val="FBBF24"/>
                 </a:solidFill>
@@ -9704,8 +10859,8 @@
         </p:nvSpPr>
         <p:spPr>
           <a:xfrm>
-            <a:off x="274320" y="1188720"/>
-            <a:ext cx="5577840" cy="2468880"/>
+            <a:off x="274320" y="1143000"/>
+            <a:ext cx="6949440" cy="2651760"/>
           </a:xfrm>
           <a:prstGeom prst="rect">
             <a:avLst/>
@@ -9747,8 +10902,8 @@
         </p:nvSpPr>
         <p:spPr>
           <a:xfrm>
-            <a:off x="274320" y="1188720"/>
-            <a:ext cx="54864" cy="2468880"/>
+            <a:off x="274320" y="1143000"/>
+            <a:ext cx="54864" cy="2651760"/>
           </a:xfrm>
           <a:prstGeom prst="rect">
             <a:avLst/>
@@ -9790,8 +10945,8 @@
         </p:nvSpPr>
         <p:spPr>
           <a:xfrm>
-            <a:off x="411479" y="1298448"/>
-            <a:ext cx="5349240" cy="347472"/>
+            <a:off x="411479" y="1234440"/>
+            <a:ext cx="6720840" cy="347472"/>
           </a:xfrm>
           <a:prstGeom prst="rect">
             <a:avLst/>
@@ -9806,7 +10961,7 @@
           <a:p>
             <a:pPr algn="l"/>
             <a:r>
-              <a:rPr sz="1500" b="1" i="0">
+              <a:rPr sz="1400" b="1" i="0">
                 <a:solidFill>
                   <a:srgbClr val="FBBF24"/>
                 </a:solidFill>
@@ -9824,8 +10979,8 @@
         </p:nvSpPr>
         <p:spPr>
           <a:xfrm>
-            <a:off x="411479" y="1664208"/>
-            <a:ext cx="5349240" cy="1901952"/>
+            <a:off x="411479" y="1600200"/>
+            <a:ext cx="6720840" cy="2103120"/>
           </a:xfrm>
           <a:prstGeom prst="rect">
             <a:avLst/>
@@ -9840,7 +10995,7 @@
           <a:p>
             <a:pPr algn="l"/>
             <a:r>
-              <a:rPr sz="1700" b="0">
+              <a:rPr sz="1500" b="0">
                 <a:solidFill>
                   <a:srgbClr val="FFFFFF"/>
                 </a:solidFill>
@@ -9851,7 +11006,7 @@
           <a:p>
             <a:pPr algn="l"/>
             <a:r>
-              <a:rPr sz="1700" b="0">
+              <a:rPr sz="1500" b="0">
                 <a:solidFill>
                   <a:srgbClr val="FFFFFF"/>
                 </a:solidFill>
@@ -9862,7 +11017,7 @@
           <a:p>
             <a:pPr algn="l"/>
             <a:r>
-              <a:rPr sz="1700" b="0">
+              <a:rPr sz="1500" b="0">
                 <a:solidFill>
                   <a:srgbClr val="FFFFFF"/>
                 </a:solidFill>
@@ -9873,7 +11028,7 @@
           <a:p>
             <a:pPr algn="l"/>
             <a:r>
-              <a:rPr sz="1700" b="0">
+              <a:rPr sz="1500" b="0">
                 <a:solidFill>
                   <a:srgbClr val="FFFFFF"/>
                 </a:solidFill>
@@ -9884,7 +11039,7 @@
           <a:p>
             <a:pPr algn="l"/>
             <a:r>
-              <a:rPr sz="1700" b="0">
+              <a:rPr sz="1500" b="0">
                 <a:solidFill>
                   <a:srgbClr val="FFFFFF"/>
                 </a:solidFill>
@@ -9902,8 +11057,8 @@
         </p:nvSpPr>
         <p:spPr>
           <a:xfrm>
-            <a:off x="6035040" y="1188720"/>
-            <a:ext cx="5852160" cy="2468880"/>
+            <a:off x="274320" y="3931920"/>
+            <a:ext cx="6949440" cy="2651760"/>
           </a:xfrm>
           <a:prstGeom prst="rect">
             <a:avLst/>
@@ -9945,8 +11100,8 @@
         </p:nvSpPr>
         <p:spPr>
           <a:xfrm>
-            <a:off x="6035040" y="1188720"/>
-            <a:ext cx="54864" cy="2468880"/>
+            <a:off x="274320" y="3931920"/>
+            <a:ext cx="54864" cy="2651760"/>
           </a:xfrm>
           <a:prstGeom prst="rect">
             <a:avLst/>
@@ -9988,8 +11143,8 @@
         </p:nvSpPr>
         <p:spPr>
           <a:xfrm>
-            <a:off x="6172200" y="1298448"/>
-            <a:ext cx="5623560" cy="347472"/>
+            <a:off x="411479" y="4023359"/>
+            <a:ext cx="6720840" cy="347472"/>
           </a:xfrm>
           <a:prstGeom prst="rect">
             <a:avLst/>
@@ -10004,12 +11159,12 @@
           <a:p>
             <a:pPr algn="l"/>
             <a:r>
-              <a:rPr sz="1500" b="1" i="0">
+              <a:rPr sz="1400" b="1" i="0">
                 <a:solidFill>
                   <a:srgbClr val="FB923C"/>
                 </a:solidFill>
               </a:rPr>
-              <a:t>Warum fest trotz 5.500°C?</a:t>
+              <a:t>Besonderheiten</a:t>
             </a:r>
           </a:p>
         </p:txBody>
@@ -10022,8 +11177,8 @@
         </p:nvSpPr>
         <p:spPr>
           <a:xfrm>
-            <a:off x="6172200" y="1664208"/>
-            <a:ext cx="5623560" cy="1901952"/>
+            <a:off x="411479" y="4389120"/>
+            <a:ext cx="6720840" cy="2103120"/>
           </a:xfrm>
           <a:prstGeom prst="rect">
             <a:avLst/>
@@ -10038,56 +11193,45 @@
           <a:p>
             <a:pPr algn="l"/>
             <a:r>
-              <a:rPr sz="1700" b="0">
+              <a:rPr sz="1500" b="0">
                 <a:solidFill>
                   <a:srgbClr val="FFFFFF"/>
                 </a:solidFill>
               </a:rPr>
-              <a:t>• Extremer Druck: 3,6 Mio. bar</a:t>
+              <a:t>• Fest trotz 5.500°C → Druck: 3,6 Mio. bar</a:t>
             </a:r>
           </a:p>
           <a:p>
             <a:pPr algn="l"/>
             <a:r>
-              <a:rPr sz="1700" b="0">
+              <a:rPr sz="1500" b="0">
                 <a:solidFill>
                   <a:srgbClr val="FFFFFF"/>
                 </a:solidFill>
               </a:rPr>
-              <a:t>• Druck verhindert dass Metall schmilzt</a:t>
+              <a:t>• Rotiert leicht schneller als die Erde</a:t>
             </a:r>
           </a:p>
           <a:p>
             <a:pPr algn="l"/>
             <a:r>
-              <a:rPr sz="1700" b="0">
+              <a:rPr sz="1500" b="0">
                 <a:solidFill>
                   <a:srgbClr val="FFFFFF"/>
                 </a:solidFill>
               </a:rPr>
-              <a:t>• Ähnlich wie Wasser unter Druck</a:t>
+              <a:t>• Entdeckt 1936 von Inge Lehmann</a:t>
             </a:r>
           </a:p>
           <a:p>
             <a:pPr algn="l"/>
             <a:r>
-              <a:rPr sz="1700" b="0">
+              <a:rPr sz="1500" b="0">
                 <a:solidFill>
                   <a:srgbClr val="FFFFFF"/>
                 </a:solidFill>
               </a:rPr>
-              <a:t>• = höherer Siedepunkt</a:t>
-            </a:r>
-          </a:p>
-          <a:p>
-            <a:pPr algn="l"/>
-            <a:r>
-              <a:rPr sz="1700" b="0">
-                <a:solidFill>
-                  <a:srgbClr val="FFFFFF"/>
-                </a:solidFill>
-              </a:rPr>
-              <a:t>• Physikalisches Phänomen: Druckfestigung</a:t>
+              <a:t>• Heißeste Stelle der Erde</a:t>
             </a:r>
           </a:p>
         </p:txBody>
@@ -10100,14 +11244,14 @@
         </p:nvSpPr>
         <p:spPr>
           <a:xfrm>
-            <a:off x="274320" y="3840480"/>
-            <a:ext cx="5577840" cy="2560320"/>
-          </a:xfrm>
-          <a:prstGeom prst="rect">
-            <a:avLst/>
-          </a:prstGeom>
-          <a:solidFill>
-            <a:srgbClr val="0F233D"/>
+            <a:off x="7360920" y="1143000"/>
+            <a:ext cx="4572000" cy="5486400"/>
+          </a:xfrm>
+          <a:prstGeom prst="rect">
+            <a:avLst/>
+          </a:prstGeom>
+          <a:solidFill>
+            <a:srgbClr val="0D1E35"/>
           </a:solidFill>
           <a:ln>
             <a:noFill/>
@@ -10143,51 +11287,180 @@
         </p:nvSpPr>
         <p:spPr>
           <a:xfrm>
-            <a:off x="274320" y="3840480"/>
-            <a:ext cx="54864" cy="2560320"/>
-          </a:xfrm>
-          <a:prstGeom prst="rect">
-            <a:avLst/>
-          </a:prstGeom>
-          <a:solidFill>
-            <a:srgbClr val="FBBF24"/>
-          </a:solidFill>
-          <a:ln>
-            <a:noFill/>
-          </a:ln>
-        </p:spPr>
-        <p:style>
-          <a:lnRef idx="1">
-            <a:schemeClr val="accent1"/>
-          </a:lnRef>
-          <a:fillRef idx="3">
-            <a:schemeClr val="accent1"/>
-          </a:fillRef>
-          <a:effectRef idx="2">
-            <a:schemeClr val="accent1"/>
-          </a:effectRef>
-          <a:fontRef idx="minor">
-            <a:schemeClr val="lt1"/>
-          </a:fontRef>
-        </p:style>
-        <p:txBody>
-          <a:bodyPr rtlCol="0" anchor="ctr"/>
-          <a:lstStyle/>
-          <a:p>
-            <a:pPr algn="ctr"/>
-          </a:p>
-        </p:txBody>
-      </p:sp>
-      <p:sp>
-        <p:nvSpPr>
-          <p:cNvPr id="18" name="TextBox 17"/>
+            <a:off x="7360920" y="1143000"/>
+            <a:ext cx="4572000" cy="36576"/>
+          </a:xfrm>
+          <a:prstGeom prst="rect">
+            <a:avLst/>
+          </a:prstGeom>
+          <a:solidFill>
+            <a:srgbClr val="94A3B8"/>
+          </a:solidFill>
+          <a:ln>
+            <a:noFill/>
+          </a:ln>
+        </p:spPr>
+        <p:style>
+          <a:lnRef idx="1">
+            <a:schemeClr val="accent1"/>
+          </a:lnRef>
+          <a:fillRef idx="3">
+            <a:schemeClr val="accent1"/>
+          </a:fillRef>
+          <a:effectRef idx="2">
+            <a:schemeClr val="accent1"/>
+          </a:effectRef>
+          <a:fontRef idx="minor">
+            <a:schemeClr val="lt1"/>
+          </a:fontRef>
+        </p:style>
+        <p:txBody>
+          <a:bodyPr rtlCol="0" anchor="ctr"/>
+          <a:lstStyle/>
+          <a:p>
+            <a:pPr algn="ctr"/>
+          </a:p>
+        </p:txBody>
+      </p:sp>
+      <p:sp>
+        <p:nvSpPr>
+          <p:cNvPr id="18" name="Rectangle 17"/>
+          <p:cNvSpPr/>
+          <p:nvPr/>
+        </p:nvSpPr>
+        <p:spPr>
+          <a:xfrm>
+            <a:off x="7360920" y="6592824"/>
+            <a:ext cx="4572000" cy="36576"/>
+          </a:xfrm>
+          <a:prstGeom prst="rect">
+            <a:avLst/>
+          </a:prstGeom>
+          <a:solidFill>
+            <a:srgbClr val="94A3B8"/>
+          </a:solidFill>
+          <a:ln>
+            <a:noFill/>
+          </a:ln>
+        </p:spPr>
+        <p:style>
+          <a:lnRef idx="1">
+            <a:schemeClr val="accent1"/>
+          </a:lnRef>
+          <a:fillRef idx="3">
+            <a:schemeClr val="accent1"/>
+          </a:fillRef>
+          <a:effectRef idx="2">
+            <a:schemeClr val="accent1"/>
+          </a:effectRef>
+          <a:fontRef idx="minor">
+            <a:schemeClr val="lt1"/>
+          </a:fontRef>
+        </p:style>
+        <p:txBody>
+          <a:bodyPr rtlCol="0" anchor="ctr"/>
+          <a:lstStyle/>
+          <a:p>
+            <a:pPr algn="ctr"/>
+          </a:p>
+        </p:txBody>
+      </p:sp>
+      <p:sp>
+        <p:nvSpPr>
+          <p:cNvPr id="19" name="Rectangle 18"/>
+          <p:cNvSpPr/>
+          <p:nvPr/>
+        </p:nvSpPr>
+        <p:spPr>
+          <a:xfrm>
+            <a:off x="7360920" y="1143000"/>
+            <a:ext cx="36576" cy="5486400"/>
+          </a:xfrm>
+          <a:prstGeom prst="rect">
+            <a:avLst/>
+          </a:prstGeom>
+          <a:solidFill>
+            <a:srgbClr val="94A3B8"/>
+          </a:solidFill>
+          <a:ln>
+            <a:noFill/>
+          </a:ln>
+        </p:spPr>
+        <p:style>
+          <a:lnRef idx="1">
+            <a:schemeClr val="accent1"/>
+          </a:lnRef>
+          <a:fillRef idx="3">
+            <a:schemeClr val="accent1"/>
+          </a:fillRef>
+          <a:effectRef idx="2">
+            <a:schemeClr val="accent1"/>
+          </a:effectRef>
+          <a:fontRef idx="minor">
+            <a:schemeClr val="lt1"/>
+          </a:fontRef>
+        </p:style>
+        <p:txBody>
+          <a:bodyPr rtlCol="0" anchor="ctr"/>
+          <a:lstStyle/>
+          <a:p>
+            <a:pPr algn="ctr"/>
+          </a:p>
+        </p:txBody>
+      </p:sp>
+      <p:sp>
+        <p:nvSpPr>
+          <p:cNvPr id="20" name="Rectangle 19"/>
+          <p:cNvSpPr/>
+          <p:nvPr/>
+        </p:nvSpPr>
+        <p:spPr>
+          <a:xfrm>
+            <a:off x="11896344" y="1143000"/>
+            <a:ext cx="36576" cy="5486400"/>
+          </a:xfrm>
+          <a:prstGeom prst="rect">
+            <a:avLst/>
+          </a:prstGeom>
+          <a:solidFill>
+            <a:srgbClr val="94A3B8"/>
+          </a:solidFill>
+          <a:ln>
+            <a:noFill/>
+          </a:ln>
+        </p:spPr>
+        <p:style>
+          <a:lnRef idx="1">
+            <a:schemeClr val="accent1"/>
+          </a:lnRef>
+          <a:fillRef idx="3">
+            <a:schemeClr val="accent1"/>
+          </a:fillRef>
+          <a:effectRef idx="2">
+            <a:schemeClr val="accent1"/>
+          </a:effectRef>
+          <a:fontRef idx="minor">
+            <a:schemeClr val="lt1"/>
+          </a:fontRef>
+        </p:style>
+        <p:txBody>
+          <a:bodyPr rtlCol="0" anchor="ctr"/>
+          <a:lstStyle/>
+          <a:p>
+            <a:pPr algn="ctr"/>
+          </a:p>
+        </p:txBody>
+      </p:sp>
+      <p:sp>
+        <p:nvSpPr>
+          <p:cNvPr id="21" name="TextBox 20"/>
           <p:cNvSpPr txBox="1"/>
           <p:nvPr/>
         </p:nvSpPr>
         <p:spPr>
           <a:xfrm>
-            <a:off x="411479" y="3950208"/>
-            <a:ext cx="5349240" cy="347472"/>
+            <a:off x="7360920" y="3611880"/>
+            <a:ext cx="4572000" cy="548640"/>
           </a:xfrm>
           <a:prstGeom prst="rect">
             <a:avLst/>
@@ -10200,290 +11473,14 @@
           </a:bodyPr>
           <a:lstStyle/>
           <a:p>
-            <a:pPr algn="l"/>
-            <a:r>
-              <a:rPr sz="1500" b="1" i="0">
-                <a:solidFill>
-                  <a:srgbClr val="FBBF24"/>
-                </a:solidFill>
-              </a:rPr>
-              <a:t>Besonderheiten</a:t>
-            </a:r>
-          </a:p>
-        </p:txBody>
-      </p:sp>
-      <p:sp>
-        <p:nvSpPr>
-          <p:cNvPr id="19" name="TextBox 18"/>
-          <p:cNvSpPr txBox="1"/>
-          <p:nvPr/>
-        </p:nvSpPr>
-        <p:spPr>
-          <a:xfrm>
-            <a:off x="411479" y="4315968"/>
-            <a:ext cx="5349240" cy="1993391"/>
-          </a:xfrm>
-          <a:prstGeom prst="rect">
-            <a:avLst/>
-          </a:prstGeom>
-          <a:noFill/>
-        </p:spPr>
-        <p:txBody>
-          <a:bodyPr wrap="square">
-            <a:spAutoFit/>
-          </a:bodyPr>
-          <a:lstStyle/>
-          <a:p>
-            <a:pPr algn="l"/>
-            <a:r>
-              <a:rPr sz="1700" b="0">
-                <a:solidFill>
-                  <a:srgbClr val="FFFFFF"/>
-                </a:solidFill>
-              </a:rPr>
-              <a:t>• Rotiert leicht schneller als die Erde</a:t>
-            </a:r>
-          </a:p>
-          <a:p>
-            <a:pPr algn="l"/>
-            <a:r>
-              <a:rPr sz="1700" b="0">
-                <a:solidFill>
-                  <a:srgbClr val="FFFFFF"/>
-                </a:solidFill>
-              </a:rPr>
-              <a:t>• Etwa 0,3–0,5° pro Jahr schneller</a:t>
-            </a:r>
-          </a:p>
-          <a:p>
-            <a:pPr algn="l"/>
-            <a:r>
-              <a:rPr sz="1700" b="0">
-                <a:solidFill>
-                  <a:srgbClr val="FFFFFF"/>
-                </a:solidFill>
-              </a:rPr>
-              <a:t>• Innere Struktur noch nicht vollständig</a:t>
-            </a:r>
-          </a:p>
-          <a:p>
-            <a:pPr algn="l"/>
-            <a:r>
-              <a:rPr sz="1700" b="0">
-                <a:solidFill>
-                  <a:srgbClr val="FFFFFF"/>
-                </a:solidFill>
-              </a:rPr>
-              <a:t>  erforscht</a:t>
-            </a:r>
-          </a:p>
-          <a:p>
-            <a:pPr algn="l"/>
-            <a:r>
-              <a:rPr sz="1700" b="0">
-                <a:solidFill>
-                  <a:srgbClr val="FFFFFF"/>
-                </a:solidFill>
-              </a:rPr>
-              <a:t>• Heißeste Stelle der Erde</a:t>
-            </a:r>
-          </a:p>
-        </p:txBody>
-      </p:sp>
-      <p:sp>
-        <p:nvSpPr>
-          <p:cNvPr id="20" name="Rectangle 19"/>
-          <p:cNvSpPr/>
-          <p:nvPr/>
-        </p:nvSpPr>
-        <p:spPr>
-          <a:xfrm>
-            <a:off x="6035040" y="3840480"/>
-            <a:ext cx="5852160" cy="2560320"/>
-          </a:xfrm>
-          <a:prstGeom prst="rect">
-            <a:avLst/>
-          </a:prstGeom>
-          <a:solidFill>
-            <a:srgbClr val="0F233D"/>
-          </a:solidFill>
-          <a:ln>
-            <a:noFill/>
-          </a:ln>
-        </p:spPr>
-        <p:style>
-          <a:lnRef idx="1">
-            <a:schemeClr val="accent1"/>
-          </a:lnRef>
-          <a:fillRef idx="3">
-            <a:schemeClr val="accent1"/>
-          </a:fillRef>
-          <a:effectRef idx="2">
-            <a:schemeClr val="accent1"/>
-          </a:effectRef>
-          <a:fontRef idx="minor">
-            <a:schemeClr val="lt1"/>
-          </a:fontRef>
-        </p:style>
-        <p:txBody>
-          <a:bodyPr rtlCol="0" anchor="ctr"/>
-          <a:lstStyle/>
-          <a:p>
-            <a:pPr algn="ctr"/>
-          </a:p>
-        </p:txBody>
-      </p:sp>
-      <p:sp>
-        <p:nvSpPr>
-          <p:cNvPr id="21" name="Rectangle 20"/>
-          <p:cNvSpPr/>
-          <p:nvPr/>
-        </p:nvSpPr>
-        <p:spPr>
-          <a:xfrm>
-            <a:off x="6035040" y="3840480"/>
-            <a:ext cx="54864" cy="2560320"/>
-          </a:xfrm>
-          <a:prstGeom prst="rect">
-            <a:avLst/>
-          </a:prstGeom>
-          <a:solidFill>
-            <a:srgbClr val="FBBF24"/>
-          </a:solidFill>
-          <a:ln>
-            <a:noFill/>
-          </a:ln>
-        </p:spPr>
-        <p:style>
-          <a:lnRef idx="1">
-            <a:schemeClr val="accent1"/>
-          </a:lnRef>
-          <a:fillRef idx="3">
-            <a:schemeClr val="accent1"/>
-          </a:fillRef>
-          <a:effectRef idx="2">
-            <a:schemeClr val="accent1"/>
-          </a:effectRef>
-          <a:fontRef idx="minor">
-            <a:schemeClr val="lt1"/>
-          </a:fontRef>
-        </p:style>
-        <p:txBody>
-          <a:bodyPr rtlCol="0" anchor="ctr"/>
-          <a:lstStyle/>
-          <a:p>
-            <a:pPr algn="ctr"/>
-          </a:p>
-        </p:txBody>
-      </p:sp>
-      <p:sp>
-        <p:nvSpPr>
-          <p:cNvPr id="22" name="TextBox 21"/>
-          <p:cNvSpPr txBox="1"/>
-          <p:nvPr/>
-        </p:nvSpPr>
-        <p:spPr>
-          <a:xfrm>
-            <a:off x="6172200" y="3950208"/>
-            <a:ext cx="5623560" cy="347472"/>
-          </a:xfrm>
-          <a:prstGeom prst="rect">
-            <a:avLst/>
-          </a:prstGeom>
-          <a:noFill/>
-        </p:spPr>
-        <p:txBody>
-          <a:bodyPr wrap="square">
-            <a:spAutoFit/>
-          </a:bodyPr>
-          <a:lstStyle/>
-          <a:p>
-            <a:pPr algn="l"/>
-            <a:r>
-              <a:rPr sz="1500" b="1" i="0">
-                <a:solidFill>
-                  <a:srgbClr val="FBBF24"/>
-                </a:solidFill>
-              </a:rPr>
-              <a:t>Wichtige Fakten</a:t>
-            </a:r>
-          </a:p>
-        </p:txBody>
-      </p:sp>
-      <p:sp>
-        <p:nvSpPr>
-          <p:cNvPr id="23" name="TextBox 22"/>
-          <p:cNvSpPr txBox="1"/>
-          <p:nvPr/>
-        </p:nvSpPr>
-        <p:spPr>
-          <a:xfrm>
-            <a:off x="6172200" y="4315968"/>
-            <a:ext cx="5623560" cy="1993391"/>
-          </a:xfrm>
-          <a:prstGeom prst="rect">
-            <a:avLst/>
-          </a:prstGeom>
-          <a:noFill/>
-        </p:spPr>
-        <p:txBody>
-          <a:bodyPr wrap="square">
-            <a:spAutoFit/>
-          </a:bodyPr>
-          <a:lstStyle/>
-          <a:p>
-            <a:pPr algn="l"/>
-            <a:r>
-              <a:rPr sz="1700" b="0">
-                <a:solidFill>
-                  <a:srgbClr val="FFFFFF"/>
-                </a:solidFill>
-              </a:rPr>
-              <a:t>• ~16% des Erdvolumens (gesamter Kern)</a:t>
-            </a:r>
-          </a:p>
-          <a:p>
-            <a:pPr algn="l"/>
-            <a:r>
-              <a:rPr sz="1700" b="0">
-                <a:solidFill>
-                  <a:srgbClr val="FFFFFF"/>
-                </a:solidFill>
-              </a:rPr>
-              <a:t>• ~32% der Erdmasse</a:t>
-            </a:r>
-          </a:p>
-          <a:p>
-            <a:pPr algn="l"/>
-            <a:r>
-              <a:rPr sz="1700" b="0">
-                <a:solidFill>
-                  <a:srgbClr val="FFFFFF"/>
-                </a:solidFill>
-              </a:rPr>
-              <a:t>• Entdeckt 1936 von Inge Lehmann</a:t>
-            </a:r>
-          </a:p>
-          <a:p>
-            <a:pPr algn="l"/>
-            <a:r>
-              <a:rPr sz="1700" b="0">
-                <a:solidFill>
-                  <a:srgbClr val="FFFFFF"/>
-                </a:solidFill>
-              </a:rPr>
-              <a:t>• Nachweis durch Seismologie</a:t>
-            </a:r>
-          </a:p>
-          <a:p>
-            <a:pPr algn="l"/>
-            <a:r>
-              <a:rPr sz="1700" b="0">
-                <a:solidFill>
-                  <a:srgbClr val="FFFFFF"/>
-                </a:solidFill>
-              </a:rPr>
-              <a:t>  (Erdbebenwellen-Analyse)</a:t>
+            <a:pPr algn="ctr"/>
+            <a:r>
+              <a:rPr sz="1500" b="0" i="1">
+                <a:solidFill>
+                  <a:srgbClr val="94A3B8"/>
+                </a:solidFill>
+              </a:rPr>
+              <a:t>📷  Bild: Innerer Erdkern</a:t>
             </a:r>
           </a:p>
         </p:txBody>
@@ -10643,8 +11640,8 @@
         </p:nvSpPr>
         <p:spPr>
           <a:xfrm>
-            <a:off x="228600" y="73152"/>
-            <a:ext cx="9144000" cy="822960"/>
+            <a:off x="228600" y="91440"/>
+            <a:ext cx="8686800" cy="822960"/>
           </a:xfrm>
           <a:prstGeom prst="rect">
             <a:avLst/>
@@ -10659,12 +11656,12 @@
           <a:p>
             <a:pPr algn="l"/>
             <a:r>
-              <a:rPr sz="3200" b="1" i="0">
+              <a:rPr sz="3000" b="1" i="0">
                 <a:solidFill>
                   <a:srgbClr val="FFFFFF"/>
                 </a:solidFill>
               </a:rPr>
-              <a:t>🌋  Vulkane &amp; Erdbeben durch Plattenbewegung</a:t>
+              <a:t>🌋  Vulkane &amp; Erdbeben</a:t>
             </a:r>
           </a:p>
         </p:txBody>
@@ -10677,8 +11674,8 @@
         </p:nvSpPr>
         <p:spPr>
           <a:xfrm>
-            <a:off x="10058400" y="228600"/>
-            <a:ext cx="1920240" cy="548640"/>
+            <a:off x="9601200" y="256032"/>
+            <a:ext cx="2377440" cy="457200"/>
           </a:xfrm>
           <a:prstGeom prst="rect">
             <a:avLst/>
@@ -10693,7 +11690,7 @@
           <a:p>
             <a:pPr algn="r"/>
             <a:r>
-              <a:rPr sz="1400" b="1" i="0">
+              <a:rPr sz="1300" b="1" i="0">
                 <a:solidFill>
                   <a:srgbClr val="FB923C"/>
                 </a:solidFill>
@@ -10754,8 +11751,8 @@
         </p:nvSpPr>
         <p:spPr>
           <a:xfrm>
-            <a:off x="274320" y="1188720"/>
-            <a:ext cx="5577840" cy="2468880"/>
+            <a:off x="274320" y="1143000"/>
+            <a:ext cx="6949440" cy="2651760"/>
           </a:xfrm>
           <a:prstGeom prst="rect">
             <a:avLst/>
@@ -10797,8 +11794,8 @@
         </p:nvSpPr>
         <p:spPr>
           <a:xfrm>
-            <a:off x="274320" y="1188720"/>
-            <a:ext cx="54864" cy="2468880"/>
+            <a:off x="274320" y="1143000"/>
+            <a:ext cx="54864" cy="2651760"/>
           </a:xfrm>
           <a:prstGeom prst="rect">
             <a:avLst/>
@@ -10840,8 +11837,8 @@
         </p:nvSpPr>
         <p:spPr>
           <a:xfrm>
-            <a:off x="411479" y="1298448"/>
-            <a:ext cx="5349240" cy="347472"/>
+            <a:off x="411479" y="1234440"/>
+            <a:ext cx="6720840" cy="347472"/>
           </a:xfrm>
           <a:prstGeom prst="rect">
             <a:avLst/>
@@ -10856,12 +11853,12 @@
           <a:p>
             <a:pPr algn="l"/>
             <a:r>
-              <a:rPr sz="1500" b="1" i="0">
+              <a:rPr sz="1400" b="1" i="0">
                 <a:solidFill>
                   <a:srgbClr val="F87171"/>
                 </a:solidFill>
               </a:rPr>
-              <a:t>Wie entstehen Vulkane?</a:t>
+              <a:t>Wie entstehen Vulkane &amp; Erdbeben?</a:t>
             </a:r>
           </a:p>
         </p:txBody>
@@ -10874,8 +11871,8 @@
         </p:nvSpPr>
         <p:spPr>
           <a:xfrm>
-            <a:off x="411479" y="1664208"/>
-            <a:ext cx="5349240" cy="1901952"/>
+            <a:off x="411479" y="1600200"/>
+            <a:ext cx="6720840" cy="2103120"/>
           </a:xfrm>
           <a:prstGeom prst="rect">
             <a:avLst/>
@@ -10890,7 +11887,7 @@
           <a:p>
             <a:pPr algn="l"/>
             <a:r>
-              <a:rPr sz="1700" b="0">
+              <a:rPr sz="1500" b="0">
                 <a:solidFill>
                   <a:srgbClr val="FFFFFF"/>
                 </a:solidFill>
@@ -10901,44 +11898,33 @@
           <a:p>
             <a:pPr algn="l"/>
             <a:r>
-              <a:rPr sz="1700" b="0">
+              <a:rPr sz="1500" b="0">
                 <a:solidFill>
                   <a:srgbClr val="FFFFFF"/>
                 </a:solidFill>
               </a:rPr>
-              <a:t>• Subduzierte Platten schmelzen im Mantel</a:t>
+              <a:t>• Subduktion → Platte schmilzt → Vulkan</a:t>
             </a:r>
           </a:p>
           <a:p>
             <a:pPr algn="l"/>
             <a:r>
-              <a:rPr sz="1700" b="0">
+              <a:rPr sz="1500" b="0">
                 <a:solidFill>
                   <a:srgbClr val="FFFFFF"/>
                 </a:solidFill>
               </a:rPr>
-              <a:t>• Magma steigt durch Risse auf</a:t>
+              <a:t>• Platten spannen sich → Entladung = Erdbeben</a:t>
             </a:r>
           </a:p>
           <a:p>
             <a:pPr algn="l"/>
             <a:r>
-              <a:rPr sz="1700" b="0">
+              <a:rPr sz="1500" b="0">
                 <a:solidFill>
                   <a:srgbClr val="FFFFFF"/>
                 </a:solidFill>
               </a:rPr>
-              <a:t>• → Vulkane an Plattengrenzen</a:t>
-            </a:r>
-          </a:p>
-          <a:p>
-            <a:pPr algn="l"/>
-            <a:r>
-              <a:rPr sz="1700" b="0">
-                <a:solidFill>
-                  <a:srgbClr val="FFFFFF"/>
-                </a:solidFill>
-              </a:rPr>
               <a:t>• Beispiel: Pazifischer Feuerring</a:t>
             </a:r>
           </a:p>
@@ -10952,8 +11938,8 @@
         </p:nvSpPr>
         <p:spPr>
           <a:xfrm>
-            <a:off x="6035040" y="1188720"/>
-            <a:ext cx="5852160" cy="2468880"/>
+            <a:off x="274320" y="3931920"/>
+            <a:ext cx="6949440" cy="2651760"/>
           </a:xfrm>
           <a:prstGeom prst="rect">
             <a:avLst/>
@@ -10995,8 +11981,8 @@
         </p:nvSpPr>
         <p:spPr>
           <a:xfrm>
-            <a:off x="6035040" y="1188720"/>
-            <a:ext cx="54864" cy="2468880"/>
+            <a:off x="274320" y="3931920"/>
+            <a:ext cx="54864" cy="2651760"/>
           </a:xfrm>
           <a:prstGeom prst="rect">
             <a:avLst/>
@@ -11038,8 +12024,8 @@
         </p:nvSpPr>
         <p:spPr>
           <a:xfrm>
-            <a:off x="6172200" y="1298448"/>
-            <a:ext cx="5623560" cy="347472"/>
+            <a:off x="411479" y="4023359"/>
+            <a:ext cx="6720840" cy="347472"/>
           </a:xfrm>
           <a:prstGeom prst="rect">
             <a:avLst/>
@@ -11054,12 +12040,12 @@
           <a:p>
             <a:pPr algn="l"/>
             <a:r>
-              <a:rPr sz="1500" b="1" i="0">
+              <a:rPr sz="1400" b="1" i="0">
                 <a:solidFill>
                   <a:srgbClr val="FB923C"/>
                 </a:solidFill>
               </a:rPr>
-              <a:t>Wie entstehen Erdbeben?</a:t>
+              <a:t>Arten von Plattengrenzen</a:t>
             </a:r>
           </a:p>
         </p:txBody>
@@ -11072,8 +12058,8 @@
         </p:nvSpPr>
         <p:spPr>
           <a:xfrm>
-            <a:off x="6172200" y="1664208"/>
-            <a:ext cx="5623560" cy="1901952"/>
+            <a:off x="411479" y="4389120"/>
+            <a:ext cx="6720840" cy="2103120"/>
           </a:xfrm>
           <a:prstGeom prst="rect">
             <a:avLst/>
@@ -11088,56 +12074,45 @@
           <a:p>
             <a:pPr algn="l"/>
             <a:r>
-              <a:rPr sz="1700" b="0">
+              <a:rPr sz="1500" b="0">
                 <a:solidFill>
                   <a:srgbClr val="FFFFFF"/>
                 </a:solidFill>
               </a:rPr>
-              <a:t>• Platten bewegen sich gegeneinander</a:t>
+              <a:t>• Divergent: Platten entfernen sich → Vulkane</a:t>
             </a:r>
           </a:p>
           <a:p>
             <a:pPr algn="l"/>
             <a:r>
-              <a:rPr sz="1700" b="0">
+              <a:rPr sz="1500" b="0">
                 <a:solidFill>
                   <a:srgbClr val="FFFFFF"/>
                 </a:solidFill>
               </a:rPr>
-              <a:t>• Spannung baut sich auf</a:t>
+              <a:t>• Konvergent: stoßen zusammen → Gebirge</a:t>
             </a:r>
           </a:p>
           <a:p>
             <a:pPr algn="l"/>
             <a:r>
-              <a:rPr sz="1700" b="0">
+              <a:rPr sz="1500" b="0">
                 <a:solidFill>
                   <a:srgbClr val="FFFFFF"/>
                 </a:solidFill>
               </a:rPr>
-              <a:t>• Plötzliche Entladung = Erdbeben</a:t>
+              <a:t>• Transform: gleiten aneinander → Erdbeben</a:t>
             </a:r>
           </a:p>
           <a:p>
             <a:pPr algn="l"/>
             <a:r>
-              <a:rPr sz="1700" b="0">
+              <a:rPr sz="1500" b="0">
                 <a:solidFill>
                   <a:srgbClr val="FFFFFF"/>
                 </a:solidFill>
               </a:rPr>
-              <a:t>• Stärke: Richterskala</a:t>
-            </a:r>
-          </a:p>
-          <a:p>
-            <a:pPr algn="l"/>
-            <a:r>
-              <a:rPr sz="1700" b="0">
-                <a:solidFill>
-                  <a:srgbClr val="FFFFFF"/>
-                </a:solidFill>
-              </a:rPr>
-              <a:t>• Gefährlichste Zone: Plattengrenzen</a:t>
+              <a:t>• Beispiele: Vesuv, Eyjafjallajökull, Himalaya</a:t>
             </a:r>
           </a:p>
         </p:txBody>
@@ -11150,14 +12125,14 @@
         </p:nvSpPr>
         <p:spPr>
           <a:xfrm>
-            <a:off x="274320" y="3840480"/>
-            <a:ext cx="5577840" cy="2560320"/>
-          </a:xfrm>
-          <a:prstGeom prst="rect">
-            <a:avLst/>
-          </a:prstGeom>
-          <a:solidFill>
-            <a:srgbClr val="0F233D"/>
+            <a:off x="7360920" y="1143000"/>
+            <a:ext cx="4572000" cy="5486400"/>
+          </a:xfrm>
+          <a:prstGeom prst="rect">
+            <a:avLst/>
+          </a:prstGeom>
+          <a:solidFill>
+            <a:srgbClr val="0D1E35"/>
           </a:solidFill>
           <a:ln>
             <a:noFill/>
@@ -11193,51 +12168,180 @@
         </p:nvSpPr>
         <p:spPr>
           <a:xfrm>
-            <a:off x="274320" y="3840480"/>
-            <a:ext cx="54864" cy="2560320"/>
-          </a:xfrm>
-          <a:prstGeom prst="rect">
-            <a:avLst/>
-          </a:prstGeom>
-          <a:solidFill>
-            <a:srgbClr val="2DD4BF"/>
-          </a:solidFill>
-          <a:ln>
-            <a:noFill/>
-          </a:ln>
-        </p:spPr>
-        <p:style>
-          <a:lnRef idx="1">
-            <a:schemeClr val="accent1"/>
-          </a:lnRef>
-          <a:fillRef idx="3">
-            <a:schemeClr val="accent1"/>
-          </a:fillRef>
-          <a:effectRef idx="2">
-            <a:schemeClr val="accent1"/>
-          </a:effectRef>
-          <a:fontRef idx="minor">
-            <a:schemeClr val="lt1"/>
-          </a:fontRef>
-        </p:style>
-        <p:txBody>
-          <a:bodyPr rtlCol="0" anchor="ctr"/>
-          <a:lstStyle/>
-          <a:p>
-            <a:pPr algn="ctr"/>
-          </a:p>
-        </p:txBody>
-      </p:sp>
-      <p:sp>
-        <p:nvSpPr>
-          <p:cNvPr id="18" name="TextBox 17"/>
+            <a:off x="7360920" y="1143000"/>
+            <a:ext cx="4572000" cy="36576"/>
+          </a:xfrm>
+          <a:prstGeom prst="rect">
+            <a:avLst/>
+          </a:prstGeom>
+          <a:solidFill>
+            <a:srgbClr val="94A3B8"/>
+          </a:solidFill>
+          <a:ln>
+            <a:noFill/>
+          </a:ln>
+        </p:spPr>
+        <p:style>
+          <a:lnRef idx="1">
+            <a:schemeClr val="accent1"/>
+          </a:lnRef>
+          <a:fillRef idx="3">
+            <a:schemeClr val="accent1"/>
+          </a:fillRef>
+          <a:effectRef idx="2">
+            <a:schemeClr val="accent1"/>
+          </a:effectRef>
+          <a:fontRef idx="minor">
+            <a:schemeClr val="lt1"/>
+          </a:fontRef>
+        </p:style>
+        <p:txBody>
+          <a:bodyPr rtlCol="0" anchor="ctr"/>
+          <a:lstStyle/>
+          <a:p>
+            <a:pPr algn="ctr"/>
+          </a:p>
+        </p:txBody>
+      </p:sp>
+      <p:sp>
+        <p:nvSpPr>
+          <p:cNvPr id="18" name="Rectangle 17"/>
+          <p:cNvSpPr/>
+          <p:nvPr/>
+        </p:nvSpPr>
+        <p:spPr>
+          <a:xfrm>
+            <a:off x="7360920" y="6592824"/>
+            <a:ext cx="4572000" cy="36576"/>
+          </a:xfrm>
+          <a:prstGeom prst="rect">
+            <a:avLst/>
+          </a:prstGeom>
+          <a:solidFill>
+            <a:srgbClr val="94A3B8"/>
+          </a:solidFill>
+          <a:ln>
+            <a:noFill/>
+          </a:ln>
+        </p:spPr>
+        <p:style>
+          <a:lnRef idx="1">
+            <a:schemeClr val="accent1"/>
+          </a:lnRef>
+          <a:fillRef idx="3">
+            <a:schemeClr val="accent1"/>
+          </a:fillRef>
+          <a:effectRef idx="2">
+            <a:schemeClr val="accent1"/>
+          </a:effectRef>
+          <a:fontRef idx="minor">
+            <a:schemeClr val="lt1"/>
+          </a:fontRef>
+        </p:style>
+        <p:txBody>
+          <a:bodyPr rtlCol="0" anchor="ctr"/>
+          <a:lstStyle/>
+          <a:p>
+            <a:pPr algn="ctr"/>
+          </a:p>
+        </p:txBody>
+      </p:sp>
+      <p:sp>
+        <p:nvSpPr>
+          <p:cNvPr id="19" name="Rectangle 18"/>
+          <p:cNvSpPr/>
+          <p:nvPr/>
+        </p:nvSpPr>
+        <p:spPr>
+          <a:xfrm>
+            <a:off x="7360920" y="1143000"/>
+            <a:ext cx="36576" cy="5486400"/>
+          </a:xfrm>
+          <a:prstGeom prst="rect">
+            <a:avLst/>
+          </a:prstGeom>
+          <a:solidFill>
+            <a:srgbClr val="94A3B8"/>
+          </a:solidFill>
+          <a:ln>
+            <a:noFill/>
+          </a:ln>
+        </p:spPr>
+        <p:style>
+          <a:lnRef idx="1">
+            <a:schemeClr val="accent1"/>
+          </a:lnRef>
+          <a:fillRef idx="3">
+            <a:schemeClr val="accent1"/>
+          </a:fillRef>
+          <a:effectRef idx="2">
+            <a:schemeClr val="accent1"/>
+          </a:effectRef>
+          <a:fontRef idx="minor">
+            <a:schemeClr val="lt1"/>
+          </a:fontRef>
+        </p:style>
+        <p:txBody>
+          <a:bodyPr rtlCol="0" anchor="ctr"/>
+          <a:lstStyle/>
+          <a:p>
+            <a:pPr algn="ctr"/>
+          </a:p>
+        </p:txBody>
+      </p:sp>
+      <p:sp>
+        <p:nvSpPr>
+          <p:cNvPr id="20" name="Rectangle 19"/>
+          <p:cNvSpPr/>
+          <p:nvPr/>
+        </p:nvSpPr>
+        <p:spPr>
+          <a:xfrm>
+            <a:off x="11896344" y="1143000"/>
+            <a:ext cx="36576" cy="5486400"/>
+          </a:xfrm>
+          <a:prstGeom prst="rect">
+            <a:avLst/>
+          </a:prstGeom>
+          <a:solidFill>
+            <a:srgbClr val="94A3B8"/>
+          </a:solidFill>
+          <a:ln>
+            <a:noFill/>
+          </a:ln>
+        </p:spPr>
+        <p:style>
+          <a:lnRef idx="1">
+            <a:schemeClr val="accent1"/>
+          </a:lnRef>
+          <a:fillRef idx="3">
+            <a:schemeClr val="accent1"/>
+          </a:fillRef>
+          <a:effectRef idx="2">
+            <a:schemeClr val="accent1"/>
+          </a:effectRef>
+          <a:fontRef idx="minor">
+            <a:schemeClr val="lt1"/>
+          </a:fontRef>
+        </p:style>
+        <p:txBody>
+          <a:bodyPr rtlCol="0" anchor="ctr"/>
+          <a:lstStyle/>
+          <a:p>
+            <a:pPr algn="ctr"/>
+          </a:p>
+        </p:txBody>
+      </p:sp>
+      <p:sp>
+        <p:nvSpPr>
+          <p:cNvPr id="21" name="TextBox 20"/>
           <p:cNvSpPr txBox="1"/>
           <p:nvPr/>
         </p:nvSpPr>
         <p:spPr>
           <a:xfrm>
-            <a:off x="411479" y="3950208"/>
-            <a:ext cx="5349240" cy="347472"/>
+            <a:off x="7360920" y="3611880"/>
+            <a:ext cx="4572000" cy="548640"/>
           </a:xfrm>
           <a:prstGeom prst="rect">
             <a:avLst/>
@@ -11250,301 +12354,14 @@
           </a:bodyPr>
           <a:lstStyle/>
           <a:p>
-            <a:pPr algn="l"/>
-            <a:r>
-              <a:rPr sz="1500" b="1" i="0">
-                <a:solidFill>
-                  <a:srgbClr val="2DD4BF"/>
-                </a:solidFill>
-              </a:rPr>
-              <a:t>Arten von Plattengrenzen</a:t>
-            </a:r>
-          </a:p>
-        </p:txBody>
-      </p:sp>
-      <p:sp>
-        <p:nvSpPr>
-          <p:cNvPr id="19" name="TextBox 18"/>
-          <p:cNvSpPr txBox="1"/>
-          <p:nvPr/>
-        </p:nvSpPr>
-        <p:spPr>
-          <a:xfrm>
-            <a:off x="411479" y="4315968"/>
-            <a:ext cx="5349240" cy="1993391"/>
-          </a:xfrm>
-          <a:prstGeom prst="rect">
-            <a:avLst/>
-          </a:prstGeom>
-          <a:noFill/>
-        </p:spPr>
-        <p:txBody>
-          <a:bodyPr wrap="square">
-            <a:spAutoFit/>
-          </a:bodyPr>
-          <a:lstStyle/>
-          <a:p>
-            <a:pPr algn="l"/>
-            <a:r>
-              <a:rPr sz="1700" b="0">
-                <a:solidFill>
-                  <a:srgbClr val="FFFFFF"/>
-                </a:solidFill>
-              </a:rPr>
-              <a:t>• Divergent: Platten entfernen sich</a:t>
-            </a:r>
-          </a:p>
-          <a:p>
-            <a:pPr algn="l"/>
-            <a:r>
-              <a:rPr sz="1700" b="0">
-                <a:solidFill>
-                  <a:srgbClr val="FFFFFF"/>
-                </a:solidFill>
-              </a:rPr>
-              <a:t>  → Mittelozeanische Rücken, Vulkane</a:t>
-            </a:r>
-          </a:p>
-          <a:p>
-            <a:pPr algn="l"/>
-            <a:r>
-              <a:rPr sz="1700" b="0">
-                <a:solidFill>
-                  <a:srgbClr val="FFFFFF"/>
-                </a:solidFill>
-              </a:rPr>
-              <a:t>• Konvergent: Platten stoßen zusammen</a:t>
-            </a:r>
-          </a:p>
-          <a:p>
-            <a:pPr algn="l"/>
-            <a:r>
-              <a:rPr sz="1700" b="0">
-                <a:solidFill>
-                  <a:srgbClr val="FFFFFF"/>
-                </a:solidFill>
-              </a:rPr>
-              <a:t>  → Gebirge, Erdbeben, Vulkane</a:t>
-            </a:r>
-          </a:p>
-          <a:p>
-            <a:pPr algn="l"/>
-            <a:r>
-              <a:rPr sz="1700" b="0">
-                <a:solidFill>
-                  <a:srgbClr val="FFFFFF"/>
-                </a:solidFill>
-              </a:rPr>
-              <a:t>• Transform: Platten gleiten aneinander</a:t>
-            </a:r>
-          </a:p>
-          <a:p>
-            <a:pPr algn="l"/>
-            <a:r>
-              <a:rPr sz="1700" b="0">
-                <a:solidFill>
-                  <a:srgbClr val="FFFFFF"/>
-                </a:solidFill>
-              </a:rPr>
-              <a:t>  → Erdbeben (z.B. San-Andreas-Graben)</a:t>
-            </a:r>
-          </a:p>
-        </p:txBody>
-      </p:sp>
-      <p:sp>
-        <p:nvSpPr>
-          <p:cNvPr id="20" name="Rectangle 19"/>
-          <p:cNvSpPr/>
-          <p:nvPr/>
-        </p:nvSpPr>
-        <p:spPr>
-          <a:xfrm>
-            <a:off x="6035040" y="3840480"/>
-            <a:ext cx="5852160" cy="2560320"/>
-          </a:xfrm>
-          <a:prstGeom prst="rect">
-            <a:avLst/>
-          </a:prstGeom>
-          <a:solidFill>
-            <a:srgbClr val="0F233D"/>
-          </a:solidFill>
-          <a:ln>
-            <a:noFill/>
-          </a:ln>
-        </p:spPr>
-        <p:style>
-          <a:lnRef idx="1">
-            <a:schemeClr val="accent1"/>
-          </a:lnRef>
-          <a:fillRef idx="3">
-            <a:schemeClr val="accent1"/>
-          </a:fillRef>
-          <a:effectRef idx="2">
-            <a:schemeClr val="accent1"/>
-          </a:effectRef>
-          <a:fontRef idx="minor">
-            <a:schemeClr val="lt1"/>
-          </a:fontRef>
-        </p:style>
-        <p:txBody>
-          <a:bodyPr rtlCol="0" anchor="ctr"/>
-          <a:lstStyle/>
-          <a:p>
-            <a:pPr algn="ctr"/>
-          </a:p>
-        </p:txBody>
-      </p:sp>
-      <p:sp>
-        <p:nvSpPr>
-          <p:cNvPr id="21" name="Rectangle 20"/>
-          <p:cNvSpPr/>
-          <p:nvPr/>
-        </p:nvSpPr>
-        <p:spPr>
-          <a:xfrm>
-            <a:off x="6035040" y="3840480"/>
-            <a:ext cx="54864" cy="2560320"/>
-          </a:xfrm>
-          <a:prstGeom prst="rect">
-            <a:avLst/>
-          </a:prstGeom>
-          <a:solidFill>
-            <a:srgbClr val="F87171"/>
-          </a:solidFill>
-          <a:ln>
-            <a:noFill/>
-          </a:ln>
-        </p:spPr>
-        <p:style>
-          <a:lnRef idx="1">
-            <a:schemeClr val="accent1"/>
-          </a:lnRef>
-          <a:fillRef idx="3">
-            <a:schemeClr val="accent1"/>
-          </a:fillRef>
-          <a:effectRef idx="2">
-            <a:schemeClr val="accent1"/>
-          </a:effectRef>
-          <a:fontRef idx="minor">
-            <a:schemeClr val="lt1"/>
-          </a:fontRef>
-        </p:style>
-        <p:txBody>
-          <a:bodyPr rtlCol="0" anchor="ctr"/>
-          <a:lstStyle/>
-          <a:p>
-            <a:pPr algn="ctr"/>
-          </a:p>
-        </p:txBody>
-      </p:sp>
-      <p:sp>
-        <p:nvSpPr>
-          <p:cNvPr id="22" name="TextBox 21"/>
-          <p:cNvSpPr txBox="1"/>
-          <p:nvPr/>
-        </p:nvSpPr>
-        <p:spPr>
-          <a:xfrm>
-            <a:off x="6172200" y="3950208"/>
-            <a:ext cx="5623560" cy="347472"/>
-          </a:xfrm>
-          <a:prstGeom prst="rect">
-            <a:avLst/>
-          </a:prstGeom>
-          <a:noFill/>
-        </p:spPr>
-        <p:txBody>
-          <a:bodyPr wrap="square">
-            <a:spAutoFit/>
-          </a:bodyPr>
-          <a:lstStyle/>
-          <a:p>
-            <a:pPr algn="l"/>
-            <a:r>
-              <a:rPr sz="1500" b="1" i="0">
-                <a:solidFill>
-                  <a:srgbClr val="F87171"/>
-                </a:solidFill>
-              </a:rPr>
-              <a:t>Bekannte Beispiele</a:t>
-            </a:r>
-          </a:p>
-        </p:txBody>
-      </p:sp>
-      <p:sp>
-        <p:nvSpPr>
-          <p:cNvPr id="23" name="TextBox 22"/>
-          <p:cNvSpPr txBox="1"/>
-          <p:nvPr/>
-        </p:nvSpPr>
-        <p:spPr>
-          <a:xfrm>
-            <a:off x="6172200" y="4315968"/>
-            <a:ext cx="5623560" cy="1993391"/>
-          </a:xfrm>
-          <a:prstGeom prst="rect">
-            <a:avLst/>
-          </a:prstGeom>
-          <a:noFill/>
-        </p:spPr>
-        <p:txBody>
-          <a:bodyPr wrap="square">
-            <a:spAutoFit/>
-          </a:bodyPr>
-          <a:lstStyle/>
-          <a:p>
-            <a:pPr algn="l"/>
-            <a:r>
-              <a:rPr sz="1700" b="0">
-                <a:solidFill>
-                  <a:srgbClr val="FFFFFF"/>
-                </a:solidFill>
-              </a:rPr>
-              <a:t>• Vesuv (Italien) – Konvergenzgrenze</a:t>
-            </a:r>
-          </a:p>
-          <a:p>
-            <a:pPr algn="l"/>
-            <a:r>
-              <a:rPr sz="1700" b="0">
-                <a:solidFill>
-                  <a:srgbClr val="FFFFFF"/>
-                </a:solidFill>
-              </a:rPr>
-              <a:t>• Eyjafjallajökull (Island) – Divergenz</a:t>
-            </a:r>
-          </a:p>
-          <a:p>
-            <a:pPr algn="l"/>
-            <a:r>
-              <a:rPr sz="1700" b="0">
-                <a:solidFill>
-                  <a:srgbClr val="FFFFFF"/>
-                </a:solidFill>
-              </a:rPr>
-              <a:t>• Erdbeben Japan 2011 – Subduktion</a:t>
-            </a:r>
-          </a:p>
-          <a:p>
-            <a:pPr algn="l"/>
-            <a:r>
-              <a:rPr sz="1700" b="0">
-                <a:solidFill>
-                  <a:srgbClr val="FFFFFF"/>
-                </a:solidFill>
-              </a:rPr>
-              <a:t>• Himalaya – Indien trifft Eurasien</a:t>
-            </a:r>
-          </a:p>
-          <a:p>
-            <a:pPr algn="l"/>
-            <a:r>
-              <a:rPr sz="1700" b="0">
-                <a:solidFill>
-                  <a:srgbClr val="FFFFFF"/>
-                </a:solidFill>
-              </a:rPr>
-              <a:t>• Pazifischer Feuerring – ~90% Beben</a:t>
+            <a:pPr algn="ctr"/>
+            <a:r>
+              <a:rPr sz="1500" b="0" i="1">
+                <a:solidFill>
+                  <a:srgbClr val="94A3B8"/>
+                </a:solidFill>
+              </a:rPr>
+              <a:t>📷  Bild: Vulkan / Erdbeben</a:t>
             </a:r>
           </a:p>
         </p:txBody>
@@ -11704,8 +12521,8 @@
         </p:nvSpPr>
         <p:spPr>
           <a:xfrm>
-            <a:off x="228600" y="73152"/>
-            <a:ext cx="9144000" cy="822960"/>
+            <a:off x="228600" y="91440"/>
+            <a:ext cx="8686800" cy="822960"/>
           </a:xfrm>
           <a:prstGeom prst="rect">
             <a:avLst/>
@@ -11720,12 +12537,12 @@
           <a:p>
             <a:pPr algn="l"/>
             <a:r>
-              <a:rPr sz="3200" b="1" i="0">
+              <a:rPr sz="3000" b="1" i="0">
                 <a:solidFill>
                   <a:srgbClr val="FFFFFF"/>
                 </a:solidFill>
               </a:rPr>
-              <a:t>🌿  Bedeutung des Erdaufbaus für das Leben</a:t>
+              <a:t>🌿  Bedeutung für das Leben</a:t>
             </a:r>
           </a:p>
         </p:txBody>
@@ -11738,8 +12555,8 @@
         </p:nvSpPr>
         <p:spPr>
           <a:xfrm>
-            <a:off x="10058400" y="228600"/>
-            <a:ext cx="1920240" cy="548640"/>
+            <a:off x="9601200" y="256032"/>
+            <a:ext cx="2377440" cy="457200"/>
           </a:xfrm>
           <a:prstGeom prst="rect">
             <a:avLst/>
@@ -11754,7 +12571,7 @@
           <a:p>
             <a:pPr algn="r"/>
             <a:r>
-              <a:rPr sz="1400" b="1" i="0">
+              <a:rPr sz="1300" b="1" i="0">
                 <a:solidFill>
                   <a:srgbClr val="4ADE80"/>
                 </a:solidFill>
@@ -11815,8 +12632,8 @@
         </p:nvSpPr>
         <p:spPr>
           <a:xfrm>
-            <a:off x="274320" y="1188720"/>
-            <a:ext cx="5577840" cy="2468880"/>
+            <a:off x="274320" y="1143000"/>
+            <a:ext cx="6949440" cy="2651760"/>
           </a:xfrm>
           <a:prstGeom prst="rect">
             <a:avLst/>
@@ -11858,8 +12675,8 @@
         </p:nvSpPr>
         <p:spPr>
           <a:xfrm>
-            <a:off x="274320" y="1188720"/>
-            <a:ext cx="54864" cy="2468880"/>
+            <a:off x="274320" y="1143000"/>
+            <a:ext cx="54864" cy="2651760"/>
           </a:xfrm>
           <a:prstGeom prst="rect">
             <a:avLst/>
@@ -11901,8 +12718,8 @@
         </p:nvSpPr>
         <p:spPr>
           <a:xfrm>
-            <a:off x="411479" y="1298448"/>
-            <a:ext cx="5349240" cy="347472"/>
+            <a:off x="411479" y="1234440"/>
+            <a:ext cx="6720840" cy="347472"/>
           </a:xfrm>
           <a:prstGeom prst="rect">
             <a:avLst/>
@@ -11917,12 +12734,12 @@
           <a:p>
             <a:pPr algn="l"/>
             <a:r>
-              <a:rPr sz="1500" b="1" i="0">
+              <a:rPr sz="1400" b="1" i="0">
                 <a:solidFill>
                   <a:srgbClr val="C084FC"/>
                 </a:solidFill>
               </a:rPr>
-              <a:t>Magnetfeld schützt das Leben</a:t>
+              <a:t>Magnetfeld &amp; Schutz</a:t>
             </a:r>
           </a:p>
         </p:txBody>
@@ -11935,8 +12752,8 @@
         </p:nvSpPr>
         <p:spPr>
           <a:xfrm>
-            <a:off x="411479" y="1664208"/>
-            <a:ext cx="5349240" cy="1901952"/>
+            <a:off x="411479" y="1600200"/>
+            <a:ext cx="6720840" cy="2103120"/>
           </a:xfrm>
           <a:prstGeom prst="rect">
             <a:avLst/>
@@ -11951,56 +12768,45 @@
           <a:p>
             <a:pPr algn="l"/>
             <a:r>
-              <a:rPr sz="1700" b="0">
+              <a:rPr sz="1500" b="0">
                 <a:solidFill>
                   <a:srgbClr val="FFFFFF"/>
                 </a:solidFill>
               </a:rPr>
-              <a:t>• Äußerer Kern erzeugt Magnetfeld</a:t>
+              <a:t>• Erdkern erzeugt Magnetfeld</a:t>
             </a:r>
           </a:p>
           <a:p>
             <a:pPr algn="l"/>
             <a:r>
-              <a:rPr sz="1700" b="0">
+              <a:rPr sz="1500" b="0">
                 <a:solidFill>
                   <a:srgbClr val="FFFFFF"/>
                 </a:solidFill>
               </a:rPr>
-              <a:t>• Magnetfeld hält Sonnenwind ab</a:t>
+              <a:t>• Schützt vor gefährlichem Sonnenwind</a:t>
             </a:r>
           </a:p>
           <a:p>
             <a:pPr algn="l"/>
             <a:r>
-              <a:rPr sz="1700" b="0">
+              <a:rPr sz="1500" b="0">
                 <a:solidFill>
                   <a:srgbClr val="FFFFFF"/>
                 </a:solidFill>
               </a:rPr>
-              <a:t>• Ohne Magnetfeld: Atmosphäre wäre</a:t>
+              <a:t>• Ohne Magnetfeld → keine Atmosphäre</a:t>
             </a:r>
           </a:p>
           <a:p>
             <a:pPr algn="l"/>
             <a:r>
-              <a:rPr sz="1700" b="0">
+              <a:rPr sz="1500" b="0">
                 <a:solidFill>
                   <a:srgbClr val="FFFFFF"/>
                 </a:solidFill>
               </a:rPr>
-              <a:t>  weggepustet wie bei Mars</a:t>
-            </a:r>
-          </a:p>
-          <a:p>
-            <a:pPr algn="l"/>
-            <a:r>
-              <a:rPr sz="1700" b="0">
-                <a:solidFill>
-                  <a:srgbClr val="FFFFFF"/>
-                </a:solidFill>
-              </a:rPr>
-              <a:t>• → Kein Leben ohne Erdkern!</a:t>
+              <a:t>• → Kein Leben möglich (wie auf dem Mars)</a:t>
             </a:r>
           </a:p>
         </p:txBody>
@@ -12013,8 +12819,8 @@
         </p:nvSpPr>
         <p:spPr>
           <a:xfrm>
-            <a:off x="6035040" y="1188720"/>
-            <a:ext cx="5852160" cy="2468880"/>
+            <a:off x="274320" y="3931920"/>
+            <a:ext cx="6949440" cy="2651760"/>
           </a:xfrm>
           <a:prstGeom prst="rect">
             <a:avLst/>
@@ -12056,14 +12862,14 @@
         </p:nvSpPr>
         <p:spPr>
           <a:xfrm>
-            <a:off x="6035040" y="1188720"/>
-            <a:ext cx="54864" cy="2468880"/>
-          </a:xfrm>
-          <a:prstGeom prst="rect">
-            <a:avLst/>
-          </a:prstGeom>
-          <a:solidFill>
-            <a:srgbClr val="FB923C"/>
+            <a:off x="274320" y="3931920"/>
+            <a:ext cx="54864" cy="2651760"/>
+          </a:xfrm>
+          <a:prstGeom prst="rect">
+            <a:avLst/>
+          </a:prstGeom>
+          <a:solidFill>
+            <a:srgbClr val="4ADE80"/>
           </a:solidFill>
           <a:ln>
             <a:noFill/>
@@ -12099,8 +12905,8 @@
         </p:nvSpPr>
         <p:spPr>
           <a:xfrm>
-            <a:off x="6172200" y="1298448"/>
-            <a:ext cx="5623560" cy="347472"/>
+            <a:off x="411479" y="4023359"/>
+            <a:ext cx="6720840" cy="347472"/>
           </a:xfrm>
           <a:prstGeom prst="rect">
             <a:avLst/>
@@ -12115,12 +12921,12 @@
           <a:p>
             <a:pPr algn="l"/>
             <a:r>
-              <a:rPr sz="1500" b="1" i="0">
-                <a:solidFill>
-                  <a:srgbClr val="FB923C"/>
-                </a:solidFill>
-              </a:rPr>
-              <a:t>Wärme &amp; Energie</a:t>
+              <a:rPr sz="1400" b="1" i="0">
+                <a:solidFill>
+                  <a:srgbClr val="4ADE80"/>
+                </a:solidFill>
+              </a:rPr>
+              <a:t>Wärme, Energie &amp; Lebensgrundlagen</a:t>
             </a:r>
           </a:p>
         </p:txBody>
@@ -12133,8 +12939,8 @@
         </p:nvSpPr>
         <p:spPr>
           <a:xfrm>
-            <a:off x="6172200" y="1664208"/>
-            <a:ext cx="5623560" cy="1901952"/>
+            <a:off x="411479" y="4389120"/>
+            <a:ext cx="6720840" cy="2103120"/>
           </a:xfrm>
           <a:prstGeom prst="rect">
             <a:avLst/>
@@ -12149,56 +12955,45 @@
           <a:p>
             <a:pPr algn="l"/>
             <a:r>
-              <a:rPr sz="1700" b="0">
+              <a:rPr sz="1500" b="0">
                 <a:solidFill>
                   <a:srgbClr val="FFFFFF"/>
                 </a:solidFill>
               </a:rPr>
-              <a:t>• Erdinneres gibt Wärme ab</a:t>
+              <a:t>• Geothermie: nutzbare Erdwärme</a:t>
             </a:r>
           </a:p>
           <a:p>
             <a:pPr algn="l"/>
             <a:r>
-              <a:rPr sz="1700" b="0">
+              <a:rPr sz="1500" b="0">
                 <a:solidFill>
                   <a:srgbClr val="FFFFFF"/>
                 </a:solidFill>
               </a:rPr>
-              <a:t>• Geothermie: nutzbare Energie</a:t>
+              <a:t>• Vulkane → fruchtbarer Boden</a:t>
             </a:r>
           </a:p>
           <a:p>
             <a:pPr algn="l"/>
             <a:r>
-              <a:rPr sz="1700" b="0">
+              <a:rPr sz="1500" b="0">
                 <a:solidFill>
                   <a:srgbClr val="FFFFFF"/>
                 </a:solidFill>
               </a:rPr>
-              <a:t>• Vulkane: fruchtbarer Boden</a:t>
+              <a:t>• Gebirge durch Platten → Wasser &amp; Klima</a:t>
             </a:r>
           </a:p>
           <a:p>
             <a:pPr algn="l"/>
             <a:r>
-              <a:rPr sz="1700" b="0">
+              <a:rPr sz="1500" b="0">
                 <a:solidFill>
                   <a:srgbClr val="FFFFFF"/>
                 </a:solidFill>
               </a:rPr>
-              <a:t>• Mineralien &amp; Rohstoffe entstehen</a:t>
-            </a:r>
-          </a:p>
-          <a:p>
-            <a:pPr algn="l"/>
-            <a:r>
-              <a:rPr sz="1700" b="0">
-                <a:solidFill>
-                  <a:srgbClr val="FFFFFF"/>
-                </a:solidFill>
-              </a:rPr>
-              <a:t>  durch geologische Prozesse</a:t>
+              <a:t>• Kohlenstoffkreislauf durch Tektonik</a:t>
             </a:r>
           </a:p>
         </p:txBody>
@@ -12211,14 +13006,14 @@
         </p:nvSpPr>
         <p:spPr>
           <a:xfrm>
-            <a:off x="274320" y="3840480"/>
-            <a:ext cx="5577840" cy="2560320"/>
-          </a:xfrm>
-          <a:prstGeom prst="rect">
-            <a:avLst/>
-          </a:prstGeom>
-          <a:solidFill>
-            <a:srgbClr val="0F233D"/>
+            <a:off x="7360920" y="1143000"/>
+            <a:ext cx="4572000" cy="5486400"/>
+          </a:xfrm>
+          <a:prstGeom prst="rect">
+            <a:avLst/>
+          </a:prstGeom>
+          <a:solidFill>
+            <a:srgbClr val="0D1E35"/>
           </a:solidFill>
           <a:ln>
             <a:noFill/>
@@ -12254,51 +13049,180 @@
         </p:nvSpPr>
         <p:spPr>
           <a:xfrm>
-            <a:off x="274320" y="3840480"/>
-            <a:ext cx="54864" cy="2560320"/>
-          </a:xfrm>
-          <a:prstGeom prst="rect">
-            <a:avLst/>
-          </a:prstGeom>
-          <a:solidFill>
-            <a:srgbClr val="4ADE80"/>
-          </a:solidFill>
-          <a:ln>
-            <a:noFill/>
-          </a:ln>
-        </p:spPr>
-        <p:style>
-          <a:lnRef idx="1">
-            <a:schemeClr val="accent1"/>
-          </a:lnRef>
-          <a:fillRef idx="3">
-            <a:schemeClr val="accent1"/>
-          </a:fillRef>
-          <a:effectRef idx="2">
-            <a:schemeClr val="accent1"/>
-          </a:effectRef>
-          <a:fontRef idx="minor">
-            <a:schemeClr val="lt1"/>
-          </a:fontRef>
-        </p:style>
-        <p:txBody>
-          <a:bodyPr rtlCol="0" anchor="ctr"/>
-          <a:lstStyle/>
-          <a:p>
-            <a:pPr algn="ctr"/>
-          </a:p>
-        </p:txBody>
-      </p:sp>
-      <p:sp>
-        <p:nvSpPr>
-          <p:cNvPr id="18" name="TextBox 17"/>
+            <a:off x="7360920" y="1143000"/>
+            <a:ext cx="4572000" cy="36576"/>
+          </a:xfrm>
+          <a:prstGeom prst="rect">
+            <a:avLst/>
+          </a:prstGeom>
+          <a:solidFill>
+            <a:srgbClr val="94A3B8"/>
+          </a:solidFill>
+          <a:ln>
+            <a:noFill/>
+          </a:ln>
+        </p:spPr>
+        <p:style>
+          <a:lnRef idx="1">
+            <a:schemeClr val="accent1"/>
+          </a:lnRef>
+          <a:fillRef idx="3">
+            <a:schemeClr val="accent1"/>
+          </a:fillRef>
+          <a:effectRef idx="2">
+            <a:schemeClr val="accent1"/>
+          </a:effectRef>
+          <a:fontRef idx="minor">
+            <a:schemeClr val="lt1"/>
+          </a:fontRef>
+        </p:style>
+        <p:txBody>
+          <a:bodyPr rtlCol="0" anchor="ctr"/>
+          <a:lstStyle/>
+          <a:p>
+            <a:pPr algn="ctr"/>
+          </a:p>
+        </p:txBody>
+      </p:sp>
+      <p:sp>
+        <p:nvSpPr>
+          <p:cNvPr id="18" name="Rectangle 17"/>
+          <p:cNvSpPr/>
+          <p:nvPr/>
+        </p:nvSpPr>
+        <p:spPr>
+          <a:xfrm>
+            <a:off x="7360920" y="6592824"/>
+            <a:ext cx="4572000" cy="36576"/>
+          </a:xfrm>
+          <a:prstGeom prst="rect">
+            <a:avLst/>
+          </a:prstGeom>
+          <a:solidFill>
+            <a:srgbClr val="94A3B8"/>
+          </a:solidFill>
+          <a:ln>
+            <a:noFill/>
+          </a:ln>
+        </p:spPr>
+        <p:style>
+          <a:lnRef idx="1">
+            <a:schemeClr val="accent1"/>
+          </a:lnRef>
+          <a:fillRef idx="3">
+            <a:schemeClr val="accent1"/>
+          </a:fillRef>
+          <a:effectRef idx="2">
+            <a:schemeClr val="accent1"/>
+          </a:effectRef>
+          <a:fontRef idx="minor">
+            <a:schemeClr val="lt1"/>
+          </a:fontRef>
+        </p:style>
+        <p:txBody>
+          <a:bodyPr rtlCol="0" anchor="ctr"/>
+          <a:lstStyle/>
+          <a:p>
+            <a:pPr algn="ctr"/>
+          </a:p>
+        </p:txBody>
+      </p:sp>
+      <p:sp>
+        <p:nvSpPr>
+          <p:cNvPr id="19" name="Rectangle 18"/>
+          <p:cNvSpPr/>
+          <p:nvPr/>
+        </p:nvSpPr>
+        <p:spPr>
+          <a:xfrm>
+            <a:off x="7360920" y="1143000"/>
+            <a:ext cx="36576" cy="5486400"/>
+          </a:xfrm>
+          <a:prstGeom prst="rect">
+            <a:avLst/>
+          </a:prstGeom>
+          <a:solidFill>
+            <a:srgbClr val="94A3B8"/>
+          </a:solidFill>
+          <a:ln>
+            <a:noFill/>
+          </a:ln>
+        </p:spPr>
+        <p:style>
+          <a:lnRef idx="1">
+            <a:schemeClr val="accent1"/>
+          </a:lnRef>
+          <a:fillRef idx="3">
+            <a:schemeClr val="accent1"/>
+          </a:fillRef>
+          <a:effectRef idx="2">
+            <a:schemeClr val="accent1"/>
+          </a:effectRef>
+          <a:fontRef idx="minor">
+            <a:schemeClr val="lt1"/>
+          </a:fontRef>
+        </p:style>
+        <p:txBody>
+          <a:bodyPr rtlCol="0" anchor="ctr"/>
+          <a:lstStyle/>
+          <a:p>
+            <a:pPr algn="ctr"/>
+          </a:p>
+        </p:txBody>
+      </p:sp>
+      <p:sp>
+        <p:nvSpPr>
+          <p:cNvPr id="20" name="Rectangle 19"/>
+          <p:cNvSpPr/>
+          <p:nvPr/>
+        </p:nvSpPr>
+        <p:spPr>
+          <a:xfrm>
+            <a:off x="11896344" y="1143000"/>
+            <a:ext cx="36576" cy="5486400"/>
+          </a:xfrm>
+          <a:prstGeom prst="rect">
+            <a:avLst/>
+          </a:prstGeom>
+          <a:solidFill>
+            <a:srgbClr val="94A3B8"/>
+          </a:solidFill>
+          <a:ln>
+            <a:noFill/>
+          </a:ln>
+        </p:spPr>
+        <p:style>
+          <a:lnRef idx="1">
+            <a:schemeClr val="accent1"/>
+          </a:lnRef>
+          <a:fillRef idx="3">
+            <a:schemeClr val="accent1"/>
+          </a:fillRef>
+          <a:effectRef idx="2">
+            <a:schemeClr val="accent1"/>
+          </a:effectRef>
+          <a:fontRef idx="minor">
+            <a:schemeClr val="lt1"/>
+          </a:fontRef>
+        </p:style>
+        <p:txBody>
+          <a:bodyPr rtlCol="0" anchor="ctr"/>
+          <a:lstStyle/>
+          <a:p>
+            <a:pPr algn="ctr"/>
+          </a:p>
+        </p:txBody>
+      </p:sp>
+      <p:sp>
+        <p:nvSpPr>
+          <p:cNvPr id="21" name="TextBox 20"/>
           <p:cNvSpPr txBox="1"/>
           <p:nvPr/>
         </p:nvSpPr>
         <p:spPr>
           <a:xfrm>
-            <a:off x="411479" y="3950208"/>
-            <a:ext cx="5349240" cy="347472"/>
+            <a:off x="7360920" y="3611880"/>
+            <a:ext cx="4572000" cy="548640"/>
           </a:xfrm>
           <a:prstGeom prst="rect">
             <a:avLst/>
@@ -12311,312 +13235,14 @@
           </a:bodyPr>
           <a:lstStyle/>
           <a:p>
-            <a:pPr algn="l"/>
-            <a:r>
-              <a:rPr sz="1500" b="1" i="0">
-                <a:solidFill>
-                  <a:srgbClr val="4ADE80"/>
-                </a:solidFill>
-              </a:rPr>
-              <a:t>Plattentektonik &amp; Lebensgrundlagen</a:t>
-            </a:r>
-          </a:p>
-        </p:txBody>
-      </p:sp>
-      <p:sp>
-        <p:nvSpPr>
-          <p:cNvPr id="19" name="TextBox 18"/>
-          <p:cNvSpPr txBox="1"/>
-          <p:nvPr/>
-        </p:nvSpPr>
-        <p:spPr>
-          <a:xfrm>
-            <a:off x="411479" y="4315968"/>
-            <a:ext cx="5349240" cy="1993391"/>
-          </a:xfrm>
-          <a:prstGeom prst="rect">
-            <a:avLst/>
-          </a:prstGeom>
-          <a:noFill/>
-        </p:spPr>
-        <p:txBody>
-          <a:bodyPr wrap="square">
-            <a:spAutoFit/>
-          </a:bodyPr>
-          <a:lstStyle/>
-          <a:p>
-            <a:pPr algn="l"/>
-            <a:r>
-              <a:rPr sz="1700" b="0">
-                <a:solidFill>
-                  <a:srgbClr val="FFFFFF"/>
-                </a:solidFill>
-              </a:rPr>
-              <a:t>• Gebirge durch Plattenbewegung</a:t>
-            </a:r>
-          </a:p>
-          <a:p>
-            <a:pPr algn="l"/>
-            <a:r>
-              <a:rPr sz="1700" b="0">
-                <a:solidFill>
-                  <a:srgbClr val="FFFFFF"/>
-                </a:solidFill>
-              </a:rPr>
-              <a:t>  → Regen, Flüsse, Trinkwasser</a:t>
-            </a:r>
-          </a:p>
-          <a:p>
-            <a:pPr algn="l"/>
-            <a:r>
-              <a:rPr sz="1700" b="0">
-                <a:solidFill>
-                  <a:srgbClr val="FFFFFF"/>
-                </a:solidFill>
-              </a:rPr>
-              <a:t>• Mineralreiche Böden durch Vulkane</a:t>
-            </a:r>
-          </a:p>
-          <a:p>
-            <a:pPr algn="l"/>
-            <a:r>
-              <a:rPr sz="1700" b="0">
-                <a:solidFill>
-                  <a:srgbClr val="FFFFFF"/>
-                </a:solidFill>
-              </a:rPr>
-              <a:t>• Kohlenstoffkreislauf durch</a:t>
-            </a:r>
-          </a:p>
-          <a:p>
-            <a:pPr algn="l"/>
-            <a:r>
-              <a:rPr sz="1700" b="0">
-                <a:solidFill>
-                  <a:srgbClr val="FFFFFF"/>
-                </a:solidFill>
-              </a:rPr>
-              <a:t>  tektonische Prozesse reguliert</a:t>
-            </a:r>
-          </a:p>
-          <a:p>
-            <a:pPr algn="l"/>
-            <a:r>
-              <a:rPr sz="1700" b="0">
-                <a:solidFill>
-                  <a:srgbClr val="FFFFFF"/>
-                </a:solidFill>
-              </a:rPr>
-              <a:t>• → Stabiles Klima für Leben</a:t>
-            </a:r>
-          </a:p>
-        </p:txBody>
-      </p:sp>
-      <p:sp>
-        <p:nvSpPr>
-          <p:cNvPr id="20" name="Rectangle 19"/>
-          <p:cNvSpPr/>
-          <p:nvPr/>
-        </p:nvSpPr>
-        <p:spPr>
-          <a:xfrm>
-            <a:off x="6035040" y="3840480"/>
-            <a:ext cx="5852160" cy="2560320"/>
-          </a:xfrm>
-          <a:prstGeom prst="rect">
-            <a:avLst/>
-          </a:prstGeom>
-          <a:solidFill>
-            <a:srgbClr val="0F233D"/>
-          </a:solidFill>
-          <a:ln>
-            <a:noFill/>
-          </a:ln>
-        </p:spPr>
-        <p:style>
-          <a:lnRef idx="1">
-            <a:schemeClr val="accent1"/>
-          </a:lnRef>
-          <a:fillRef idx="3">
-            <a:schemeClr val="accent1"/>
-          </a:fillRef>
-          <a:effectRef idx="2">
-            <a:schemeClr val="accent1"/>
-          </a:effectRef>
-          <a:fontRef idx="minor">
-            <a:schemeClr val="lt1"/>
-          </a:fontRef>
-        </p:style>
-        <p:txBody>
-          <a:bodyPr rtlCol="0" anchor="ctr"/>
-          <a:lstStyle/>
-          <a:p>
-            <a:pPr algn="ctr"/>
-          </a:p>
-        </p:txBody>
-      </p:sp>
-      <p:sp>
-        <p:nvSpPr>
-          <p:cNvPr id="21" name="Rectangle 20"/>
-          <p:cNvSpPr/>
-          <p:nvPr/>
-        </p:nvSpPr>
-        <p:spPr>
-          <a:xfrm>
-            <a:off x="6035040" y="3840480"/>
-            <a:ext cx="54864" cy="2560320"/>
-          </a:xfrm>
-          <a:prstGeom prst="rect">
-            <a:avLst/>
-          </a:prstGeom>
-          <a:solidFill>
-            <a:srgbClr val="2DD4BF"/>
-          </a:solidFill>
-          <a:ln>
-            <a:noFill/>
-          </a:ln>
-        </p:spPr>
-        <p:style>
-          <a:lnRef idx="1">
-            <a:schemeClr val="accent1"/>
-          </a:lnRef>
-          <a:fillRef idx="3">
-            <a:schemeClr val="accent1"/>
-          </a:fillRef>
-          <a:effectRef idx="2">
-            <a:schemeClr val="accent1"/>
-          </a:effectRef>
-          <a:fontRef idx="minor">
-            <a:schemeClr val="lt1"/>
-          </a:fontRef>
-        </p:style>
-        <p:txBody>
-          <a:bodyPr rtlCol="0" anchor="ctr"/>
-          <a:lstStyle/>
-          <a:p>
-            <a:pPr algn="ctr"/>
-          </a:p>
-        </p:txBody>
-      </p:sp>
-      <p:sp>
-        <p:nvSpPr>
-          <p:cNvPr id="22" name="TextBox 21"/>
-          <p:cNvSpPr txBox="1"/>
-          <p:nvPr/>
-        </p:nvSpPr>
-        <p:spPr>
-          <a:xfrm>
-            <a:off x="6172200" y="3950208"/>
-            <a:ext cx="5623560" cy="347472"/>
-          </a:xfrm>
-          <a:prstGeom prst="rect">
-            <a:avLst/>
-          </a:prstGeom>
-          <a:noFill/>
-        </p:spPr>
-        <p:txBody>
-          <a:bodyPr wrap="square">
-            <a:spAutoFit/>
-          </a:bodyPr>
-          <a:lstStyle/>
-          <a:p>
-            <a:pPr algn="l"/>
-            <a:r>
-              <a:rPr sz="1500" b="1" i="0">
-                <a:solidFill>
-                  <a:srgbClr val="2DD4BF"/>
-                </a:solidFill>
-              </a:rPr>
-              <a:t>Zusammenfassung</a:t>
-            </a:r>
-          </a:p>
-        </p:txBody>
-      </p:sp>
-      <p:sp>
-        <p:nvSpPr>
-          <p:cNvPr id="23" name="TextBox 22"/>
-          <p:cNvSpPr txBox="1"/>
-          <p:nvPr/>
-        </p:nvSpPr>
-        <p:spPr>
-          <a:xfrm>
-            <a:off x="6172200" y="4315968"/>
-            <a:ext cx="5623560" cy="1993391"/>
-          </a:xfrm>
-          <a:prstGeom prst="rect">
-            <a:avLst/>
-          </a:prstGeom>
-          <a:noFill/>
-        </p:spPr>
-        <p:txBody>
-          <a:bodyPr wrap="square">
-            <a:spAutoFit/>
-          </a:bodyPr>
-          <a:lstStyle/>
-          <a:p>
-            <a:pPr algn="l"/>
-            <a:r>
-              <a:rPr sz="1700" b="0">
-                <a:solidFill>
-                  <a:srgbClr val="FFFFFF"/>
-                </a:solidFill>
-              </a:rPr>
-              <a:t>• Kruste  → Lebensraum &amp; Platten</a:t>
-            </a:r>
-          </a:p>
-          <a:p>
-            <a:pPr algn="l"/>
-            <a:r>
-              <a:rPr sz="1700" b="0">
-                <a:solidFill>
-                  <a:srgbClr val="FFFFFF"/>
-                </a:solidFill>
-              </a:rPr>
-              <a:t>• Mantel  → Konvektion &amp; Energie</a:t>
-            </a:r>
-          </a:p>
-          <a:p>
-            <a:pPr algn="l"/>
-            <a:r>
-              <a:rPr sz="1700" b="0">
-                <a:solidFill>
-                  <a:srgbClr val="FFFFFF"/>
-                </a:solidFill>
-              </a:rPr>
-              <a:t>• Äuß. Kern → Magnetfeld</a:t>
-            </a:r>
-          </a:p>
-          <a:p>
-            <a:pPr algn="l"/>
-            <a:r>
-              <a:rPr sz="1700" b="0">
-                <a:solidFill>
-                  <a:srgbClr val="FFFFFF"/>
-                </a:solidFill>
-              </a:rPr>
-              <a:t>• Inn. Kern → Stabilität</a:t>
-            </a:r>
-          </a:p>
-          <a:p>
-            <a:pPr algn="l"/>
-            <a:r>
-              <a:rPr sz="1700" b="0">
-                <a:solidFill>
-                  <a:srgbClr val="FFFFFF"/>
-                </a:solidFill>
-              </a:rPr>
-              <a:t>Merksatz: tiefer = heißer,</a:t>
-            </a:r>
-          </a:p>
-          <a:p>
-            <a:pPr algn="l"/>
-            <a:r>
-              <a:rPr sz="1700" b="0">
-                <a:solidFill>
-                  <a:srgbClr val="FFFFFF"/>
-                </a:solidFill>
-              </a:rPr>
-              <a:t>dichter, mehr Druck</a:t>
+            <a:pPr algn="ctr"/>
+            <a:r>
+              <a:rPr sz="1500" b="0" i="1">
+                <a:solidFill>
+                  <a:srgbClr val="94A3B8"/>
+                </a:solidFill>
+              </a:rPr>
+              <a:t>📷  Bild: Leben auf der Erde</a:t>
             </a:r>
           </a:p>
         </p:txBody>
